--- a/AI_companion_lecture.pptx
+++ b/AI_companion_lecture.pptx
@@ -18,6 +18,8 @@
     <p:sldId id="266" r:id="rId17"/>
     <p:sldId id="267" r:id="rId18"/>
     <p:sldId id="268" r:id="rId19"/>
+    <p:sldId id="269" r:id="rId20"/>
+    <p:sldId id="270" r:id="rId21"/>
   </p:sldIdLst>
   <p:sldSz cx="12191695" cy="6858000" type="screen4x3"/>
   <p:notesSz cx="6858000" cy="9144000"/>
@@ -3093,14 +3095,6 @@
 <file path=ppt/slides/slide1.xml><?xml version="1.0" encoding="utf-8"?>
 <p:sld xmlns:a="http://schemas.openxmlformats.org/drawingml/2006/main" xmlns:p="http://schemas.openxmlformats.org/presentationml/2006/main" xmlns:r="http://schemas.openxmlformats.org/officeDocument/2006/relationships">
   <p:cSld>
-    <p:bg>
-      <p:bgPr>
-        <a:solidFill>
-          <a:srgbClr val="0F172A"/>
-        </a:solidFill>
-        <a:effectLst/>
-      </p:bgPr>
-    </p:bg>
     <p:spTree>
       <p:nvGrpSpPr>
         <p:cNvPr id="1" name=""/>
@@ -3108,22 +3102,140 @@
         <p:nvPr/>
       </p:nvGrpSpPr>
       <p:grpSpPr/>
-      <p:sp>
-        <p:nvSpPr>
-          <p:cNvPr id="2" name="Rectangle 1"/>
+      <p:pic>
+        <p:nvPicPr>
+          <p:cNvPr id="2" name="Picture 1" descr="ai_ppt_cover_1783143233570.png"/>
+          <p:cNvPicPr>
+            <a:picLocks noChangeAspect="1"/>
+          </p:cNvPicPr>
+          <p:nvPr/>
+        </p:nvPicPr>
+        <p:blipFill>
+          <a:blip r:embed="rId2"/>
+          <a:stretch>
+            <a:fillRect/>
+          </a:stretch>
+        </p:blipFill>
+        <p:spPr>
+          <a:xfrm>
+            <a:off x="0" y="0"/>
+            <a:ext cx="12191695" cy="6858000"/>
+          </a:xfrm>
+          <a:prstGeom prst="rect">
+            <a:avLst/>
+          </a:prstGeom>
+        </p:spPr>
+      </p:pic>
+      <p:sp>
+        <p:nvSpPr>
+          <p:cNvPr id="3" name="TextBox 2"/>
+          <p:cNvSpPr txBox="1"/>
+          <p:nvPr/>
+        </p:nvSpPr>
+        <p:spPr>
+          <a:xfrm>
+            <a:off x="4572000" y="2011680"/>
+            <a:ext cx="6858000" cy="3657600"/>
+          </a:xfrm>
+          <a:prstGeom prst="rect">
+            <a:avLst/>
+          </a:prstGeom>
+          <a:noFill/>
+        </p:spPr>
+        <p:txBody>
+          <a:bodyPr wrap="square">
+            <a:spAutoFit/>
+          </a:bodyPr>
+          <a:lstStyle/>
+          <a:p>
+            <a:pPr>
+              <a:spcAft>
+                <a:spcPts val="2000"/>
+              </a:spcAft>
+              <a:defRPr sz="5600" b="1">
+                <a:solidFill>
+                  <a:srgbClr val="FFFFFF"/>
+                </a:solidFill>
+                <a:latin typeface="Malgun Gothic"/>
+              </a:defRPr>
+            </a:pPr>
+            <a:r>
+              <a:t>AI는 동반자다</a:t>
+            </a:r>
+          </a:p>
+          <a:p>
+            <a:pPr>
+              <a:defRPr sz="2400">
+                <a:solidFill>
+                  <a:srgbClr val="93C5FD"/>
+                </a:solidFill>
+                <a:latin typeface="Malgun Gothic"/>
+              </a:defRPr>
+            </a:pPr>
+            <a:r>
+              <a:t>AI를 생활 속에서 즐겁게 활용하는 방법</a:t>
+            </a:r>
+          </a:p>
+        </p:txBody>
+      </p:sp>
+    </p:spTree>
+  </p:cSld>
+  <p:clrMapOvr>
+    <a:masterClrMapping/>
+  </p:clrMapOvr>
+</p:sld>
+</file>
+
+<file path=ppt/slides/slide10.xml><?xml version="1.0" encoding="utf-8"?>
+<p:sld xmlns:a="http://schemas.openxmlformats.org/drawingml/2006/main" xmlns:p="http://schemas.openxmlformats.org/presentationml/2006/main" xmlns:r="http://schemas.openxmlformats.org/officeDocument/2006/relationships">
+  <p:cSld>
+    <p:spTree>
+      <p:nvGrpSpPr>
+        <p:cNvPr id="1" name=""/>
+        <p:cNvGrpSpPr/>
+        <p:nvPr/>
+      </p:nvGrpSpPr>
+      <p:grpSpPr/>
+      <p:pic>
+        <p:nvPicPr>
+          <p:cNvPr id="2" name="Picture 1" descr="ai_ppt_bg_1783143682050.png"/>
+          <p:cNvPicPr>
+            <a:picLocks noChangeAspect="1"/>
+          </p:cNvPicPr>
+          <p:nvPr/>
+        </p:nvPicPr>
+        <p:blipFill>
+          <a:blip r:embed="rId2"/>
+          <a:stretch>
+            <a:fillRect/>
+          </a:stretch>
+        </p:blipFill>
+        <p:spPr>
+          <a:xfrm>
+            <a:off x="0" y="0"/>
+            <a:ext cx="12191695" cy="6858000"/>
+          </a:xfrm>
+          <a:prstGeom prst="rect">
+            <a:avLst/>
+          </a:prstGeom>
+        </p:spPr>
+      </p:pic>
+      <p:sp>
+        <p:nvSpPr>
+          <p:cNvPr id="3" name="Rectangle 2"/>
           <p:cNvSpPr/>
           <p:nvPr/>
         </p:nvSpPr>
         <p:spPr>
           <a:xfrm>
-            <a:off x="731520" y="2011680"/>
-            <a:ext cx="731520" cy="137160"/>
+            <a:off x="731520" y="548640"/>
+            <a:ext cx="109728" cy="731520"/>
           </a:xfrm>
           <a:prstGeom prst="rect">
             <a:avLst/>
           </a:prstGeom>
           <a:solidFill>
-            <a:srgbClr val="2563EB"/>
+            <a:srgbClr val="22D3EE"/>
           </a:solidFill>
           <a:ln>
             <a:noFill/>
@@ -3153,14 +3265,14 @@
       </p:sp>
       <p:sp>
         <p:nvSpPr>
-          <p:cNvPr id="3" name="TextBox 2"/>
+          <p:cNvPr id="4" name="TextBox 3"/>
           <p:cNvSpPr txBox="1"/>
           <p:nvPr/>
         </p:nvSpPr>
         <p:spPr>
           <a:xfrm>
-            <a:off x="731520" y="2286000"/>
-            <a:ext cx="10515600" cy="2743200"/>
+            <a:off x="1005840" y="457200"/>
+            <a:ext cx="10058400" cy="914400"/>
           </a:xfrm>
           <a:prstGeom prst="rect">
             <a:avLst/>
@@ -3168,37 +3280,160 @@
           <a:noFill/>
         </p:spPr>
         <p:txBody>
+          <a:bodyPr wrap="square" lIns="0" rIns="0" tIns="0" bIns="0">
+            <a:spAutoFit/>
+          </a:bodyPr>
+          <a:lstStyle/>
+          <a:p>
+            <a:pPr>
+              <a:defRPr sz="3200" b="1">
+                <a:solidFill>
+                  <a:srgbClr val="FFFFFF"/>
+                </a:solidFill>
+                <a:latin typeface="Malgun Gothic"/>
+              </a:defRPr>
+            </a:pPr>
+            <a:r>
+              <a:t>🛠️ 4. AI 활용 실습 (생활밀착형)</a:t>
+            </a:r>
+          </a:p>
+        </p:txBody>
+      </p:sp>
+      <p:sp>
+        <p:nvSpPr>
+          <p:cNvPr id="5" name="TextBox 4"/>
+          <p:cNvSpPr txBox="1"/>
+          <p:nvPr/>
+        </p:nvSpPr>
+        <p:spPr>
+          <a:xfrm>
+            <a:off x="914400" y="1828800"/>
+            <a:ext cx="10332720" cy="4114800"/>
+          </a:xfrm>
+          <a:prstGeom prst="rect">
+            <a:avLst/>
+          </a:prstGeom>
+          <a:noFill/>
+        </p:spPr>
+        <p:txBody>
           <a:bodyPr wrap="square">
             <a:spAutoFit/>
           </a:bodyPr>
           <a:lstStyle/>
           <a:p>
             <a:pPr>
-              <a:spcAft>
-                <a:spcPts val="2000"/>
-              </a:spcAft>
-              <a:defRPr sz="5600" b="1">
-                <a:solidFill>
-                  <a:srgbClr val="FFFFFF"/>
-                </a:solidFill>
-                <a:latin typeface="Malgun Gothic"/>
-              </a:defRPr>
-            </a:pPr>
-            <a:r>
-              <a:t>AI는 동반자다</a:t>
+              <a:lnSpc>
+                <a:spcPct val="120000"/>
+              </a:lnSpc>
+              <a:spcAft>
+                <a:spcPts val="800"/>
+              </a:spcAft>
+              <a:defRPr>
+                <a:latin typeface="Malgun Gothic"/>
+              </a:defRPr>
+            </a:pPr>
+            <a:r>
+              <a:rPr b="1" sz="2000">
+                <a:solidFill>
+                  <a:srgbClr val="93C5FD"/>
+                </a:solidFill>
+              </a:rPr>
+              <a:t>실습 1. Suno AI로 노래 만들기 </a:t>
+            </a:r>
+            <a:r>
+              <a:rPr sz="1800">
+                <a:solidFill>
+                  <a:srgbClr val="CBD5E1"/>
+                </a:solidFill>
+              </a:rPr>
+              <a:t>음악 작사/작곡 메타 정보를 이용한 댄스곡 창작 실습 (RCTF)</a:t>
             </a:r>
           </a:p>
           <a:p>
             <a:pPr>
-              <a:defRPr sz="2400">
-                <a:solidFill>
-                  <a:srgbClr val="DBEAFE"/>
-                </a:solidFill>
-                <a:latin typeface="Malgun Gothic"/>
-              </a:defRPr>
-            </a:pPr>
-            <a:r>
-              <a:t>AI를 생활 속에서 즐겁게 활용하는 방법</a:t>
+              <a:lnSpc>
+                <a:spcPct val="120000"/>
+              </a:lnSpc>
+              <a:spcAft>
+                <a:spcPts val="800"/>
+              </a:spcAft>
+              <a:defRPr>
+                <a:latin typeface="Malgun Gothic"/>
+              </a:defRPr>
+            </a:pPr>
+            <a:r>
+              <a:rPr b="1" sz="2000">
+                <a:solidFill>
+                  <a:srgbClr val="93C5FD"/>
+                </a:solidFill>
+              </a:rPr>
+              <a:t>실습 2. 백종원 스타일 냉장고 털이 레시피 </a:t>
+            </a:r>
+            <a:r>
+              <a:rPr sz="1800">
+                <a:solidFill>
+                  <a:srgbClr val="CBD5E1"/>
+                </a:solidFill>
+              </a:rPr>
+              <a:t>냉장고 속 남은 재료 맞춤형 3단계 레시피 짜기 (R-C-T-F)</a:t>
+            </a:r>
+          </a:p>
+          <a:p>
+            <a:pPr>
+              <a:lnSpc>
+                <a:spcPct val="120000"/>
+              </a:lnSpc>
+              <a:spcAft>
+                <a:spcPts val="800"/>
+              </a:spcAft>
+              <a:defRPr>
+                <a:latin typeface="Malgun Gothic"/>
+              </a:defRPr>
+            </a:pPr>
+            <a:r>
+              <a:rPr b="1" sz="2000">
+                <a:solidFill>
+                  <a:srgbClr val="93C5FD"/>
+                </a:solidFill>
+              </a:rPr>
+              <a:t>실습 3. 자녀 수학 숙제 캐리하기 </a:t>
+            </a:r>
+            <a:r>
+              <a:rPr sz="1800">
+                <a:solidFill>
+                  <a:srgbClr val="CBD5E1"/>
+                </a:solidFill>
+              </a:rPr>
+              <a:t>통분과 최소공배수 개념을 가르치는 친절한 설명 및 음성(TTS)용 멘트 작성 (COT)</a:t>
+            </a:r>
+          </a:p>
+          <a:p>
+            <a:pPr>
+              <a:lnSpc>
+                <a:spcPct val="120000"/>
+              </a:lnSpc>
+              <a:spcAft>
+                <a:spcPts val="800"/>
+              </a:spcAft>
+              <a:defRPr>
+                <a:latin typeface="Malgun Gothic"/>
+              </a:defRPr>
+            </a:pPr>
+            <a:r>
+              <a:rPr b="1" sz="2000">
+                <a:solidFill>
+                  <a:srgbClr val="93C5FD"/>
+                </a:solidFill>
+              </a:rPr>
+              <a:t>실습 5. 중고등학생 축제/동아리 기획서 짜기 </a:t>
+            </a:r>
+            <a:r>
+              <a:rPr sz="1800">
+                <a:solidFill>
+                  <a:srgbClr val="CBD5E1"/>
+                </a:solidFill>
+              </a:rPr>
+              <a:t>AI와 다단계 검증 및 질의응답 피드백을 통해 최종 기획서 PPTX 완성 (바이브 코딩)</a:t>
             </a:r>
           </a:p>
         </p:txBody>
@@ -3211,17 +3446,9 @@
 </p:sld>
 </file>
 
-<file path=ppt/slides/slide10.xml><?xml version="1.0" encoding="utf-8"?>
+<file path=ppt/slides/slide11.xml><?xml version="1.0" encoding="utf-8"?>
 <p:sld xmlns:a="http://schemas.openxmlformats.org/drawingml/2006/main" xmlns:p="http://schemas.openxmlformats.org/presentationml/2006/main" xmlns:r="http://schemas.openxmlformats.org/officeDocument/2006/relationships">
   <p:cSld>
-    <p:bg>
-      <p:bgPr>
-        <a:solidFill>
-          <a:srgbClr val="F8FAFC"/>
-        </a:solidFill>
-        <a:effectLst/>
-      </p:bgPr>
-    </p:bg>
     <p:spTree>
       <p:nvGrpSpPr>
         <p:cNvPr id="1" name=""/>
@@ -3229,9 +3456,33 @@
         <p:nvPr/>
       </p:nvGrpSpPr>
       <p:grpSpPr/>
-      <p:sp>
-        <p:nvSpPr>
-          <p:cNvPr id="2" name="Rectangle 1"/>
+      <p:pic>
+        <p:nvPicPr>
+          <p:cNvPr id="2" name="Picture 1" descr="ai_ppt_bg_1783143682050.png"/>
+          <p:cNvPicPr>
+            <a:picLocks noChangeAspect="1"/>
+          </p:cNvPicPr>
+          <p:nvPr/>
+        </p:nvPicPr>
+        <p:blipFill>
+          <a:blip r:embed="rId2"/>
+          <a:stretch>
+            <a:fillRect/>
+          </a:stretch>
+        </p:blipFill>
+        <p:spPr>
+          <a:xfrm>
+            <a:off x="0" y="0"/>
+            <a:ext cx="12191695" cy="6858000"/>
+          </a:xfrm>
+          <a:prstGeom prst="rect">
+            <a:avLst/>
+          </a:prstGeom>
+        </p:spPr>
+      </p:pic>
+      <p:sp>
+        <p:nvSpPr>
+          <p:cNvPr id="3" name="Rectangle 2"/>
           <p:cNvSpPr/>
           <p:nvPr/>
         </p:nvSpPr>
@@ -3244,7 +3495,7 @@
             <a:avLst/>
           </a:prstGeom>
           <a:solidFill>
-            <a:srgbClr val="2563EB"/>
+            <a:srgbClr val="22D3EE"/>
           </a:solidFill>
           <a:ln>
             <a:noFill/>
@@ -3274,7 +3525,7 @@
       </p:sp>
       <p:sp>
         <p:nvSpPr>
-          <p:cNvPr id="3" name="TextBox 2"/>
+          <p:cNvPr id="4" name="TextBox 3"/>
           <p:cNvSpPr txBox="1"/>
           <p:nvPr/>
         </p:nvSpPr>
@@ -3297,7 +3548,7 @@
             <a:pPr>
               <a:defRPr sz="3200" b="1">
                 <a:solidFill>
-                  <a:srgbClr val="0F172A"/>
+                  <a:srgbClr val="FFFFFF"/>
                 </a:solidFill>
                 <a:latin typeface="Malgun Gothic"/>
               </a:defRPr>
@@ -3310,7 +3561,7 @@
       </p:sp>
       <p:sp>
         <p:nvSpPr>
-          <p:cNvPr id="4" name="TextBox 3"/>
+          <p:cNvPr id="5" name="TextBox 4"/>
           <p:cNvSpPr txBox="1"/>
           <p:nvPr/>
         </p:nvSpPr>
@@ -3344,18 +3595,18 @@
             <a:r>
               <a:rPr b="1" sz="2000">
                 <a:solidFill>
-                  <a:srgbClr val="0F172A"/>
-                </a:solidFill>
-              </a:rPr>
-              <a:t>■ 무료 크레딧 안내: </a:t>
-            </a:r>
-            <a:r>
-              <a:rPr sz="1800">
-                <a:solidFill>
-                  <a:srgbClr val="475569"/>
-                </a:solidFill>
-              </a:rPr>
-              <a:t>매일 50크레딧 리셋 (1회당 10크레딧 소모 ➡️ 2곡 생성, 하루 총 10곡 무료)</a:t>
+                  <a:srgbClr val="93C5FD"/>
+                </a:solidFill>
+              </a:rPr>
+              <a:t>■ 참고 가이드 영상: </a:t>
+            </a:r>
+            <a:r>
+              <a:rPr sz="1800" u="sng">
+                <a:solidFill>
+                  <a:srgbClr val="2DD4BF"/>
+                </a:solidFill>
+              </a:rPr>
+              <a:t>https://www.youtube.com/shorts/4sZpKfbCo7A</a:t>
             </a:r>
           </a:p>
           <a:p>
@@ -3373,15 +3624,44 @@
             <a:r>
               <a:rPr b="1" sz="2000">
                 <a:solidFill>
-                  <a:srgbClr val="0F172A"/>
-                </a:solidFill>
-              </a:rPr>
-              <a:t>■ 1단계: GPT를 통한 작사(RCT 프롬프트): </a:t>
+                  <a:srgbClr val="93C5FD"/>
+                </a:solidFill>
+              </a:rPr>
+              <a:t>■ 무료 크레딧 안내: </a:t>
             </a:r>
             <a:r>
               <a:rPr sz="1800">
                 <a:solidFill>
-                  <a:srgbClr val="475569"/>
+                  <a:srgbClr val="CBD5E1"/>
+                </a:solidFill>
+              </a:rPr>
+              <a:t>매일 50크레딧 리셋 (1회당 10크레딧 소모 ➡️ 2곡 생성, 하루 총 10곡 무료)</a:t>
+            </a:r>
+          </a:p>
+          <a:p>
+            <a:pPr>
+              <a:lnSpc>
+                <a:spcPct val="120000"/>
+              </a:lnSpc>
+              <a:spcAft>
+                <a:spcPts val="800"/>
+              </a:spcAft>
+              <a:defRPr>
+                <a:latin typeface="Malgun Gothic"/>
+              </a:defRPr>
+            </a:pPr>
+            <a:r>
+              <a:rPr b="1" sz="2000">
+                <a:solidFill>
+                  <a:srgbClr val="93C5FD"/>
+                </a:solidFill>
+              </a:rPr>
+              <a:t>■ 1단계: GPT를 통한 작사(RCTF 프롬프트): </a:t>
+            </a:r>
+            <a:r>
+              <a:rPr sz="1800">
+                <a:solidFill>
+                  <a:srgbClr val="CBD5E1"/>
                 </a:solidFill>
               </a:rPr>
               <a:t/>
@@ -3402,7 +3682,7 @@
             <a:r>
               <a:rPr b="1" sz="1800">
                 <a:solidFill>
-                  <a:srgbClr val="0F172A"/>
+                  <a:srgbClr val="93C5FD"/>
                 </a:solidFill>
               </a:rPr>
               <a:t>• Role/Context: </a:t>
@@ -3410,10 +3690,10 @@
             <a:r>
               <a:rPr sz="1600">
                 <a:solidFill>
-                  <a:srgbClr val="475569"/>
-                </a:solidFill>
-              </a:rPr>
-              <a:t>"천재 작곡가 페르소나", "학원에 지친 중2 상황"</a:t>
+                  <a:srgbClr val="CBD5E1"/>
+                </a:solidFill>
+              </a:rPr>
+              <a:t>"천재 작곡가 페르소나", "학원에 지친 중2 상황 및 누워서 뒹굴거리고 싶은 마음"</a:t>
             </a:r>
           </a:p>
           <a:p>
@@ -3431,7 +3711,7 @@
             <a:r>
               <a:rPr b="1" sz="1800">
                 <a:solidFill>
-                  <a:srgbClr val="0F172A"/>
+                  <a:srgbClr val="93C5FD"/>
                 </a:solidFill>
               </a:rPr>
               <a:t>• Task/Format: </a:t>
@@ -3439,10 +3719,10 @@
             <a:r>
               <a:rPr sz="1600">
                 <a:solidFill>
-                  <a:srgbClr val="475569"/>
-                </a:solidFill>
-              </a:rPr>
-              <a:t>"방탄 스타일 EDM 댄스곡 가사 작사", "Markdown 형식"</a:t>
+                  <a:srgbClr val="CBD5E1"/>
+                </a:solidFill>
+              </a:rPr>
+              <a:t>"방탄 스타일 EDM 분위기 댄스곡 가사를 작사해줘", "Markdown 형식"</a:t>
             </a:r>
           </a:p>
           <a:p>
@@ -3460,15 +3740,15 @@
             <a:r>
               <a:rPr b="1" sz="2000">
                 <a:solidFill>
-                  <a:srgbClr val="0F172A"/>
-                </a:solidFill>
-              </a:rPr>
-              <a:t>■ 2단계: Suno AI 연출 및 세부 조건 지정: </a:t>
+                  <a:srgbClr val="93C5FD"/>
+                </a:solidFill>
+              </a:rPr>
+              <a:t>■ 2단계: Suno AI 가사 및 세부 조건 지정: </a:t>
             </a:r>
             <a:r>
               <a:rPr sz="1800">
                 <a:solidFill>
-                  <a:srgbClr val="475569"/>
+                  <a:srgbClr val="CBD5E1"/>
                 </a:solidFill>
               </a:rPr>
               <a:t/>
@@ -3489,7 +3769,7 @@
             <a:r>
               <a:rPr b="1" sz="1800">
                 <a:solidFill>
-                  <a:srgbClr val="0F172A"/>
+                  <a:srgbClr val="93C5FD"/>
                 </a:solidFill>
               </a:rPr>
               <a:t>• 조건: </a:t>
@@ -3497,7 +3777,7 @@
             <a:r>
               <a:rPr sz="1600">
                 <a:solidFill>
-                  <a:srgbClr val="475569"/>
+                  <a:srgbClr val="CBD5E1"/>
                 </a:solidFill>
               </a:rPr>
               <a:t>욕설 비하 배제, 슬프지 않고 신나게, 인트로 드럼 솔로, 남자 가수 스타일 음색 지정</a:t>
@@ -3513,17 +3793,9 @@
 </p:sld>
 </file>
 
-<file path=ppt/slides/slide11.xml><?xml version="1.0" encoding="utf-8"?>
+<file path=ppt/slides/slide12.xml><?xml version="1.0" encoding="utf-8"?>
 <p:sld xmlns:a="http://schemas.openxmlformats.org/drawingml/2006/main" xmlns:p="http://schemas.openxmlformats.org/presentationml/2006/main" xmlns:r="http://schemas.openxmlformats.org/officeDocument/2006/relationships">
   <p:cSld>
-    <p:bg>
-      <p:bgPr>
-        <a:solidFill>
-          <a:srgbClr val="F8FAFC"/>
-        </a:solidFill>
-        <a:effectLst/>
-      </p:bgPr>
-    </p:bg>
     <p:spTree>
       <p:nvGrpSpPr>
         <p:cNvPr id="1" name=""/>
@@ -3531,9 +3803,33 @@
         <p:nvPr/>
       </p:nvGrpSpPr>
       <p:grpSpPr/>
-      <p:sp>
-        <p:nvSpPr>
-          <p:cNvPr id="2" name="Rectangle 1"/>
+      <p:pic>
+        <p:nvPicPr>
+          <p:cNvPr id="2" name="Picture 1" descr="ai_ppt_bg_1783143682050.png"/>
+          <p:cNvPicPr>
+            <a:picLocks noChangeAspect="1"/>
+          </p:cNvPicPr>
+          <p:nvPr/>
+        </p:nvPicPr>
+        <p:blipFill>
+          <a:blip r:embed="rId2"/>
+          <a:stretch>
+            <a:fillRect/>
+          </a:stretch>
+        </p:blipFill>
+        <p:spPr>
+          <a:xfrm>
+            <a:off x="0" y="0"/>
+            <a:ext cx="12191695" cy="6858000"/>
+          </a:xfrm>
+          <a:prstGeom prst="rect">
+            <a:avLst/>
+          </a:prstGeom>
+        </p:spPr>
+      </p:pic>
+      <p:sp>
+        <p:nvSpPr>
+          <p:cNvPr id="3" name="Rectangle 2"/>
           <p:cNvSpPr/>
           <p:nvPr/>
         </p:nvSpPr>
@@ -3546,7 +3842,7 @@
             <a:avLst/>
           </a:prstGeom>
           <a:solidFill>
-            <a:srgbClr val="2563EB"/>
+            <a:srgbClr val="22D3EE"/>
           </a:solidFill>
           <a:ln>
             <a:noFill/>
@@ -3576,7 +3872,7 @@
       </p:sp>
       <p:sp>
         <p:nvSpPr>
-          <p:cNvPr id="3" name="TextBox 2"/>
+          <p:cNvPr id="4" name="TextBox 3"/>
           <p:cNvSpPr txBox="1"/>
           <p:nvPr/>
         </p:nvSpPr>
@@ -3599,20 +3895,20 @@
             <a:pPr>
               <a:defRPr sz="3200" b="1">
                 <a:solidFill>
-                  <a:srgbClr val="0F172A"/>
-                </a:solidFill>
-                <a:latin typeface="Malgun Gothic"/>
-              </a:defRPr>
-            </a:pPr>
-            <a:r>
-              <a:t>✈️🍳 실습 2 &amp; 3: R-C-T-F 적용 프롬프트</a:t>
-            </a:r>
-          </a:p>
-        </p:txBody>
-      </p:sp>
-      <p:sp>
-        <p:nvSpPr>
-          <p:cNvPr id="4" name="TextBox 3"/>
+                  <a:srgbClr val="FFFFFF"/>
+                </a:solidFill>
+                <a:latin typeface="Malgun Gothic"/>
+              </a:defRPr>
+            </a:pPr>
+            <a:r>
+              <a:t>🍳 실습 2. 백종원 스타일 레시피</a:t>
+            </a:r>
+          </a:p>
+        </p:txBody>
+      </p:sp>
+      <p:sp>
+        <p:nvSpPr>
+          <p:cNvPr id="5" name="TextBox 4"/>
           <p:cNvSpPr txBox="1"/>
           <p:nvPr/>
         </p:nvSpPr>
@@ -3646,18 +3942,18 @@
             <a:r>
               <a:rPr b="1" sz="2000">
                 <a:solidFill>
-                  <a:srgbClr val="0F172A"/>
-                </a:solidFill>
-              </a:rPr>
-              <a:t>■ 실습 2. 가족 맞춤형 오사카 여행 계획 (R-C-T-F) </a:t>
+                  <a:srgbClr val="93C5FD"/>
+                </a:solidFill>
+              </a:rPr>
+              <a:t>■ 엄마 없는 날, 백종원 스타일 냉장고 털이 (R-C-T-F) </a:t>
             </a:r>
             <a:r>
               <a:rPr sz="1800">
                 <a:solidFill>
-                  <a:srgbClr val="475569"/>
-                </a:solidFill>
-              </a:rPr>
-              <a:t/>
+                  <a:srgbClr val="CBD5E1"/>
+                </a:solidFill>
+              </a:rPr>
+              <a:t>냉장고 속 방치된 재료들을 모아 전문 셰프급 요리로 재탄생시킵니다.</a:t>
             </a:r>
           </a:p>
           <a:p>
@@ -3675,18 +3971,18 @@
             <a:r>
               <a:rPr b="1" sz="1800">
                 <a:solidFill>
-                  <a:srgbClr val="0F172A"/>
-                </a:solidFill>
-              </a:rPr>
-              <a:t>• 입력: </a:t>
+                  <a:srgbClr val="93C5FD"/>
+                </a:solidFill>
+              </a:rPr>
+              <a:t>• 요리사 선택: </a:t>
             </a:r>
             <a:r>
               <a:rPr sz="1600">
                 <a:solidFill>
-                  <a:srgbClr val="475569"/>
-                </a:solidFill>
-              </a:rPr>
-              <a:t>부모님 무릎 관절 고려, 초등학생 동반, 3박 4일, 특정 필수 코스</a:t>
+                  <a:srgbClr val="CBD5E1"/>
+                </a:solidFill>
+              </a:rPr>
+              <a:t>백종원 또는 김풍 요리사 중 본인의 요리 콘셉트에 맞춰 선택 가능</a:t>
             </a:r>
           </a:p>
           <a:p>
@@ -3704,47 +4000,18 @@
             <a:r>
               <a:rPr b="1" sz="1800">
                 <a:solidFill>
-                  <a:srgbClr val="0F172A"/>
-                </a:solidFill>
-              </a:rPr>
-              <a:t>• 결과: </a:t>
+                  <a:srgbClr val="93C5FD"/>
+                </a:solidFill>
+              </a:rPr>
+              <a:t>• 입력 데이터: </a:t>
             </a:r>
             <a:r>
               <a:rPr sz="1600">
                 <a:solidFill>
-                  <a:srgbClr val="475569"/>
-                </a:solidFill>
-              </a:rPr>
-              <a:t>걷는 걸음을 최소화한 시간대별 표(Table) 일정 설계</a:t>
-            </a:r>
-          </a:p>
-          <a:p>
-            <a:pPr>
-              <a:lnSpc>
-                <a:spcPct val="120000"/>
-              </a:lnSpc>
-              <a:spcAft>
-                <a:spcPts val="800"/>
-              </a:spcAft>
-              <a:defRPr>
-                <a:latin typeface="Malgun Gothic"/>
-              </a:defRPr>
-            </a:pPr>
-            <a:r>
-              <a:rPr b="1" sz="2000">
-                <a:solidFill>
-                  <a:srgbClr val="0F172A"/>
-                </a:solidFill>
-              </a:rPr>
-              <a:t>■ 실습 3. 백종원 스타일 냉장고 털이 레시피 (R-C-T-F) </a:t>
-            </a:r>
-            <a:r>
-              <a:rPr sz="1800">
-                <a:solidFill>
-                  <a:srgbClr val="475569"/>
-                </a:solidFill>
-              </a:rPr>
-              <a:t/>
+                  <a:srgbClr val="CBD5E1"/>
+                </a:solidFill>
+              </a:rPr>
+              <a:t>냉장고 속 식재료 리스트 (예: 어제 먹던 햄, 시들어가는 대파, 찬밥 등)</a:t>
             </a:r>
           </a:p>
           <a:p>
@@ -3762,18 +4029,18 @@
             <a:r>
               <a:rPr b="1" sz="1800">
                 <a:solidFill>
-                  <a:srgbClr val="0F172A"/>
-                </a:solidFill>
-              </a:rPr>
-              <a:t>• 입력: </a:t>
+                  <a:srgbClr val="93C5FD"/>
+                </a:solidFill>
+              </a:rPr>
+              <a:t>• 수행 미션: </a:t>
             </a:r>
             <a:r>
               <a:rPr sz="1600">
                 <a:solidFill>
-                  <a:srgbClr val="475569"/>
-                </a:solidFill>
-              </a:rPr>
-              <a:t>냉장고에 남은 식재료 리스트 (예: 어제 먹던 햄, 대파, 찬밥 등)</a:t>
+                  <a:srgbClr val="CBD5E1"/>
+                </a:solidFill>
+              </a:rPr>
+              <a:t>설거지거리를 줄이는 '초간단 원팬(One-pan) 요리' 제안 요청</a:t>
             </a:r>
           </a:p>
           <a:p>
@@ -3791,18 +4058,18 @@
             <a:r>
               <a:rPr b="1" sz="1800">
                 <a:solidFill>
-                  <a:srgbClr val="0F172A"/>
-                </a:solidFill>
-              </a:rPr>
-              <a:t>• 결과: </a:t>
+                  <a:srgbClr val="93C5FD"/>
+                </a:solidFill>
+              </a:rPr>
+              <a:t>• 최종 포맷: </a:t>
             </a:r>
             <a:r>
               <a:rPr sz="1600">
                 <a:solidFill>
-                  <a:srgbClr val="475569"/>
-                </a:solidFill>
-              </a:rPr>
-              <a:t>백종원 말투(~쥬)로 완성하는 원팬 3단계 초간단 레시피와 팁</a:t>
+                  <a:srgbClr val="CBD5E1"/>
+                </a:solidFill>
+              </a:rPr>
+              <a:t>친근한 백종원 말투(~쥬)로 구성된 요리명, 준비물, 3단계 조리법, 비밀 팁</a:t>
             </a:r>
           </a:p>
         </p:txBody>
@@ -3815,17 +4082,9 @@
 </p:sld>
 </file>
 
-<file path=ppt/slides/slide12.xml><?xml version="1.0" encoding="utf-8"?>
+<file path=ppt/slides/slide13.xml><?xml version="1.0" encoding="utf-8"?>
 <p:sld xmlns:a="http://schemas.openxmlformats.org/drawingml/2006/main" xmlns:p="http://schemas.openxmlformats.org/presentationml/2006/main" xmlns:r="http://schemas.openxmlformats.org/officeDocument/2006/relationships">
   <p:cSld>
-    <p:bg>
-      <p:bgPr>
-        <a:solidFill>
-          <a:srgbClr val="F8FAFC"/>
-        </a:solidFill>
-        <a:effectLst/>
-      </p:bgPr>
-    </p:bg>
     <p:spTree>
       <p:nvGrpSpPr>
         <p:cNvPr id="1" name=""/>
@@ -3833,9 +4092,33 @@
         <p:nvPr/>
       </p:nvGrpSpPr>
       <p:grpSpPr/>
-      <p:sp>
-        <p:nvSpPr>
-          <p:cNvPr id="2" name="Rectangle 1"/>
+      <p:pic>
+        <p:nvPicPr>
+          <p:cNvPr id="2" name="Picture 1" descr="ai_ppt_bg_1783143682050.png"/>
+          <p:cNvPicPr>
+            <a:picLocks noChangeAspect="1"/>
+          </p:cNvPicPr>
+          <p:nvPr/>
+        </p:nvPicPr>
+        <p:blipFill>
+          <a:blip r:embed="rId2"/>
+          <a:stretch>
+            <a:fillRect/>
+          </a:stretch>
+        </p:blipFill>
+        <p:spPr>
+          <a:xfrm>
+            <a:off x="0" y="0"/>
+            <a:ext cx="12191695" cy="6858000"/>
+          </a:xfrm>
+          <a:prstGeom prst="rect">
+            <a:avLst/>
+          </a:prstGeom>
+        </p:spPr>
+      </p:pic>
+      <p:sp>
+        <p:nvSpPr>
+          <p:cNvPr id="3" name="Rectangle 2"/>
           <p:cNvSpPr/>
           <p:nvPr/>
         </p:nvSpPr>
@@ -3848,7 +4131,7 @@
             <a:avLst/>
           </a:prstGeom>
           <a:solidFill>
-            <a:srgbClr val="2563EB"/>
+            <a:srgbClr val="22D3EE"/>
           </a:solidFill>
           <a:ln>
             <a:noFill/>
@@ -3878,7 +4161,7 @@
       </p:sp>
       <p:sp>
         <p:nvSpPr>
-          <p:cNvPr id="3" name="TextBox 2"/>
+          <p:cNvPr id="4" name="TextBox 3"/>
           <p:cNvSpPr txBox="1"/>
           <p:nvPr/>
         </p:nvSpPr>
@@ -3901,20 +4184,20 @@
             <a:pPr>
               <a:defRPr sz="3200" b="1">
                 <a:solidFill>
-                  <a:srgbClr val="0F172A"/>
-                </a:solidFill>
-                <a:latin typeface="Malgun Gothic"/>
-              </a:defRPr>
-            </a:pPr>
-            <a:r>
-              <a:t>🏫🎪 실습 4 &amp; 5: CoT 및 기획서 적용 프롬프트</a:t>
-            </a:r>
-          </a:p>
-        </p:txBody>
-      </p:sp>
-      <p:sp>
-        <p:nvSpPr>
-          <p:cNvPr id="4" name="TextBox 3"/>
+                  <a:srgbClr val="FFFFFF"/>
+                </a:solidFill>
+                <a:latin typeface="Malgun Gothic"/>
+              </a:defRPr>
+            </a:pPr>
+            <a:r>
+              <a:t>🏫 실습 3. 자녀 수학 숙제 캐리하기 (COT 방식)</a:t>
+            </a:r>
+          </a:p>
+        </p:txBody>
+      </p:sp>
+      <p:sp>
+        <p:nvSpPr>
+          <p:cNvPr id="5" name="TextBox 4"/>
           <p:cNvSpPr txBox="1"/>
           <p:nvPr/>
         </p:nvSpPr>
@@ -3948,18 +4231,18 @@
             <a:r>
               <a:rPr b="1" sz="2000">
                 <a:solidFill>
-                  <a:srgbClr val="0F172A"/>
-                </a:solidFill>
-              </a:rPr>
-              <a:t>■ 실습 4. 최소공배수 자녀 수학 숙제 (CoT + 비유) </a:t>
+                  <a:srgbClr val="93C5FD"/>
+                </a:solidFill>
+              </a:rPr>
+              <a:t>■ 통분을 어려워하는 아이를 위한 수학 도우미: </a:t>
             </a:r>
             <a:r>
               <a:rPr sz="1800">
                 <a:solidFill>
-                  <a:srgbClr val="475569"/>
-                </a:solidFill>
-              </a:rPr>
-              <a:t/>
+                  <a:srgbClr val="CBD5E1"/>
+                </a:solidFill>
+              </a:rPr>
+              <a:t>공식을 암기시키는 칠판식 수학이 아닌 논리 유도 설명입니다.</a:t>
             </a:r>
           </a:p>
           <a:p>
@@ -3977,18 +4260,18 @@
             <a:r>
               <a:rPr b="1" sz="1800">
                 <a:solidFill>
-                  <a:srgbClr val="0F172A"/>
-                </a:solidFill>
-              </a:rPr>
-              <a:t>• 비유 방식: </a:t>
+                  <a:srgbClr val="93C5FD"/>
+                </a:solidFill>
+              </a:rPr>
+              <a:t>• 페르소나 설정: </a:t>
             </a:r>
             <a:r>
               <a:rPr sz="1600">
                 <a:solidFill>
-                  <a:srgbClr val="475569"/>
-                </a:solidFill>
-              </a:rPr>
-              <a:t>수학 공식 대신 아이가 좋아하는 게임(로블록스 장애물 레이저 발판) 규칙 비유</a:t>
+                  <a:srgbClr val="CBD5E1"/>
+                </a:solidFill>
+              </a:rPr>
+              <a:t>이해하기 쉽고 직관적으로 설명하는 공대생 T 성향의 Gemini 비서 가동</a:t>
             </a:r>
           </a:p>
           <a:p>
@@ -4006,47 +4289,18 @@
             <a:r>
               <a:rPr b="1" sz="1800">
                 <a:solidFill>
-                  <a:srgbClr val="0F172A"/>
-                </a:solidFill>
-              </a:rPr>
-              <a:t>• 원리 설명: </a:t>
+                  <a:srgbClr val="93C5FD"/>
+                </a:solidFill>
+              </a:rPr>
+              <a:t>• 실습 프롬프트: </a:t>
             </a:r>
             <a:r>
               <a:rPr sz="1600">
                 <a:solidFill>
-                  <a:srgbClr val="475569"/>
-                </a:solidFill>
-              </a:rPr>
-              <a:t>단계별 풀이(CoT)를 유도하여 아이 눈높이 설명 생성</a:t>
-            </a:r>
-          </a:p>
-          <a:p>
-            <a:pPr>
-              <a:lnSpc>
-                <a:spcPct val="120000"/>
-              </a:lnSpc>
-              <a:spcAft>
-                <a:spcPts val="800"/>
-              </a:spcAft>
-              <a:defRPr>
-                <a:latin typeface="Malgun Gothic"/>
-              </a:defRPr>
-            </a:pPr>
-            <a:r>
-              <a:rPr b="1" sz="2000">
-                <a:solidFill>
-                  <a:srgbClr val="0F172A"/>
-                </a:solidFill>
-              </a:rPr>
-              <a:t>■ 실습 5. 축제/동아리 기획서 초안 짜기 (R-C-T-F) </a:t>
-            </a:r>
-            <a:r>
-              <a:rPr sz="1800">
-                <a:solidFill>
-                  <a:srgbClr val="475569"/>
-                </a:solidFill>
-              </a:rPr>
-              <a:t/>
+                  <a:srgbClr val="CBD5E1"/>
+                </a:solidFill>
+              </a:rPr>
+              <a:t>"아이가 분수 계산식에서 분모 통분하는 법을 모르는데 최소공배수를 이해하지 못해서 그런 것 같아. 곱셈부터 단계적으로 설명해서 통분을 이해하고 분수 계산을 할 수 있게 차근차근 설명해줘."</a:t>
             </a:r>
           </a:p>
           <a:p>
@@ -4064,47 +4318,18 @@
             <a:r>
               <a:rPr b="1" sz="1800">
                 <a:solidFill>
-                  <a:srgbClr val="0F172A"/>
-                </a:solidFill>
-              </a:rPr>
-              <a:t>• 상황: </a:t>
+                  <a:srgbClr val="93C5FD"/>
+                </a:solidFill>
+              </a:rPr>
+              <a:t>• 오디오 음성 설명 유도: </a:t>
             </a:r>
             <a:r>
               <a:rPr sz="1600">
                 <a:solidFill>
-                  <a:srgbClr val="475569"/>
-                </a:solidFill>
-              </a:rPr>
-              <a:t>타자 빨리 치기 게임 부스 운영 계획 등 빈 기획안 구성</a:t>
-            </a:r>
-          </a:p>
-          <a:p>
-            <a:pPr lvl="1">
-              <a:lnSpc>
-                <a:spcPct val="120000"/>
-              </a:lnSpc>
-              <a:spcAft>
-                <a:spcPts val="800"/>
-              </a:spcAft>
-              <a:defRPr>
-                <a:latin typeface="Malgun Gothic"/>
-              </a:defRPr>
-            </a:pPr>
-            <a:r>
-              <a:rPr b="1" sz="1800">
-                <a:solidFill>
-                  <a:srgbClr val="0F172A"/>
-                </a:solidFill>
-              </a:rPr>
-              <a:t>• 결과: </a:t>
-            </a:r>
-            <a:r>
-              <a:rPr sz="1600">
-                <a:solidFill>
-                  <a:srgbClr val="475569"/>
-                </a:solidFill>
-              </a:rPr>
-              <a:t>운영 계획, 필요 물품, 예상 예산, 기대 효과가 포맷화된 문서</a:t>
+                  <a:srgbClr val="CBD5E1"/>
+                </a:solidFill>
+              </a:rPr>
+              <a:t>결과물을 스마트폰의 읽어주기 기능(TTS)으로 직접 들을 수 있도록 친근한 '구어체 음성 멘트 형식'으로 답변을 요청</a:t>
             </a:r>
           </a:p>
         </p:txBody>
@@ -4117,17 +4342,9 @@
 </p:sld>
 </file>
 
-<file path=ppt/slides/slide13.xml><?xml version="1.0" encoding="utf-8"?>
+<file path=ppt/slides/slide14.xml><?xml version="1.0" encoding="utf-8"?>
 <p:sld xmlns:a="http://schemas.openxmlformats.org/drawingml/2006/main" xmlns:p="http://schemas.openxmlformats.org/presentationml/2006/main" xmlns:r="http://schemas.openxmlformats.org/officeDocument/2006/relationships">
   <p:cSld>
-    <p:bg>
-      <p:bgPr>
-        <a:solidFill>
-          <a:srgbClr val="F8FAFC"/>
-        </a:solidFill>
-        <a:effectLst/>
-      </p:bgPr>
-    </p:bg>
     <p:spTree>
       <p:nvGrpSpPr>
         <p:cNvPr id="1" name=""/>
@@ -4135,9 +4352,33 @@
         <p:nvPr/>
       </p:nvGrpSpPr>
       <p:grpSpPr/>
-      <p:sp>
-        <p:nvSpPr>
-          <p:cNvPr id="2" name="Rectangle 1"/>
+      <p:pic>
+        <p:nvPicPr>
+          <p:cNvPr id="2" name="Picture 1" descr="ai_ppt_bg_1783143682050.png"/>
+          <p:cNvPicPr>
+            <a:picLocks noChangeAspect="1"/>
+          </p:cNvPicPr>
+          <p:nvPr/>
+        </p:nvPicPr>
+        <p:blipFill>
+          <a:blip r:embed="rId2"/>
+          <a:stretch>
+            <a:fillRect/>
+          </a:stretch>
+        </p:blipFill>
+        <p:spPr>
+          <a:xfrm>
+            <a:off x="0" y="0"/>
+            <a:ext cx="12191695" cy="6858000"/>
+          </a:xfrm>
+          <a:prstGeom prst="rect">
+            <a:avLst/>
+          </a:prstGeom>
+        </p:spPr>
+      </p:pic>
+      <p:sp>
+        <p:nvSpPr>
+          <p:cNvPr id="3" name="Rectangle 2"/>
           <p:cNvSpPr/>
           <p:nvPr/>
         </p:nvSpPr>
@@ -4150,7 +4391,7 @@
             <a:avLst/>
           </a:prstGeom>
           <a:solidFill>
-            <a:srgbClr val="2563EB"/>
+            <a:srgbClr val="22D3EE"/>
           </a:solidFill>
           <a:ln>
             <a:noFill/>
@@ -4180,7 +4421,7 @@
       </p:sp>
       <p:sp>
         <p:nvSpPr>
-          <p:cNvPr id="3" name="TextBox 2"/>
+          <p:cNvPr id="4" name="TextBox 3"/>
           <p:cNvSpPr txBox="1"/>
           <p:nvPr/>
         </p:nvSpPr>
@@ -4203,20 +4444,20 @@
             <a:pPr>
               <a:defRPr sz="3200" b="1">
                 <a:solidFill>
-                  <a:srgbClr val="0F172A"/>
-                </a:solidFill>
-                <a:latin typeface="Malgun Gothic"/>
-              </a:defRPr>
-            </a:pPr>
-            <a:r>
-              <a:t>📝 내용 요약 및 1강 과제</a:t>
-            </a:r>
-          </a:p>
-        </p:txBody>
-      </p:sp>
-      <p:sp>
-        <p:nvSpPr>
-          <p:cNvPr id="4" name="TextBox 3"/>
+                  <a:srgbClr val="FFFFFF"/>
+                </a:solidFill>
+                <a:latin typeface="Malgun Gothic"/>
+              </a:defRPr>
+            </a:pPr>
+            <a:r>
+              <a:t>🎪 실습 5. 축제/동아리 기획서 초안 짜기 (바이브 코딩)</a:t>
+            </a:r>
+          </a:p>
+        </p:txBody>
+      </p:sp>
+      <p:sp>
+        <p:nvSpPr>
+          <p:cNvPr id="5" name="TextBox 4"/>
           <p:cNvSpPr txBox="1"/>
           <p:nvPr/>
         </p:nvSpPr>
@@ -4250,18 +4491,18 @@
             <a:r>
               <a:rPr b="1" sz="2000">
                 <a:solidFill>
-                  <a:srgbClr val="0F172A"/>
-                </a:solidFill>
-              </a:rPr>
-              <a:t>■ 오늘 배운 내용 요약: </a:t>
+                  <a:srgbClr val="93C5FD"/>
+                </a:solidFill>
+              </a:rPr>
+              <a:t>■ AI와 피드백을 반복하며 완성해 나가는 바이브 코딩 프로세스: </a:t>
             </a:r>
             <a:r>
               <a:rPr sz="1800">
                 <a:solidFill>
-                  <a:srgbClr val="475569"/>
-                </a:solidFill>
-              </a:rPr>
-              <a:t/>
+                  <a:srgbClr val="CBD5E1"/>
+                </a:solidFill>
+              </a:rPr>
+              <a:t>점진적으로 요구사항을 수정 반영합니다.</a:t>
             </a:r>
           </a:p>
           <a:p>
@@ -4279,18 +4520,18 @@
             <a:r>
               <a:rPr b="1" sz="1800">
                 <a:solidFill>
-                  <a:srgbClr val="0F172A"/>
-                </a:solidFill>
-              </a:rPr>
-              <a:t>1. R-C-T-F 기법: </a:t>
+                  <a:srgbClr val="93C5FD"/>
+                </a:solidFill>
+              </a:rPr>
+              <a:t>• 1차 요청 (기획 초안): </a:t>
             </a:r>
             <a:r>
               <a:rPr sz="1600">
                 <a:solidFill>
-                  <a:srgbClr val="475569"/>
-                </a:solidFill>
-              </a:rPr>
-              <a:t>기본적이고 구체적인 의사소통 뼈대 수립</a:t>
+                  <a:srgbClr val="CBD5E1"/>
+                </a:solidFill>
+              </a:rPr>
+              <a:t>축제 부스의 운영 방식, 준비물 리스트, 예산, 기대 효과 생성</a:t>
             </a:r>
           </a:p>
           <a:p>
@@ -4308,18 +4549,18 @@
             <a:r>
               <a:rPr b="1" sz="1800">
                 <a:solidFill>
-                  <a:srgbClr val="0F172A"/>
-                </a:solidFill>
-              </a:rPr>
-              <a:t>2. CoT 기법: </a:t>
+                  <a:srgbClr val="93C5FD"/>
+                </a:solidFill>
+              </a:rPr>
+              <a:t>• 2차 요청 (예외 상황 대비 검증): </a:t>
             </a:r>
             <a:r>
               <a:rPr sz="1600">
                 <a:solidFill>
-                  <a:srgbClr val="475569"/>
-                </a:solidFill>
-              </a:rPr>
-              <a:t>논리적 절차를 순차적으로 생각하게 유도</a:t>
+                  <a:srgbClr val="CBD5E1"/>
+                </a:solidFill>
+              </a:rPr>
+              <a:t>"비가 올 경우나 햇볕이 너무 강할 경우에 대한 야외 운영 대비책을 추가해줘."</a:t>
             </a:r>
           </a:p>
           <a:p>
@@ -4337,47 +4578,18 @@
             <a:r>
               <a:rPr b="1" sz="1800">
                 <a:solidFill>
-                  <a:srgbClr val="0F172A"/>
-                </a:solidFill>
-              </a:rPr>
-              <a:t>3. Shot 기법: </a:t>
+                  <a:srgbClr val="93C5FD"/>
+                </a:solidFill>
+              </a:rPr>
+              <a:t>• 3차 요청 (기획 완성도 조율): </a:t>
             </a:r>
             <a:r>
               <a:rPr sz="1600">
                 <a:solidFill>
-                  <a:srgbClr val="475569"/>
-                </a:solidFill>
-              </a:rPr>
-              <a:t>예시를 통해 원하는 문서 형식과 뉘앙스를 교육</a:t>
-            </a:r>
-          </a:p>
-          <a:p>
-            <a:pPr>
-              <a:lnSpc>
-                <a:spcPct val="120000"/>
-              </a:lnSpc>
-              <a:spcAft>
-                <a:spcPts val="800"/>
-              </a:spcAft>
-              <a:defRPr>
-                <a:latin typeface="Malgun Gothic"/>
-              </a:defRPr>
-            </a:pPr>
-            <a:r>
-              <a:rPr b="1" sz="2000">
-                <a:solidFill>
-                  <a:srgbClr val="0F172A"/>
-                </a:solidFill>
-              </a:rPr>
-              <a:t>■ 1강 홈워크 (미션): </a:t>
-            </a:r>
-            <a:r>
-              <a:rPr sz="1800">
-                <a:solidFill>
-                  <a:srgbClr val="475569"/>
-                </a:solidFill>
-              </a:rPr>
-              <a:t/>
+                  <a:srgbClr val="CBD5E1"/>
+                </a:solidFill>
+              </a:rPr>
+              <a:t>"기본적인 음악을 깔아두는 것이 좋을까? 그렇다면 어떤 장르가 부스에 어울릴까?"</a:t>
             </a:r>
           </a:p>
           <a:p>
@@ -4395,76 +4607,18 @@
             <a:r>
               <a:rPr b="1" sz="1800">
                 <a:solidFill>
-                  <a:srgbClr val="0F172A"/>
-                </a:solidFill>
-              </a:rPr>
-              <a:t>1. 내 목소리로 노래 만들기 (Suno 활용) </a:t>
+                  <a:srgbClr val="93C5FD"/>
+                </a:solidFill>
+              </a:rPr>
+              <a:t>• 4차 요청 (최종 발표 포맷 지정): </a:t>
             </a:r>
             <a:r>
               <a:rPr sz="1600">
                 <a:solidFill>
-                  <a:srgbClr val="475569"/>
-                </a:solidFill>
-              </a:rPr>
-              <a:t/>
-            </a:r>
-          </a:p>
-          <a:p>
-            <a:pPr lvl="1">
-              <a:lnSpc>
-                <a:spcPct val="120000"/>
-              </a:lnSpc>
-              <a:spcAft>
-                <a:spcPts val="800"/>
-              </a:spcAft>
-              <a:defRPr>
-                <a:latin typeface="Malgun Gothic"/>
-              </a:defRPr>
-            </a:pPr>
-            <a:r>
-              <a:rPr b="1" sz="1800">
-                <a:solidFill>
-                  <a:srgbClr val="0F172A"/>
-                </a:solidFill>
-              </a:rPr>
-              <a:t>2. 함께하고 싶은 게임 만들기 (블록코딩 활용) </a:t>
-            </a:r>
-            <a:r>
-              <a:rPr sz="1600">
-                <a:solidFill>
-                  <a:srgbClr val="475569"/>
-                </a:solidFill>
-              </a:rPr>
-              <a:t/>
-            </a:r>
-          </a:p>
-          <a:p>
-            <a:pPr lvl="1">
-              <a:lnSpc>
-                <a:spcPct val="120000"/>
-              </a:lnSpc>
-              <a:spcAft>
-                <a:spcPts val="800"/>
-              </a:spcAft>
-              <a:defRPr>
-                <a:latin typeface="Malgun Gothic"/>
-              </a:defRPr>
-            </a:pPr>
-            <a:r>
-              <a:rPr b="1" sz="1800">
-                <a:solidFill>
-                  <a:srgbClr val="0F172A"/>
-                </a:solidFill>
-              </a:rPr>
-              <a:t>3. 3분 이하 다큐멘터리 영상 초안 만들기 (자막 포함) </a:t>
-            </a:r>
-            <a:r>
-              <a:rPr sz="1600">
-                <a:solidFill>
-                  <a:srgbClr val="475569"/>
-                </a:solidFill>
-              </a:rPr>
-              <a:t/>
+                  <a:srgbClr val="CBD5E1"/>
+                </a:solidFill>
+              </a:rPr>
+              <a:t>발표가 가능하도록 (제목, 목적, 운영 계획, 필요 물품, 기대 효과) 순의 PPTX 파일 작성을 지시 (표지에 월봉중학교 건물 사진 포함 조건 명시)</a:t>
             </a:r>
           </a:p>
         </p:txBody>
@@ -4477,17 +4631,9 @@
 </p:sld>
 </file>
 
-<file path=ppt/slides/slide2.xml><?xml version="1.0" encoding="utf-8"?>
+<file path=ppt/slides/slide15.xml><?xml version="1.0" encoding="utf-8"?>
 <p:sld xmlns:a="http://schemas.openxmlformats.org/drawingml/2006/main" xmlns:p="http://schemas.openxmlformats.org/presentationml/2006/main" xmlns:r="http://schemas.openxmlformats.org/officeDocument/2006/relationships">
   <p:cSld>
-    <p:bg>
-      <p:bgPr>
-        <a:solidFill>
-          <a:srgbClr val="F8FAFC"/>
-        </a:solidFill>
-        <a:effectLst/>
-      </p:bgPr>
-    </p:bg>
     <p:spTree>
       <p:nvGrpSpPr>
         <p:cNvPr id="1" name=""/>
@@ -4495,9 +4641,33 @@
         <p:nvPr/>
       </p:nvGrpSpPr>
       <p:grpSpPr/>
-      <p:sp>
-        <p:nvSpPr>
-          <p:cNvPr id="2" name="Rectangle 1"/>
+      <p:pic>
+        <p:nvPicPr>
+          <p:cNvPr id="2" name="Picture 1" descr="ai_ppt_bg_1783143682050.png"/>
+          <p:cNvPicPr>
+            <a:picLocks noChangeAspect="1"/>
+          </p:cNvPicPr>
+          <p:nvPr/>
+        </p:nvPicPr>
+        <p:blipFill>
+          <a:blip r:embed="rId2"/>
+          <a:stretch>
+            <a:fillRect/>
+          </a:stretch>
+        </p:blipFill>
+        <p:spPr>
+          <a:xfrm>
+            <a:off x="0" y="0"/>
+            <a:ext cx="12191695" cy="6858000"/>
+          </a:xfrm>
+          <a:prstGeom prst="rect">
+            <a:avLst/>
+          </a:prstGeom>
+        </p:spPr>
+      </p:pic>
+      <p:sp>
+        <p:nvSpPr>
+          <p:cNvPr id="3" name="Rectangle 2"/>
           <p:cNvSpPr/>
           <p:nvPr/>
         </p:nvSpPr>
@@ -4510,7 +4680,7 @@
             <a:avLst/>
           </a:prstGeom>
           <a:solidFill>
-            <a:srgbClr val="2563EB"/>
+            <a:srgbClr val="22D3EE"/>
           </a:solidFill>
           <a:ln>
             <a:noFill/>
@@ -4540,7 +4710,7 @@
       </p:sp>
       <p:sp>
         <p:nvSpPr>
-          <p:cNvPr id="3" name="TextBox 2"/>
+          <p:cNvPr id="4" name="TextBox 3"/>
           <p:cNvSpPr txBox="1"/>
           <p:nvPr/>
         </p:nvSpPr>
@@ -4563,27 +4733,27 @@
             <a:pPr>
               <a:defRPr sz="3200" b="1">
                 <a:solidFill>
-                  <a:srgbClr val="0F172A"/>
-                </a:solidFill>
-                <a:latin typeface="Malgun Gothic"/>
-              </a:defRPr>
-            </a:pPr>
-            <a:r>
-              <a:t>🎯 강좌 개요</a:t>
-            </a:r>
-          </a:p>
-        </p:txBody>
-      </p:sp>
-      <p:sp>
-        <p:nvSpPr>
-          <p:cNvPr id="4" name="TextBox 3"/>
+                  <a:srgbClr val="FFFFFF"/>
+                </a:solidFill>
+                <a:latin typeface="Malgun Gothic"/>
+              </a:defRPr>
+            </a:pPr>
+            <a:r>
+              <a:t>📝 내용 요약 및 1강 도전해보기</a:t>
+            </a:r>
+          </a:p>
+        </p:txBody>
+      </p:sp>
+      <p:sp>
+        <p:nvSpPr>
+          <p:cNvPr id="5" name="TextBox 4"/>
           <p:cNvSpPr txBox="1"/>
           <p:nvPr/>
         </p:nvSpPr>
         <p:spPr>
           <a:xfrm>
-            <a:off x="914400" y="1828800"/>
-            <a:ext cx="10332720" cy="4114800"/>
+            <a:off x="914400" y="1645920"/>
+            <a:ext cx="10332720" cy="4572000"/>
           </a:xfrm>
           <a:prstGeom prst="rect">
             <a:avLst/>
@@ -4610,18 +4780,105 @@
             <a:r>
               <a:rPr b="1" sz="2000">
                 <a:solidFill>
-                  <a:srgbClr val="0F172A"/>
-                </a:solidFill>
-              </a:rPr>
-              <a:t>■ 강좌 목표 </a:t>
+                  <a:srgbClr val="93C5FD"/>
+                </a:solidFill>
+              </a:rPr>
+              <a:t>■ 오늘 배운 내용 요약: </a:t>
             </a:r>
             <a:r>
               <a:rPr sz="1800">
                 <a:solidFill>
-                  <a:srgbClr val="475569"/>
-                </a:solidFill>
-              </a:rPr>
-              <a:t>AI를 처음 다루거나 제대로 활용하지 못하는 분들에게 생활 속에서 AI를 즐겁게 활용하는 구체적인 가이드와 요령을 소개합니다.</a:t>
+                  <a:srgbClr val="CBD5E1"/>
+                </a:solidFill>
+              </a:rPr>
+              <a:t/>
+            </a:r>
+          </a:p>
+          <a:p>
+            <a:pPr lvl="1">
+              <a:lnSpc>
+                <a:spcPct val="120000"/>
+              </a:lnSpc>
+              <a:spcAft>
+                <a:spcPts val="800"/>
+              </a:spcAft>
+              <a:defRPr>
+                <a:latin typeface="Malgun Gothic"/>
+              </a:defRPr>
+            </a:pPr>
+            <a:r>
+              <a:rPr b="1" sz="1800">
+                <a:solidFill>
+                  <a:srgbClr val="93C5FD"/>
+                </a:solidFill>
+              </a:rPr>
+              <a:t>1. R-C-T-F 기법: </a:t>
+            </a:r>
+            <a:r>
+              <a:rPr sz="1600">
+                <a:solidFill>
+                  <a:srgbClr val="CBD5E1"/>
+                </a:solidFill>
+              </a:rPr>
+              <a:t>기본적이고 구체적인 의사소통 뼈대 수립</a:t>
+            </a:r>
+          </a:p>
+          <a:p>
+            <a:pPr lvl="1">
+              <a:lnSpc>
+                <a:spcPct val="120000"/>
+              </a:lnSpc>
+              <a:spcAft>
+                <a:spcPts val="800"/>
+              </a:spcAft>
+              <a:defRPr>
+                <a:latin typeface="Malgun Gothic"/>
+              </a:defRPr>
+            </a:pPr>
+            <a:r>
+              <a:rPr b="1" sz="1800">
+                <a:solidFill>
+                  <a:srgbClr val="93C5FD"/>
+                </a:solidFill>
+              </a:rPr>
+              <a:t>2. CoT 기법: </a:t>
+            </a:r>
+            <a:r>
+              <a:rPr sz="1600">
+                <a:solidFill>
+                  <a:srgbClr val="CBD5E1"/>
+                </a:solidFill>
+              </a:rPr>
+              <a:t>논리적 절차를 순차적으로 생각하게 유도</a:t>
+            </a:r>
+          </a:p>
+          <a:p>
+            <a:pPr lvl="1">
+              <a:lnSpc>
+                <a:spcPct val="120000"/>
+              </a:lnSpc>
+              <a:spcAft>
+                <a:spcPts val="800"/>
+              </a:spcAft>
+              <a:defRPr>
+                <a:latin typeface="Malgun Gothic"/>
+              </a:defRPr>
+            </a:pPr>
+            <a:r>
+              <a:rPr b="1" sz="1800">
+                <a:solidFill>
+                  <a:srgbClr val="93C5FD"/>
+                </a:solidFill>
+              </a:rPr>
+              <a:t>3. Shot 기법: </a:t>
+            </a:r>
+            <a:r>
+              <a:rPr sz="1600">
+                <a:solidFill>
+                  <a:srgbClr val="CBD5E1"/>
+                </a:solidFill>
+              </a:rPr>
+              <a:t>예시를 통해 원하는 문서 형식과 뉘앙스를 교육</a:t>
             </a:r>
           </a:p>
           <a:p>
@@ -4637,16 +4894,24 @@
               </a:defRPr>
             </a:pPr>
             <a:r>
+              <a:rPr b="1" sz="2000">
+                <a:solidFill>
+                  <a:srgbClr val="93C5FD"/>
+                </a:solidFill>
+              </a:rPr>
+              <a:t>■ 1강 도전해보기 (미션): </a:t>
+            </a:r>
+            <a:r>
               <a:rPr sz="1800">
                 <a:solidFill>
-                  <a:srgbClr val="475569"/>
+                  <a:srgbClr val="CBD5E1"/>
                 </a:solidFill>
               </a:rPr>
               <a:t/>
             </a:r>
           </a:p>
           <a:p>
-            <a:pPr>
+            <a:pPr lvl="1">
               <a:lnSpc>
                 <a:spcPct val="120000"/>
               </a:lnSpc>
@@ -4658,20 +4923,107 @@
               </a:defRPr>
             </a:pPr>
             <a:r>
-              <a:rPr b="1" sz="2000">
-                <a:solidFill>
-                  <a:srgbClr val="0F172A"/>
-                </a:solidFill>
-              </a:rPr>
-              <a:t>■ 수강 대상 </a:t>
-            </a:r>
-            <a:r>
-              <a:rPr sz="1800">
-                <a:solidFill>
-                  <a:srgbClr val="475569"/>
-                </a:solidFill>
-              </a:rPr>
-              <a:t>AI를 입문하거나 어렵게 느끼시는 분, 일상이나 업무에서 AI 비서를 효율적으로 다루고 싶으신 분</a:t>
+              <a:rPr b="1" sz="1800">
+                <a:solidFill>
+                  <a:srgbClr val="93C5FD"/>
+                </a:solidFill>
+              </a:rPr>
+              <a:t>1. AI를 이용해 내 목소리로 노래 만들기 </a:t>
+            </a:r>
+            <a:r>
+              <a:rPr sz="1600">
+                <a:solidFill>
+                  <a:srgbClr val="CBD5E1"/>
+                </a:solidFill>
+              </a:rPr>
+              <a:t>(suno-ai-app 이용)</a:t>
+            </a:r>
+          </a:p>
+          <a:p>
+            <a:pPr lvl="1">
+              <a:lnSpc>
+                <a:spcPct val="120000"/>
+              </a:lnSpc>
+              <a:spcAft>
+                <a:spcPts val="800"/>
+              </a:spcAft>
+              <a:defRPr>
+                <a:latin typeface="Malgun Gothic"/>
+              </a:defRPr>
+            </a:pPr>
+            <a:r>
+              <a:rPr b="1" sz="1800">
+                <a:solidFill>
+                  <a:srgbClr val="93C5FD"/>
+                </a:solidFill>
+              </a:rPr>
+              <a:t>2. AI를 이용해 함께하고 싶은 게임 만들기 </a:t>
+            </a:r>
+            <a:r>
+              <a:rPr sz="1600">
+                <a:solidFill>
+                  <a:srgbClr val="CBD5E1"/>
+                </a:solidFill>
+              </a:rPr>
+              <a:t>(AI와 함께하는 블록코딩으로 레고처럼 만들어보기)</a:t>
+            </a:r>
+          </a:p>
+          <a:p>
+            <a:pPr lvl="1">
+              <a:lnSpc>
+                <a:spcPct val="120000"/>
+              </a:lnSpc>
+              <a:spcAft>
+                <a:spcPts val="800"/>
+              </a:spcAft>
+              <a:defRPr>
+                <a:latin typeface="Malgun Gothic"/>
+              </a:defRPr>
+            </a:pPr>
+            <a:r>
+              <a:rPr b="1" sz="1800">
+                <a:solidFill>
+                  <a:srgbClr val="93C5FD"/>
+                </a:solidFill>
+              </a:rPr>
+              <a:t>3. AI를 이용해 3분 이하 다큐멘터리 영상 초안 만들기 (자막 포함) </a:t>
+            </a:r>
+            <a:r>
+              <a:rPr sz="1600">
+                <a:solidFill>
+                  <a:srgbClr val="CBD5E1"/>
+                </a:solidFill>
+              </a:rPr>
+              <a:t/>
+            </a:r>
+          </a:p>
+          <a:p>
+            <a:pPr lvl="2">
+              <a:lnSpc>
+                <a:spcPct val="120000"/>
+              </a:lnSpc>
+              <a:spcAft>
+                <a:spcPts val="800"/>
+              </a:spcAft>
+              <a:defRPr>
+                <a:latin typeface="Malgun Gothic"/>
+              </a:defRPr>
+            </a:pPr>
+            <a:r>
+              <a:rPr b="1" sz="1600">
+                <a:solidFill>
+                  <a:srgbClr val="93C5FD"/>
+                </a:solidFill>
+              </a:rPr>
+              <a:t>• 추천 주제: </a:t>
+            </a:r>
+            <a:r>
+              <a:rPr sz="1400">
+                <a:solidFill>
+                  <a:srgbClr val="CBD5E1"/>
+                </a:solidFill>
+              </a:rPr>
+              <a:t>내 남동생을 소개합니다, 우리집 강아지 소개 등 친근한 일상 이야기</a:t>
             </a:r>
           </a:p>
         </p:txBody>
@@ -4684,17 +5036,9 @@
 </p:sld>
 </file>
 
-<file path=ppt/slides/slide3.xml><?xml version="1.0" encoding="utf-8"?>
+<file path=ppt/slides/slide2.xml><?xml version="1.0" encoding="utf-8"?>
 <p:sld xmlns:a="http://schemas.openxmlformats.org/drawingml/2006/main" xmlns:p="http://schemas.openxmlformats.org/presentationml/2006/main" xmlns:r="http://schemas.openxmlformats.org/officeDocument/2006/relationships">
   <p:cSld>
-    <p:bg>
-      <p:bgPr>
-        <a:solidFill>
-          <a:srgbClr val="F8FAFC"/>
-        </a:solidFill>
-        <a:effectLst/>
-      </p:bgPr>
-    </p:bg>
     <p:spTree>
       <p:nvGrpSpPr>
         <p:cNvPr id="1" name=""/>
@@ -4702,9 +5046,33 @@
         <p:nvPr/>
       </p:nvGrpSpPr>
       <p:grpSpPr/>
-      <p:sp>
-        <p:nvSpPr>
-          <p:cNvPr id="2" name="Rectangle 1"/>
+      <p:pic>
+        <p:nvPicPr>
+          <p:cNvPr id="2" name="Picture 1" descr="ai_ppt_bg_1783143682050.png"/>
+          <p:cNvPicPr>
+            <a:picLocks noChangeAspect="1"/>
+          </p:cNvPicPr>
+          <p:nvPr/>
+        </p:nvPicPr>
+        <p:blipFill>
+          <a:blip r:embed="rId2"/>
+          <a:stretch>
+            <a:fillRect/>
+          </a:stretch>
+        </p:blipFill>
+        <p:spPr>
+          <a:xfrm>
+            <a:off x="0" y="0"/>
+            <a:ext cx="12191695" cy="6858000"/>
+          </a:xfrm>
+          <a:prstGeom prst="rect">
+            <a:avLst/>
+          </a:prstGeom>
+        </p:spPr>
+      </p:pic>
+      <p:sp>
+        <p:nvSpPr>
+          <p:cNvPr id="3" name="Rectangle 2"/>
           <p:cNvSpPr/>
           <p:nvPr/>
         </p:nvSpPr>
@@ -4717,7 +5085,7 @@
             <a:avLst/>
           </a:prstGeom>
           <a:solidFill>
-            <a:srgbClr val="2563EB"/>
+            <a:srgbClr val="22D3EE"/>
           </a:solidFill>
           <a:ln>
             <a:noFill/>
@@ -4747,7 +5115,7 @@
       </p:sp>
       <p:sp>
         <p:nvSpPr>
-          <p:cNvPr id="3" name="TextBox 2"/>
+          <p:cNvPr id="4" name="TextBox 3"/>
           <p:cNvSpPr txBox="1"/>
           <p:nvPr/>
         </p:nvSpPr>
@@ -4770,20 +5138,20 @@
             <a:pPr>
               <a:defRPr sz="3200" b="1">
                 <a:solidFill>
-                  <a:srgbClr val="0F172A"/>
-                </a:solidFill>
-                <a:latin typeface="Malgun Gothic"/>
-              </a:defRPr>
-            </a:pPr>
-            <a:r>
-              <a:t>🌎 1. AI 동향 및 인사이트</a:t>
-            </a:r>
-          </a:p>
-        </p:txBody>
-      </p:sp>
-      <p:sp>
-        <p:nvSpPr>
-          <p:cNvPr id="4" name="TextBox 3"/>
+                  <a:srgbClr val="FFFFFF"/>
+                </a:solidFill>
+                <a:latin typeface="Malgun Gothic"/>
+              </a:defRPr>
+            </a:pPr>
+            <a:r>
+              <a:t>🎯 강좌 개요</a:t>
+            </a:r>
+          </a:p>
+        </p:txBody>
+      </p:sp>
+      <p:sp>
+        <p:nvSpPr>
+          <p:cNvPr id="5" name="TextBox 4"/>
           <p:cNvSpPr txBox="1"/>
           <p:nvPr/>
         </p:nvSpPr>
@@ -4817,22 +5185,22 @@
             <a:r>
               <a:rPr b="1" sz="2000">
                 <a:solidFill>
-                  <a:srgbClr val="0F172A"/>
-                </a:solidFill>
-              </a:rPr>
-              <a:t>💡 핵심 메시지: </a:t>
+                  <a:srgbClr val="93C5FD"/>
+                </a:solidFill>
+              </a:rPr>
+              <a:t>■ 강좌 목표 </a:t>
             </a:r>
             <a:r>
               <a:rPr sz="1800">
                 <a:solidFill>
-                  <a:srgbClr val="475569"/>
-                </a:solidFill>
-              </a:rPr>
-              <a:t>AI를 배우려고 기 쓰지 마라. 어떻게 쓸지를 고민해라.</a:t>
-            </a:r>
-          </a:p>
-          <a:p>
-            <a:pPr lvl="1">
+                  <a:srgbClr val="CBD5E1"/>
+                </a:solidFill>
+              </a:rPr>
+              <a:t>AI를 처음 다루거나 제대로 활용하지 못하는 분들에게 생활 속에서 AI를 즐겁게 활용하는 구체적인 가이드와 요령을 소개합니다.</a:t>
+            </a:r>
+          </a:p>
+          <a:p>
+            <a:pPr>
               <a:lnSpc>
                 <a:spcPct val="120000"/>
               </a:lnSpc>
@@ -4844,24 +5212,16 @@
               </a:defRPr>
             </a:pPr>
             <a:r>
-              <a:rPr b="1" sz="1800">
-                <a:solidFill>
-                  <a:srgbClr val="0F172A"/>
-                </a:solidFill>
-              </a:rPr>
-              <a:t>• 제로 클릭: </a:t>
-            </a:r>
-            <a:r>
-              <a:rPr sz="1600">
-                <a:solidFill>
-                  <a:srgbClr val="475569"/>
-                </a:solidFill>
-              </a:rPr>
-              <a:t>정보 소비 방식이 검색 중심에서 AI 검증 및 단일 정답 추천 중심으로 변화</a:t>
-            </a:r>
-          </a:p>
-          <a:p>
-            <a:pPr lvl="1">
+              <a:rPr sz="1800">
+                <a:solidFill>
+                  <a:srgbClr val="CBD5E1"/>
+                </a:solidFill>
+              </a:rPr>
+              <a:t/>
+            </a:r>
+          </a:p>
+          <a:p>
+            <a:pPr>
               <a:lnSpc>
                 <a:spcPct val="120000"/>
               </a:lnSpc>
@@ -4873,49 +5233,20 @@
               </a:defRPr>
             </a:pPr>
             <a:r>
-              <a:rPr b="1" sz="1800">
-                <a:solidFill>
-                  <a:srgbClr val="0F172A"/>
-                </a:solidFill>
-              </a:rPr>
-              <a:t>• 코파일럿: </a:t>
-            </a:r>
-            <a:r>
-              <a:rPr sz="1600">
-                <a:solidFill>
-                  <a:srgbClr val="475569"/>
-                </a:solidFill>
-              </a:rPr>
-              <a:t>업무 도구가 아닌 상호 협력하는 인공지능 '동료'의 시대 도입</a:t>
-            </a:r>
-          </a:p>
-          <a:p>
-            <a:pPr lvl="1">
-              <a:lnSpc>
-                <a:spcPct val="120000"/>
-              </a:lnSpc>
-              <a:spcAft>
-                <a:spcPts val="800"/>
-              </a:spcAft>
-              <a:defRPr>
-                <a:latin typeface="Malgun Gothic"/>
-              </a:defRPr>
-            </a:pPr>
-            <a:r>
-              <a:rPr b="1" sz="1800">
-                <a:solidFill>
-                  <a:srgbClr val="0F172A"/>
-                </a:solidFill>
-              </a:rPr>
-              <a:t>• 생산의 대중화: </a:t>
-            </a:r>
-            <a:r>
-              <a:rPr sz="1600">
-                <a:solidFill>
-                  <a:srgbClr val="475569"/>
-                </a:solidFill>
-              </a:rPr>
-              <a:t>코딩이나 그래픽 지식이 없이도 아이디어 자체가 곧바로 상품이 되는 시대</a:t>
+              <a:rPr b="1" sz="2000">
+                <a:solidFill>
+                  <a:srgbClr val="93C5FD"/>
+                </a:solidFill>
+              </a:rPr>
+              <a:t>■ 수강 대상 </a:t>
+            </a:r>
+            <a:r>
+              <a:rPr sz="1800">
+                <a:solidFill>
+                  <a:srgbClr val="CBD5E1"/>
+                </a:solidFill>
+              </a:rPr>
+              <a:t>AI를 입문하거나 어렵게 느끼시는 분, 일상이나 업무에서 AI 비서를 효율적으로 다루고 싶으신 분</a:t>
             </a:r>
           </a:p>
         </p:txBody>
@@ -4928,17 +5259,9 @@
 </p:sld>
 </file>
 
-<file path=ppt/slides/slide4.xml><?xml version="1.0" encoding="utf-8"?>
+<file path=ppt/slides/slide3.xml><?xml version="1.0" encoding="utf-8"?>
 <p:sld xmlns:a="http://schemas.openxmlformats.org/drawingml/2006/main" xmlns:p="http://schemas.openxmlformats.org/presentationml/2006/main" xmlns:r="http://schemas.openxmlformats.org/officeDocument/2006/relationships">
   <p:cSld>
-    <p:bg>
-      <p:bgPr>
-        <a:solidFill>
-          <a:srgbClr val="F8FAFC"/>
-        </a:solidFill>
-        <a:effectLst/>
-      </p:bgPr>
-    </p:bg>
     <p:spTree>
       <p:nvGrpSpPr>
         <p:cNvPr id="1" name=""/>
@@ -4946,9 +5269,33 @@
         <p:nvPr/>
       </p:nvGrpSpPr>
       <p:grpSpPr/>
-      <p:sp>
-        <p:nvSpPr>
-          <p:cNvPr id="2" name="Rectangle 1"/>
+      <p:pic>
+        <p:nvPicPr>
+          <p:cNvPr id="2" name="Picture 1" descr="ai_ppt_bg_1783143682050.png"/>
+          <p:cNvPicPr>
+            <a:picLocks noChangeAspect="1"/>
+          </p:cNvPicPr>
+          <p:nvPr/>
+        </p:nvPicPr>
+        <p:blipFill>
+          <a:blip r:embed="rId2"/>
+          <a:stretch>
+            <a:fillRect/>
+          </a:stretch>
+        </p:blipFill>
+        <p:spPr>
+          <a:xfrm>
+            <a:off x="0" y="0"/>
+            <a:ext cx="12191695" cy="6858000"/>
+          </a:xfrm>
+          <a:prstGeom prst="rect">
+            <a:avLst/>
+          </a:prstGeom>
+        </p:spPr>
+      </p:pic>
+      <p:sp>
+        <p:nvSpPr>
+          <p:cNvPr id="3" name="Rectangle 2"/>
           <p:cNvSpPr/>
           <p:nvPr/>
         </p:nvSpPr>
@@ -4961,7 +5308,7 @@
             <a:avLst/>
           </a:prstGeom>
           <a:solidFill>
-            <a:srgbClr val="2563EB"/>
+            <a:srgbClr val="22D3EE"/>
           </a:solidFill>
           <a:ln>
             <a:noFill/>
@@ -4991,7 +5338,7 @@
       </p:sp>
       <p:sp>
         <p:nvSpPr>
-          <p:cNvPr id="3" name="TextBox 2"/>
+          <p:cNvPr id="4" name="TextBox 3"/>
           <p:cNvSpPr txBox="1"/>
           <p:nvPr/>
         </p:nvSpPr>
@@ -5014,20 +5361,20 @@
             <a:pPr>
               <a:defRPr sz="3200" b="1">
                 <a:solidFill>
-                  <a:srgbClr val="0F172A"/>
-                </a:solidFill>
-                <a:latin typeface="Malgun Gothic"/>
-              </a:defRPr>
-            </a:pPr>
-            <a:r>
-              <a:t>💡 2. AI 대화하기: 3가지 핵심 기법</a:t>
-            </a:r>
-          </a:p>
-        </p:txBody>
-      </p:sp>
-      <p:sp>
-        <p:nvSpPr>
-          <p:cNvPr id="4" name="TextBox 3"/>
+                  <a:srgbClr val="FFFFFF"/>
+                </a:solidFill>
+                <a:latin typeface="Malgun Gothic"/>
+              </a:defRPr>
+            </a:pPr>
+            <a:r>
+              <a:t>🌎 1. AI 동향 및 인사이트</a:t>
+            </a:r>
+          </a:p>
+        </p:txBody>
+      </p:sp>
+      <p:sp>
+        <p:nvSpPr>
+          <p:cNvPr id="5" name="TextBox 4"/>
           <p:cNvSpPr txBox="1"/>
           <p:nvPr/>
         </p:nvSpPr>
@@ -5061,18 +5408,18 @@
             <a:r>
               <a:rPr b="1" sz="2000">
                 <a:solidFill>
-                  <a:srgbClr val="0F172A"/>
-                </a:solidFill>
-              </a:rPr>
-              <a:t>1. R-C-T-F 공식 (기본 작성법) </a:t>
-            </a:r>
-            <a:r>
-              <a:rPr sz="1800">
-                <a:solidFill>
-                  <a:srgbClr val="475569"/>
-                </a:solidFill>
-              </a:rPr>
-              <a:t>역할(Role) + 배경(Context) + 작업(Task) + 형식(Format)을 결합하는 핵심 뼈대 프롬프트</a:t>
+                  <a:srgbClr val="93C5FD"/>
+                </a:solidFill>
+              </a:rPr>
+              <a:t>🎬 AI 활용 동향 영상: </a:t>
+            </a:r>
+            <a:r>
+              <a:rPr sz="1800" u="sng">
+                <a:solidFill>
+                  <a:srgbClr val="2DD4BF"/>
+                </a:solidFill>
+              </a:rPr>
+              <a:t>https://www.youtube.com/watch?v=HZLJeuu07dI</a:t>
             </a:r>
           </a:p>
           <a:p>
@@ -5090,22 +5437,22 @@
             <a:r>
               <a:rPr b="1" sz="2000">
                 <a:solidFill>
-                  <a:srgbClr val="0F172A"/>
-                </a:solidFill>
-              </a:rPr>
-              <a:t>2. 생각의 고리 (CoT 기법) </a:t>
+                  <a:srgbClr val="93C5FD"/>
+                </a:solidFill>
+              </a:rPr>
+              <a:t>💡 새로운 AI 트렌드: </a:t>
             </a:r>
             <a:r>
               <a:rPr sz="1800">
                 <a:solidFill>
-                  <a:srgbClr val="475569"/>
-                </a:solidFill>
-              </a:rPr>
-              <a:t>"단계별로 차근차근 생각해줘"를 통해 AI의 추론 논리력과 정확도를 획기적으로 상승</a:t>
-            </a:r>
-          </a:p>
-          <a:p>
-            <a:pPr>
+                  <a:srgbClr val="CBD5E1"/>
+                </a:solidFill>
+              </a:rPr>
+              <a:t/>
+            </a:r>
+          </a:p>
+          <a:p>
+            <a:pPr lvl="1">
               <a:lnSpc>
                 <a:spcPct val="120000"/>
               </a:lnSpc>
@@ -5117,20 +5464,107 @@
               </a:defRPr>
             </a:pPr>
             <a:r>
-              <a:rPr b="1" sz="2000">
-                <a:solidFill>
-                  <a:srgbClr val="0F172A"/>
-                </a:solidFill>
-              </a:rPr>
-              <a:t>3. 예시 주입 (Shot 기반 프롬프팅) </a:t>
-            </a:r>
-            <a:r>
-              <a:rPr sz="1800">
-                <a:solidFill>
-                  <a:srgbClr val="475569"/>
-                </a:solidFill>
-              </a:rPr>
-              <a:t>대화 속에 예시(Shot)를 직접 보여주어 일정한 서식과 말투를 완벽하게 모방</a:t>
+              <a:rPr b="1" sz="1800">
+                <a:solidFill>
+                  <a:srgbClr val="93C5FD"/>
+                </a:solidFill>
+              </a:rPr>
+              <a:t>• 에이전틱 AI: </a:t>
+            </a:r>
+            <a:r>
+              <a:rPr sz="1600">
+                <a:solidFill>
+                  <a:srgbClr val="CBD5E1"/>
+                </a:solidFill>
+              </a:rPr>
+              <a:t>대답하는 AI를 넘어, 주어진 목표를 주도적으로 완수하는 AI 시대 (직접 정보 구매 및 요약 등)</a:t>
+            </a:r>
+          </a:p>
+          <a:p>
+            <a:pPr lvl="1">
+              <a:lnSpc>
+                <a:spcPct val="120000"/>
+              </a:lnSpc>
+              <a:spcAft>
+                <a:spcPts val="800"/>
+              </a:spcAft>
+              <a:defRPr>
+                <a:latin typeface="Malgun Gothic"/>
+              </a:defRPr>
+            </a:pPr>
+            <a:r>
+              <a:rPr b="1" sz="1800">
+                <a:solidFill>
+                  <a:srgbClr val="93C5FD"/>
+                </a:solidFill>
+              </a:rPr>
+              <a:t>• 멀티모달: </a:t>
+            </a:r>
+            <a:r>
+              <a:rPr sz="1600">
+                <a:solidFill>
+                  <a:srgbClr val="CBD5E1"/>
+                </a:solidFill>
+              </a:rPr>
+              <a:t>텍스트를 넘어 이미지, 음성, 영상까지 완벽하게 이해하고 창작하는 AI 기술</a:t>
+            </a:r>
+          </a:p>
+          <a:p>
+            <a:pPr lvl="1">
+              <a:lnSpc>
+                <a:spcPct val="120000"/>
+              </a:lnSpc>
+              <a:spcAft>
+                <a:spcPts val="800"/>
+              </a:spcAft>
+              <a:defRPr>
+                <a:latin typeface="Malgun Gothic"/>
+              </a:defRPr>
+            </a:pPr>
+            <a:r>
+              <a:rPr b="1" sz="1800">
+                <a:solidFill>
+                  <a:srgbClr val="93C5FD"/>
+                </a:solidFill>
+              </a:rPr>
+              <a:t>• 온디바이스 AI와 SLM: </a:t>
+            </a:r>
+            <a:r>
+              <a:rPr sz="1600">
+                <a:solidFill>
+                  <a:srgbClr val="CBD5E1"/>
+                </a:solidFill>
+              </a:rPr>
+              <a:t>기기 탑재형 소형 AI로 데이터 유출 없는 보안성과 신속한 오프라인 작업 처리 지원</a:t>
+            </a:r>
+          </a:p>
+          <a:p>
+            <a:pPr lvl="1">
+              <a:lnSpc>
+                <a:spcPct val="120000"/>
+              </a:lnSpc>
+              <a:spcAft>
+                <a:spcPts val="800"/>
+              </a:spcAft>
+              <a:defRPr>
+                <a:latin typeface="Malgun Gothic"/>
+              </a:defRPr>
+            </a:pPr>
+            <a:r>
+              <a:rPr b="1" sz="1800">
+                <a:solidFill>
+                  <a:srgbClr val="93C5FD"/>
+                </a:solidFill>
+              </a:rPr>
+              <a:t>• 피지컬 AI: </a:t>
+            </a:r>
+            <a:r>
+              <a:rPr sz="1600">
+                <a:solidFill>
+                  <a:srgbClr val="CBD5E1"/>
+                </a:solidFill>
+              </a:rPr>
+              <a:t>로보틱스와 AI의 결합으로 스스로 물리적 환경을 판단하고 동작 수행 (예: 완벽한 계란후라이 뒤집기)</a:t>
             </a:r>
           </a:p>
         </p:txBody>
@@ -5143,17 +5577,9 @@
 </p:sld>
 </file>
 
-<file path=ppt/slides/slide5.xml><?xml version="1.0" encoding="utf-8"?>
+<file path=ppt/slides/slide4.xml><?xml version="1.0" encoding="utf-8"?>
 <p:sld xmlns:a="http://schemas.openxmlformats.org/drawingml/2006/main" xmlns:p="http://schemas.openxmlformats.org/presentationml/2006/main" xmlns:r="http://schemas.openxmlformats.org/officeDocument/2006/relationships">
   <p:cSld>
-    <p:bg>
-      <p:bgPr>
-        <a:solidFill>
-          <a:srgbClr val="F8FAFC"/>
-        </a:solidFill>
-        <a:effectLst/>
-      </p:bgPr>
-    </p:bg>
     <p:spTree>
       <p:nvGrpSpPr>
         <p:cNvPr id="1" name=""/>
@@ -5161,9 +5587,33 @@
         <p:nvPr/>
       </p:nvGrpSpPr>
       <p:grpSpPr/>
-      <p:sp>
-        <p:nvSpPr>
-          <p:cNvPr id="2" name="Rectangle 1"/>
+      <p:pic>
+        <p:nvPicPr>
+          <p:cNvPr id="2" name="Picture 1" descr="ai_ppt_bg_1783143682050.png"/>
+          <p:cNvPicPr>
+            <a:picLocks noChangeAspect="1"/>
+          </p:cNvPicPr>
+          <p:nvPr/>
+        </p:nvPicPr>
+        <p:blipFill>
+          <a:blip r:embed="rId2"/>
+          <a:stretch>
+            <a:fillRect/>
+          </a:stretch>
+        </p:blipFill>
+        <p:spPr>
+          <a:xfrm>
+            <a:off x="0" y="0"/>
+            <a:ext cx="12191695" cy="6858000"/>
+          </a:xfrm>
+          <a:prstGeom prst="rect">
+            <a:avLst/>
+          </a:prstGeom>
+        </p:spPr>
+      </p:pic>
+      <p:sp>
+        <p:nvSpPr>
+          <p:cNvPr id="3" name="Rectangle 2"/>
           <p:cNvSpPr/>
           <p:nvPr/>
         </p:nvSpPr>
@@ -5176,7 +5626,7 @@
             <a:avLst/>
           </a:prstGeom>
           <a:solidFill>
-            <a:srgbClr val="2563EB"/>
+            <a:srgbClr val="22D3EE"/>
           </a:solidFill>
           <a:ln>
             <a:noFill/>
@@ -5206,7 +5656,7 @@
       </p:sp>
       <p:sp>
         <p:nvSpPr>
-          <p:cNvPr id="3" name="TextBox 2"/>
+          <p:cNvPr id="4" name="TextBox 3"/>
           <p:cNvSpPr txBox="1"/>
           <p:nvPr/>
         </p:nvSpPr>
@@ -5229,27 +5679,27 @@
             <a:pPr>
               <a:defRPr sz="3200" b="1">
                 <a:solidFill>
-                  <a:srgbClr val="0F172A"/>
-                </a:solidFill>
-                <a:latin typeface="Malgun Gothic"/>
-              </a:defRPr>
-            </a:pPr>
-            <a:r>
-              <a:t>🛠️ 2-1. 프롬프트 작성의 기본: R-C-T-F 공식</a:t>
-            </a:r>
-          </a:p>
-        </p:txBody>
-      </p:sp>
-      <p:sp>
-        <p:nvSpPr>
-          <p:cNvPr id="4" name="TextBox 3"/>
+                  <a:srgbClr val="FFFFFF"/>
+                </a:solidFill>
+                <a:latin typeface="Malgun Gothic"/>
+              </a:defRPr>
+            </a:pPr>
+            <a:r>
+              <a:t>🌎 AI 활용 주요 사례 및 동향 영상</a:t>
+            </a:r>
+          </a:p>
+        </p:txBody>
+      </p:sp>
+      <p:sp>
+        <p:nvSpPr>
+          <p:cNvPr id="5" name="TextBox 4"/>
           <p:cNvSpPr txBox="1"/>
           <p:nvPr/>
         </p:nvSpPr>
         <p:spPr>
           <a:xfrm>
-            <a:off x="914400" y="1645920"/>
-            <a:ext cx="10332720" cy="4572000"/>
+            <a:off x="914400" y="1828800"/>
+            <a:ext cx="10332720" cy="4114800"/>
           </a:xfrm>
           <a:prstGeom prst="rect">
             <a:avLst/>
@@ -5276,18 +5726,18 @@
             <a:r>
               <a:rPr b="1" sz="2000">
                 <a:solidFill>
-                  <a:srgbClr val="0F172A"/>
-                </a:solidFill>
-              </a:rPr>
-              <a:t>📌 R-C-T-F 공식: </a:t>
+                  <a:srgbClr val="93C5FD"/>
+                </a:solidFill>
+              </a:rPr>
+              <a:t>💬 1. AI 상담 (심리 및 고민 상담 - 3분) </a:t>
             </a:r>
             <a:r>
               <a:rPr sz="1800">
                 <a:solidFill>
-                  <a:srgbClr val="475569"/>
-                </a:solidFill>
-              </a:rPr>
-              <a:t>Role(역할) + Context(배경) + Task(작업) + Format(형식)</a:t>
+                  <a:srgbClr val="CBD5E1"/>
+                </a:solidFill>
+              </a:rPr>
+              <a:t>사람에게 말하기 어려운 속마음을 24시간 들어주는 대화형 AI 사례</a:t>
             </a:r>
           </a:p>
           <a:p>
@@ -5305,18 +5755,47 @@
             <a:r>
               <a:rPr b="1" sz="1800">
                 <a:solidFill>
-                  <a:srgbClr val="0F172A"/>
-                </a:solidFill>
-              </a:rPr>
-              <a:t>• Role (역할): </a:t>
-            </a:r>
-            <a:r>
-              <a:rPr sz="1600">
-                <a:solidFill>
-                  <a:srgbClr val="475569"/>
-                </a:solidFill>
-              </a:rPr>
-              <a:t>AI에게 전문가 직함/페르소나 부여 (예: "너는 10년 차 일본 가이드야")</a:t>
+                  <a:srgbClr val="2DD4BF"/>
+                </a:solidFill>
+              </a:rPr>
+              <a:t>🔗 유튜브 링크: </a:t>
+            </a:r>
+            <a:r>
+              <a:rPr sz="1600" u="sng">
+                <a:solidFill>
+                  <a:srgbClr val="2DD4BF"/>
+                </a:solidFill>
+              </a:rPr>
+              <a:t>https://youtube.com/shorts/1UNUNlzH3l8</a:t>
+            </a:r>
+          </a:p>
+          <a:p>
+            <a:pPr>
+              <a:lnSpc>
+                <a:spcPct val="120000"/>
+              </a:lnSpc>
+              <a:spcAft>
+                <a:spcPts val="800"/>
+              </a:spcAft>
+              <a:defRPr>
+                <a:latin typeface="Malgun Gothic"/>
+              </a:defRPr>
+            </a:pPr>
+            <a:r>
+              <a:rPr b="1" sz="2000">
+                <a:solidFill>
+                  <a:srgbClr val="93C5FD"/>
+                </a:solidFill>
+              </a:rPr>
+              <a:t>✈️ 2. AI 여행 계획 세우기 (3분) </a:t>
+            </a:r>
+            <a:r>
+              <a:rPr sz="1800">
+                <a:solidFill>
+                  <a:srgbClr val="CBD5E1"/>
+                </a:solidFill>
+              </a:rPr>
+              <a:t>여행지 정보 입력으로 동선 설계, 구글지도 매핑, 맛집 산출하는 사례</a:t>
             </a:r>
           </a:p>
           <a:p>
@@ -5334,18 +5813,47 @@
             <a:r>
               <a:rPr b="1" sz="1800">
                 <a:solidFill>
-                  <a:srgbClr val="0F172A"/>
-                </a:solidFill>
-              </a:rPr>
-              <a:t>• Context (배경): </a:t>
-            </a:r>
-            <a:r>
-              <a:rPr sz="1600">
-                <a:solidFill>
-                  <a:srgbClr val="475569"/>
-                </a:solidFill>
-              </a:rPr>
-              <a:t>구체적인 본인의 상황 및 제한 요소 전달 (예: "무릎 아픈 부모님 동반")</a:t>
+                  <a:srgbClr val="2DD4BF"/>
+                </a:solidFill>
+              </a:rPr>
+              <a:t>🔗 유튜브 링크: </a:t>
+            </a:r>
+            <a:r>
+              <a:rPr sz="1600" u="sng">
+                <a:solidFill>
+                  <a:srgbClr val="2DD4BF"/>
+                </a:solidFill>
+              </a:rPr>
+              <a:t>https://www.youtube.com/watch?v=kYJ-l27k8x8</a:t>
+            </a:r>
+          </a:p>
+          <a:p>
+            <a:pPr>
+              <a:lnSpc>
+                <a:spcPct val="120000"/>
+              </a:lnSpc>
+              <a:spcAft>
+                <a:spcPts val="800"/>
+              </a:spcAft>
+              <a:defRPr>
+                <a:latin typeface="Malgun Gothic"/>
+              </a:defRPr>
+            </a:pPr>
+            <a:r>
+              <a:rPr b="1" sz="2000">
+                <a:solidFill>
+                  <a:srgbClr val="93C5FD"/>
+                </a:solidFill>
+              </a:rPr>
+              <a:t>🎬 3. 비디오 생성 AI, Sora 소개 (2분 30초) </a:t>
+            </a:r>
+            <a:r>
+              <a:rPr sz="1800">
+                <a:solidFill>
+                  <a:srgbClr val="CBD5E1"/>
+                </a:solidFill>
+              </a:rPr>
+              <a:t>텍스트 묘사만으로 고화질 3D 비디오를 창작하는 혁신적 영상 AI 기술</a:t>
             </a:r>
           </a:p>
           <a:p>
@@ -5363,47 +5871,18 @@
             <a:r>
               <a:rPr b="1" sz="1800">
                 <a:solidFill>
-                  <a:srgbClr val="0F172A"/>
-                </a:solidFill>
-              </a:rPr>
-              <a:t>• Task (작업): </a:t>
-            </a:r>
-            <a:r>
-              <a:rPr sz="1600">
-                <a:solidFill>
-                  <a:srgbClr val="475569"/>
-                </a:solidFill>
-              </a:rPr>
-              <a:t>수행할 구체적인 미션/명령 (예: "동선을 최소화한 최적 코스 설계")</a:t>
-            </a:r>
-          </a:p>
-          <a:p>
-            <a:pPr lvl="1">
-              <a:lnSpc>
-                <a:spcPct val="120000"/>
-              </a:lnSpc>
-              <a:spcAft>
-                <a:spcPts val="800"/>
-              </a:spcAft>
-              <a:defRPr>
-                <a:latin typeface="Malgun Gothic"/>
-              </a:defRPr>
-            </a:pPr>
-            <a:r>
-              <a:rPr b="1" sz="1800">
-                <a:solidFill>
-                  <a:srgbClr val="0F172A"/>
-                </a:solidFill>
-              </a:rPr>
-              <a:t>• Format (형식): </a:t>
-            </a:r>
-            <a:r>
-              <a:rPr sz="1600">
-                <a:solidFill>
-                  <a:srgbClr val="475569"/>
-                </a:solidFill>
-              </a:rPr>
-              <a:t>원하는 출력 양식 지정 (예: "시간대별 깔끔한 표로 정리해줘")</a:t>
+                  <a:srgbClr val="2DD4BF"/>
+                </a:solidFill>
+              </a:rPr>
+              <a:t>🔗 유튜브 링크: </a:t>
+            </a:r>
+            <a:r>
+              <a:rPr sz="1600" u="sng">
+                <a:solidFill>
+                  <a:srgbClr val="2DD4BF"/>
+                </a:solidFill>
+              </a:rPr>
+              <a:t>https://www.youtube.com/watch?v=HK6y8DMNqQ0</a:t>
             </a:r>
           </a:p>
         </p:txBody>
@@ -5416,17 +5895,9 @@
 </p:sld>
 </file>
 
-<file path=ppt/slides/slide6.xml><?xml version="1.0" encoding="utf-8"?>
+<file path=ppt/slides/slide5.xml><?xml version="1.0" encoding="utf-8"?>
 <p:sld xmlns:a="http://schemas.openxmlformats.org/drawingml/2006/main" xmlns:p="http://schemas.openxmlformats.org/presentationml/2006/main" xmlns:r="http://schemas.openxmlformats.org/officeDocument/2006/relationships">
   <p:cSld>
-    <p:bg>
-      <p:bgPr>
-        <a:solidFill>
-          <a:srgbClr val="F8FAFC"/>
-        </a:solidFill>
-        <a:effectLst/>
-      </p:bgPr>
-    </p:bg>
     <p:spTree>
       <p:nvGrpSpPr>
         <p:cNvPr id="1" name=""/>
@@ -5434,9 +5905,33 @@
         <p:nvPr/>
       </p:nvGrpSpPr>
       <p:grpSpPr/>
-      <p:sp>
-        <p:nvSpPr>
-          <p:cNvPr id="2" name="Rectangle 1"/>
+      <p:pic>
+        <p:nvPicPr>
+          <p:cNvPr id="2" name="Picture 1" descr="ai_ppt_bg_1783143682050.png"/>
+          <p:cNvPicPr>
+            <a:picLocks noChangeAspect="1"/>
+          </p:cNvPicPr>
+          <p:nvPr/>
+        </p:nvPicPr>
+        <p:blipFill>
+          <a:blip r:embed="rId2"/>
+          <a:stretch>
+            <a:fillRect/>
+          </a:stretch>
+        </p:blipFill>
+        <p:spPr>
+          <a:xfrm>
+            <a:off x="0" y="0"/>
+            <a:ext cx="12191695" cy="6858000"/>
+          </a:xfrm>
+          <a:prstGeom prst="rect">
+            <a:avLst/>
+          </a:prstGeom>
+        </p:spPr>
+      </p:pic>
+      <p:sp>
+        <p:nvSpPr>
+          <p:cNvPr id="3" name="Rectangle 2"/>
           <p:cNvSpPr/>
           <p:nvPr/>
         </p:nvSpPr>
@@ -5449,7 +5944,7 @@
             <a:avLst/>
           </a:prstGeom>
           <a:solidFill>
-            <a:srgbClr val="2563EB"/>
+            <a:srgbClr val="22D3EE"/>
           </a:solidFill>
           <a:ln>
             <a:noFill/>
@@ -5479,7 +5974,7 @@
       </p:sp>
       <p:sp>
         <p:nvSpPr>
-          <p:cNvPr id="3" name="TextBox 2"/>
+          <p:cNvPr id="4" name="TextBox 3"/>
           <p:cNvSpPr txBox="1"/>
           <p:nvPr/>
         </p:nvSpPr>
@@ -5502,20 +5997,20 @@
             <a:pPr>
               <a:defRPr sz="3200" b="1">
                 <a:solidFill>
-                  <a:srgbClr val="0F172A"/>
-                </a:solidFill>
-                <a:latin typeface="Malgun Gothic"/>
-              </a:defRPr>
-            </a:pPr>
-            <a:r>
-              <a:t>🧠 2-2. 생각의 고리: Chain of Thought (CoT)</a:t>
-            </a:r>
-          </a:p>
-        </p:txBody>
-      </p:sp>
-      <p:sp>
-        <p:nvSpPr>
-          <p:cNvPr id="4" name="TextBox 3"/>
+                  <a:srgbClr val="FFFFFF"/>
+                </a:solidFill>
+                <a:latin typeface="Malgun Gothic"/>
+              </a:defRPr>
+            </a:pPr>
+            <a:r>
+              <a:t>💡 2. AI 대화하기: 3가지 기법과 바이브 코딩</a:t>
+            </a:r>
+          </a:p>
+        </p:txBody>
+      </p:sp>
+      <p:sp>
+        <p:nvSpPr>
+          <p:cNvPr id="5" name="TextBox 4"/>
           <p:cNvSpPr txBox="1"/>
           <p:nvPr/>
         </p:nvSpPr>
@@ -5549,18 +6044,18 @@
             <a:r>
               <a:rPr b="1" sz="2000">
                 <a:solidFill>
-                  <a:srgbClr val="0F172A"/>
-                </a:solidFill>
-              </a:rPr>
-              <a:t>■ 핵심 개념: </a:t>
+                  <a:srgbClr val="93C5FD"/>
+                </a:solidFill>
+              </a:rPr>
+              <a:t>1. R-C-T-F 공식 (기본 작성법) </a:t>
             </a:r>
             <a:r>
               <a:rPr sz="1800">
                 <a:solidFill>
-                  <a:srgbClr val="475569"/>
-                </a:solidFill>
-              </a:rPr>
-              <a:t>복잡한 문제 해결 시 바로 답을 구하기보다 논리적 절차를 순차적으로 생각하게 유도합니다.</a:t>
+                  <a:srgbClr val="CBD5E1"/>
+                </a:solidFill>
+              </a:rPr>
+              <a:t>역할(Role) + 배경(Context) + 작업(Task) + 형식(Format)을 결합하는 기본 기법</a:t>
             </a:r>
           </a:p>
           <a:p>
@@ -5578,18 +6073,18 @@
             <a:r>
               <a:rPr b="1" sz="2000">
                 <a:solidFill>
-                  <a:srgbClr val="0F172A"/>
-                </a:solidFill>
-              </a:rPr>
-              <a:t>■ 핵심 키워드: </a:t>
+                  <a:srgbClr val="93C5FD"/>
+                </a:solidFill>
+              </a:rPr>
+              <a:t>2. 생각의 고리 (CoT 기법) </a:t>
             </a:r>
             <a:r>
               <a:rPr sz="1800">
                 <a:solidFill>
-                  <a:srgbClr val="475569"/>
-                </a:solidFill>
-              </a:rPr>
-              <a:t>"단계별로 생각을 나누어 차근차근 풀이해줘" 문장 추가</a:t>
+                  <a:srgbClr val="CBD5E1"/>
+                </a:solidFill>
+              </a:rPr>
+              <a:t>"단계별로 차근차근 생각해줘"를 통해 AI의 추론 논리력과 계산 정확도를 획기적으로 상승</a:t>
             </a:r>
           </a:p>
           <a:p>
@@ -5607,18 +6102,76 @@
             <a:r>
               <a:rPr b="1" sz="2000">
                 <a:solidFill>
-                  <a:srgbClr val="0F172A"/>
-                </a:solidFill>
-              </a:rPr>
-              <a:t>■ 효과: </a:t>
+                  <a:srgbClr val="93C5FD"/>
+                </a:solidFill>
+              </a:rPr>
+              <a:t>3. 예시 주입 (Shot 기반 프롬프팅) </a:t>
             </a:r>
             <a:r>
               <a:rPr sz="1800">
                 <a:solidFill>
-                  <a:srgbClr val="475569"/>
-                </a:solidFill>
-              </a:rPr>
-              <a:t>수학, 기획, 로직 설계 등 복잡한 프롬프트에서 AI의 오답률과 오작동을 대폭 감소시킵니다.</a:t>
+                  <a:srgbClr val="CBD5E1"/>
+                </a:solidFill>
+              </a:rPr>
+              <a:t>대화 속에 예시(Shot)를 직접 보여주어 일정한 서식과 말투를 완벽하게 학습</a:t>
+            </a:r>
+          </a:p>
+          <a:p>
+            <a:pPr>
+              <a:lnSpc>
+                <a:spcPct val="120000"/>
+              </a:lnSpc>
+              <a:spcAft>
+                <a:spcPts val="800"/>
+              </a:spcAft>
+              <a:defRPr>
+                <a:latin typeface="Malgun Gothic"/>
+              </a:defRPr>
+            </a:pPr>
+            <a:r>
+              <a:rPr b="1" sz="2000">
+                <a:solidFill>
+                  <a:srgbClr val="93C5FD"/>
+                </a:solidFill>
+              </a:rPr>
+              <a:t>🏄‍♂️ 바이브 코딩 (Vibe Coding): </a:t>
+            </a:r>
+            <a:r>
+              <a:rPr sz="1800">
+                <a:solidFill>
+                  <a:srgbClr val="CBD5E1"/>
+                </a:solidFill>
+              </a:rPr>
+              <a:t>코드 문법을 타이핑하지 않고 자연어로 원하는 앱의 기획과 의도(느낌)를 전달해 빌드</a:t>
+            </a:r>
+          </a:p>
+          <a:p>
+            <a:pPr>
+              <a:lnSpc>
+                <a:spcPct val="120000"/>
+              </a:lnSpc>
+              <a:spcAft>
+                <a:spcPts val="800"/>
+              </a:spcAft>
+              <a:defRPr>
+                <a:latin typeface="Malgun Gothic"/>
+              </a:defRPr>
+            </a:pPr>
+            <a:r>
+              <a:rPr b="1" sz="2000">
+                <a:solidFill>
+                  <a:srgbClr val="2DD4BF"/>
+                </a:solidFill>
+              </a:rPr>
+              <a:t>🔗 참고 영상 [남들과 다르게 프롬프트 짜기]: </a:t>
+            </a:r>
+            <a:r>
+              <a:rPr sz="1800" u="sng">
+                <a:solidFill>
+                  <a:srgbClr val="2DD4BF"/>
+                </a:solidFill>
+              </a:rPr>
+              <a:t>https://youtube.com/shorts/TIr6_Bo8zfg</a:t>
             </a:r>
           </a:p>
         </p:txBody>
@@ -5631,17 +6184,9 @@
 </p:sld>
 </file>
 
-<file path=ppt/slides/slide7.xml><?xml version="1.0" encoding="utf-8"?>
+<file path=ppt/slides/slide6.xml><?xml version="1.0" encoding="utf-8"?>
 <p:sld xmlns:a="http://schemas.openxmlformats.org/drawingml/2006/main" xmlns:p="http://schemas.openxmlformats.org/presentationml/2006/main" xmlns:r="http://schemas.openxmlformats.org/officeDocument/2006/relationships">
   <p:cSld>
-    <p:bg>
-      <p:bgPr>
-        <a:solidFill>
-          <a:srgbClr val="F8FAFC"/>
-        </a:solidFill>
-        <a:effectLst/>
-      </p:bgPr>
-    </p:bg>
     <p:spTree>
       <p:nvGrpSpPr>
         <p:cNvPr id="1" name=""/>
@@ -5649,9 +6194,33 @@
         <p:nvPr/>
       </p:nvGrpSpPr>
       <p:grpSpPr/>
-      <p:sp>
-        <p:nvSpPr>
-          <p:cNvPr id="2" name="Rectangle 1"/>
+      <p:pic>
+        <p:nvPicPr>
+          <p:cNvPr id="2" name="Picture 1" descr="ai_ppt_bg_1783143682050.png"/>
+          <p:cNvPicPr>
+            <a:picLocks noChangeAspect="1"/>
+          </p:cNvPicPr>
+          <p:nvPr/>
+        </p:nvPicPr>
+        <p:blipFill>
+          <a:blip r:embed="rId2"/>
+          <a:stretch>
+            <a:fillRect/>
+          </a:stretch>
+        </p:blipFill>
+        <p:spPr>
+          <a:xfrm>
+            <a:off x="0" y="0"/>
+            <a:ext cx="12191695" cy="6858000"/>
+          </a:xfrm>
+          <a:prstGeom prst="rect">
+            <a:avLst/>
+          </a:prstGeom>
+        </p:spPr>
+      </p:pic>
+      <p:sp>
+        <p:nvSpPr>
+          <p:cNvPr id="3" name="Rectangle 2"/>
           <p:cNvSpPr/>
           <p:nvPr/>
         </p:nvSpPr>
@@ -5664,7 +6233,7 @@
             <a:avLst/>
           </a:prstGeom>
           <a:solidFill>
-            <a:srgbClr val="2563EB"/>
+            <a:srgbClr val="22D3EE"/>
           </a:solidFill>
           <a:ln>
             <a:noFill/>
@@ -5694,7 +6263,7 @@
       </p:sp>
       <p:sp>
         <p:nvSpPr>
-          <p:cNvPr id="3" name="TextBox 2"/>
+          <p:cNvPr id="4" name="TextBox 3"/>
           <p:cNvSpPr txBox="1"/>
           <p:nvPr/>
         </p:nvSpPr>
@@ -5717,20 +6286,20 @@
             <a:pPr>
               <a:defRPr sz="3200" b="1">
                 <a:solidFill>
-                  <a:srgbClr val="0F172A"/>
-                </a:solidFill>
-                <a:latin typeface="Malgun Gothic"/>
-              </a:defRPr>
-            </a:pPr>
-            <a:r>
-              <a:t>🎯 2-3. 예시 주입: 샷(Shot) 기반 프롬프팅</a:t>
-            </a:r>
-          </a:p>
-        </p:txBody>
-      </p:sp>
-      <p:sp>
-        <p:nvSpPr>
-          <p:cNvPr id="4" name="TextBox 3"/>
+                  <a:srgbClr val="FFFFFF"/>
+                </a:solidFill>
+                <a:latin typeface="Malgun Gothic"/>
+              </a:defRPr>
+            </a:pPr>
+            <a:r>
+              <a:t>🛠️ 2-1. 프롬프트 작성의 기본: R-C-T-F 공식</a:t>
+            </a:r>
+          </a:p>
+        </p:txBody>
+      </p:sp>
+      <p:sp>
+        <p:nvSpPr>
+          <p:cNvPr id="5" name="TextBox 4"/>
           <p:cNvSpPr txBox="1"/>
           <p:nvPr/>
         </p:nvSpPr>
@@ -5764,18 +6333,18 @@
             <a:r>
               <a:rPr b="1" sz="2000">
                 <a:solidFill>
-                  <a:srgbClr val="0F172A"/>
-                </a:solidFill>
-              </a:rPr>
-              <a:t>■ 샷(Shot) 종류와 특징: </a:t>
+                  <a:srgbClr val="93C5FD"/>
+                </a:solidFill>
+              </a:rPr>
+              <a:t>📌 R-C-T-F 공식: </a:t>
             </a:r>
             <a:r>
               <a:rPr sz="1800">
                 <a:solidFill>
-                  <a:srgbClr val="475569"/>
-                </a:solidFill>
-              </a:rPr>
-              <a:t>예시 개수에 따라 스타일 반영 수준이 다릅니다.</a:t>
+                  <a:srgbClr val="CBD5E1"/>
+                </a:solidFill>
+              </a:rPr>
+              <a:t>Role(역할) + Context(배경) + Task(작업) + Format(형식)</a:t>
             </a:r>
           </a:p>
           <a:p>
@@ -5793,18 +6362,18 @@
             <a:r>
               <a:rPr b="1" sz="1800">
                 <a:solidFill>
-                  <a:srgbClr val="0F172A"/>
-                </a:solidFill>
-              </a:rPr>
-              <a:t>• Zero-shot (제로샷): </a:t>
+                  <a:srgbClr val="93C5FD"/>
+                </a:solidFill>
+              </a:rPr>
+              <a:t>• Role (역할): </a:t>
             </a:r>
             <a:r>
               <a:rPr sz="1600">
                 <a:solidFill>
-                  <a:srgbClr val="475569"/>
-                </a:solidFill>
-              </a:rPr>
-              <a:t>예시 없이 즉시 질문 (기본적인 단순 일상 질의에 사용)</a:t>
+                  <a:srgbClr val="CBD5E1"/>
+                </a:solidFill>
+              </a:rPr>
+              <a:t>AI에게 전문가 직함/페르소나 부여 (예: "너는 10년 차 일본 가이드야")</a:t>
             </a:r>
           </a:p>
           <a:p>
@@ -5822,18 +6391,18 @@
             <a:r>
               <a:rPr b="1" sz="1800">
                 <a:solidFill>
-                  <a:srgbClr val="0F172A"/>
-                </a:solidFill>
-              </a:rPr>
-              <a:t>• One-shot (원샷): </a:t>
+                  <a:srgbClr val="93C5FD"/>
+                </a:solidFill>
+              </a:rPr>
+              <a:t>• Context (배경): </a:t>
             </a:r>
             <a:r>
               <a:rPr sz="1600">
                 <a:solidFill>
-                  <a:srgbClr val="475569"/>
-                </a:solidFill>
-              </a:rPr>
-              <a:t>원하는 출력 예시를 딱 1개 보여주고 지시 (기본 서식 학습)</a:t>
+                  <a:srgbClr val="CBD5E1"/>
+                </a:solidFill>
+              </a:rPr>
+              <a:t>구체적인 본인의 상황 및 제한 요소 전달 (예: "무릎 아픈 부모님 동반")</a:t>
             </a:r>
           </a:p>
           <a:p>
@@ -5851,18 +6420,47 @@
             <a:r>
               <a:rPr b="1" sz="1800">
                 <a:solidFill>
-                  <a:srgbClr val="0F172A"/>
-                </a:solidFill>
-              </a:rPr>
-              <a:t>• Few-shot (퓨샷): </a:t>
+                  <a:srgbClr val="93C5FD"/>
+                </a:solidFill>
+              </a:rPr>
+              <a:t>• Task (작업): </a:t>
             </a:r>
             <a:r>
               <a:rPr sz="1600">
                 <a:solidFill>
-                  <a:srgbClr val="475569"/>
-                </a:solidFill>
-              </a:rPr>
-              <a:t>구체적인 우수 예시를 3개 이상 입력하여, 복잡한 서식이나 디테일한 뉘앙스/말투를 완벽히 훈련</a:t>
+                  <a:srgbClr val="CBD5E1"/>
+                </a:solidFill>
+              </a:rPr>
+              <a:t>수행할 구체적인 미션/명령 (예: "동선을 최소화한 최적 코스 설계")</a:t>
+            </a:r>
+          </a:p>
+          <a:p>
+            <a:pPr lvl="1">
+              <a:lnSpc>
+                <a:spcPct val="120000"/>
+              </a:lnSpc>
+              <a:spcAft>
+                <a:spcPts val="800"/>
+              </a:spcAft>
+              <a:defRPr>
+                <a:latin typeface="Malgun Gothic"/>
+              </a:defRPr>
+            </a:pPr>
+            <a:r>
+              <a:rPr b="1" sz="1800">
+                <a:solidFill>
+                  <a:srgbClr val="93C5FD"/>
+                </a:solidFill>
+              </a:rPr>
+              <a:t>• Format (형식): </a:t>
+            </a:r>
+            <a:r>
+              <a:rPr sz="1600">
+                <a:solidFill>
+                  <a:srgbClr val="CBD5E1"/>
+                </a:solidFill>
+              </a:rPr>
+              <a:t>원하는 출력 양식 지정 (예: "시간대별 깔끔한 표로 정리해줘")</a:t>
             </a:r>
           </a:p>
         </p:txBody>
@@ -5875,17 +6473,9 @@
 </p:sld>
 </file>
 
-<file path=ppt/slides/slide8.xml><?xml version="1.0" encoding="utf-8"?>
+<file path=ppt/slides/slide7.xml><?xml version="1.0" encoding="utf-8"?>
 <p:sld xmlns:a="http://schemas.openxmlformats.org/drawingml/2006/main" xmlns:p="http://schemas.openxmlformats.org/presentationml/2006/main" xmlns:r="http://schemas.openxmlformats.org/officeDocument/2006/relationships">
   <p:cSld>
-    <p:bg>
-      <p:bgPr>
-        <a:solidFill>
-          <a:srgbClr val="F8FAFC"/>
-        </a:solidFill>
-        <a:effectLst/>
-      </p:bgPr>
-    </p:bg>
     <p:spTree>
       <p:nvGrpSpPr>
         <p:cNvPr id="1" name=""/>
@@ -5893,9 +6483,33 @@
         <p:nvPr/>
       </p:nvGrpSpPr>
       <p:grpSpPr/>
-      <p:sp>
-        <p:nvSpPr>
-          <p:cNvPr id="2" name="Rectangle 1"/>
+      <p:pic>
+        <p:nvPicPr>
+          <p:cNvPr id="2" name="Picture 1" descr="ai_ppt_bg_1783143682050.png"/>
+          <p:cNvPicPr>
+            <a:picLocks noChangeAspect="1"/>
+          </p:cNvPicPr>
+          <p:nvPr/>
+        </p:nvPicPr>
+        <p:blipFill>
+          <a:blip r:embed="rId2"/>
+          <a:stretch>
+            <a:fillRect/>
+          </a:stretch>
+        </p:blipFill>
+        <p:spPr>
+          <a:xfrm>
+            <a:off x="0" y="0"/>
+            <a:ext cx="12191695" cy="6858000"/>
+          </a:xfrm>
+          <a:prstGeom prst="rect">
+            <a:avLst/>
+          </a:prstGeom>
+        </p:spPr>
+      </p:pic>
+      <p:sp>
+        <p:nvSpPr>
+          <p:cNvPr id="3" name="Rectangle 2"/>
           <p:cNvSpPr/>
           <p:nvPr/>
         </p:nvSpPr>
@@ -5908,7 +6522,7 @@
             <a:avLst/>
           </a:prstGeom>
           <a:solidFill>
-            <a:srgbClr val="2563EB"/>
+            <a:srgbClr val="22D3EE"/>
           </a:solidFill>
           <a:ln>
             <a:noFill/>
@@ -5938,7 +6552,7 @@
       </p:sp>
       <p:sp>
         <p:nvSpPr>
-          <p:cNvPr id="3" name="TextBox 2"/>
+          <p:cNvPr id="4" name="TextBox 3"/>
           <p:cNvSpPr txBox="1"/>
           <p:nvPr/>
         </p:nvSpPr>
@@ -5961,27 +6575,27 @@
             <a:pPr>
               <a:defRPr sz="3200" b="1">
                 <a:solidFill>
-                  <a:srgbClr val="0F172A"/>
-                </a:solidFill>
-                <a:latin typeface="Malgun Gothic"/>
-              </a:defRPr>
-            </a:pPr>
-            <a:r>
-              <a:t>🏄‍♂️ 3. 바이브 코딩 (Vibe Coding)</a:t>
-            </a:r>
-          </a:p>
-        </p:txBody>
-      </p:sp>
-      <p:sp>
-        <p:nvSpPr>
-          <p:cNvPr id="4" name="TextBox 3"/>
+                  <a:srgbClr val="FFFFFF"/>
+                </a:solidFill>
+                <a:latin typeface="Malgun Gothic"/>
+              </a:defRPr>
+            </a:pPr>
+            <a:r>
+              <a:t>🧠 2-2. 생각의 고리: Chain of Thought (CoT)</a:t>
+            </a:r>
+          </a:p>
+        </p:txBody>
+      </p:sp>
+      <p:sp>
+        <p:nvSpPr>
+          <p:cNvPr id="5" name="TextBox 4"/>
           <p:cNvSpPr txBox="1"/>
           <p:nvPr/>
         </p:nvSpPr>
         <p:spPr>
           <a:xfrm>
-            <a:off x="914400" y="1828800"/>
-            <a:ext cx="10332720" cy="4114800"/>
+            <a:off x="914400" y="1645920"/>
+            <a:ext cx="10332720" cy="4572000"/>
           </a:xfrm>
           <a:prstGeom prst="rect">
             <a:avLst/>
@@ -6008,18 +6622,18 @@
             <a:r>
               <a:rPr b="1" sz="2000">
                 <a:solidFill>
-                  <a:srgbClr val="0F172A"/>
-                </a:solidFill>
-              </a:rPr>
-              <a:t>■ 정의: </a:t>
+                  <a:srgbClr val="93C5FD"/>
+                </a:solidFill>
+              </a:rPr>
+              <a:t>■ 핵심 개념: </a:t>
             </a:r>
             <a:r>
               <a:rPr sz="1800">
                 <a:solidFill>
-                  <a:srgbClr val="475569"/>
-                </a:solidFill>
-              </a:rPr>
-              <a:t>개발자가 문법을 작성하는 대신 자연어로 의도와 '느낌(Vibe)'을 설명하고, 실제 개발은 AI 에이전트가 수행하는 패러다임</a:t>
+                  <a:srgbClr val="CBD5E1"/>
+                </a:solidFill>
+              </a:rPr>
+              <a:t>복잡한 문제 해결 시 바로 답을 구하기보다 논리적 절차를 순차적으로 생각하게 유도합니다.</a:t>
             </a:r>
           </a:p>
           <a:p>
@@ -6037,15 +6651,44 @@
             <a:r>
               <a:rPr b="1" sz="2000">
                 <a:solidFill>
-                  <a:srgbClr val="0F172A"/>
-                </a:solidFill>
-              </a:rPr>
-              <a:t>■ 3단계 개발 프로세스: </a:t>
+                  <a:srgbClr val="93C5FD"/>
+                </a:solidFill>
+              </a:rPr>
+              <a:t>■ 핵심 키워드: </a:t>
             </a:r>
             <a:r>
               <a:rPr sz="1800">
                 <a:solidFill>
-                  <a:srgbClr val="475569"/>
+                  <a:srgbClr val="CBD5E1"/>
+                </a:solidFill>
+              </a:rPr>
+              <a:t>"단계별로 생각을 나누어 차근차근 풀이해줘" 문장 추가</a:t>
+            </a:r>
+          </a:p>
+          <a:p>
+            <a:pPr>
+              <a:lnSpc>
+                <a:spcPct val="120000"/>
+              </a:lnSpc>
+              <a:spcAft>
+                <a:spcPts val="800"/>
+              </a:spcAft>
+              <a:defRPr>
+                <a:latin typeface="Malgun Gothic"/>
+              </a:defRPr>
+            </a:pPr>
+            <a:r>
+              <a:rPr b="1" sz="2000">
+                <a:solidFill>
+                  <a:srgbClr val="93C5FD"/>
+                </a:solidFill>
+              </a:rPr>
+              <a:t>💡 CoT 적용 예시 (수학 문제): </a:t>
+            </a:r>
+            <a:r>
+              <a:rPr sz="1800">
+                <a:solidFill>
+                  <a:srgbClr val="CBD5E1"/>
                 </a:solidFill>
               </a:rPr>
               <a:t/>
@@ -6066,18 +6709,18 @@
             <a:r>
               <a:rPr b="1" sz="1800">
                 <a:solidFill>
-                  <a:srgbClr val="0F172A"/>
-                </a:solidFill>
-              </a:rPr>
-              <a:t>1. 지시(Vibe)하기: </a:t>
+                  <a:srgbClr val="93C5FD"/>
+                </a:solidFill>
+              </a:rPr>
+              <a:t>• 질문: </a:t>
             </a:r>
             <a:r>
               <a:rPr sz="1600">
                 <a:solidFill>
-                  <a:srgbClr val="475569"/>
-                </a:solidFill>
-              </a:rPr>
-              <a:t>자연어로 만들고 싶은 내용을 설명</a:t>
+                  <a:srgbClr val="CBD5E1"/>
+                </a:solidFill>
+              </a:rPr>
+              <a:t>"학생 30명 중 축구를 좋아하는 애가 60%이고 그중 안경 쓴 애가 1/3이야. 안경 쓴 애는 몇 명인지 단계별로 차근차근 풀이해줘."</a:t>
             </a:r>
           </a:p>
           <a:p>
@@ -6095,22 +6738,22 @@
             <a:r>
               <a:rPr b="1" sz="1800">
                 <a:solidFill>
-                  <a:srgbClr val="0F172A"/>
-                </a:solidFill>
-              </a:rPr>
-              <a:t>2. AI 자동 빌드: </a:t>
+                  <a:srgbClr val="93C5FD"/>
+                </a:solidFill>
+              </a:rPr>
+              <a:t>• AI 단계별 풀이 과정: </a:t>
             </a:r>
             <a:r>
               <a:rPr sz="1600">
                 <a:solidFill>
-                  <a:srgbClr val="475569"/>
-                </a:solidFill>
-              </a:rPr>
-              <a:t>AI 에이전트가 코드를 알아서 생성 및 디버깅</a:t>
-            </a:r>
-          </a:p>
-          <a:p>
-            <a:pPr lvl="1">
+                  <a:srgbClr val="CBD5E1"/>
+                </a:solidFill>
+              </a:rPr>
+              <a:t/>
+            </a:r>
+          </a:p>
+          <a:p>
+            <a:pPr lvl="2">
               <a:lnSpc>
                 <a:spcPct val="120000"/>
               </a:lnSpc>
@@ -6122,20 +6765,78 @@
               </a:defRPr>
             </a:pPr>
             <a:r>
-              <a:rPr b="1" sz="1800">
-                <a:solidFill>
-                  <a:srgbClr val="0F172A"/>
-                </a:solidFill>
-              </a:rPr>
-              <a:t>3. 검증 및 지휘: </a:t>
-            </a:r>
-            <a:r>
-              <a:rPr sz="1600">
-                <a:solidFill>
-                  <a:srgbClr val="475569"/>
-                </a:solidFill>
-              </a:rPr>
-              <a:t>결과물을 눈으로 직접 조작하며 수정 피드백을 전달</a:t>
+              <a:rPr b="1" sz="1600">
+                <a:solidFill>
+                  <a:srgbClr val="93C5FD"/>
+                </a:solidFill>
+              </a:rPr>
+              <a:t>  - 1단계: </a:t>
+            </a:r>
+            <a:r>
+              <a:rPr sz="1400">
+                <a:solidFill>
+                  <a:srgbClr val="CBD5E1"/>
+                </a:solidFill>
+              </a:rPr>
+              <a:t>축구 좋아하는 학생 수 계산 = 30명 * 0.6 = 18명</a:t>
+            </a:r>
+          </a:p>
+          <a:p>
+            <a:pPr lvl="2">
+              <a:lnSpc>
+                <a:spcPct val="120000"/>
+              </a:lnSpc>
+              <a:spcAft>
+                <a:spcPts val="800"/>
+              </a:spcAft>
+              <a:defRPr>
+                <a:latin typeface="Malgun Gothic"/>
+              </a:defRPr>
+            </a:pPr>
+            <a:r>
+              <a:rPr b="1" sz="1600">
+                <a:solidFill>
+                  <a:srgbClr val="93C5FD"/>
+                </a:solidFill>
+              </a:rPr>
+              <a:t>  - 2단계: </a:t>
+            </a:r>
+            <a:r>
+              <a:rPr sz="1400">
+                <a:solidFill>
+                  <a:srgbClr val="CBD5E1"/>
+                </a:solidFill>
+              </a:rPr>
+              <a:t>그중 안경 쓴 학생 수 계산 = 18명 * 1/3 = 6명</a:t>
+            </a:r>
+          </a:p>
+          <a:p>
+            <a:pPr lvl="2">
+              <a:lnSpc>
+                <a:spcPct val="120000"/>
+              </a:lnSpc>
+              <a:spcAft>
+                <a:spcPts val="800"/>
+              </a:spcAft>
+              <a:defRPr>
+                <a:latin typeface="Malgun Gothic"/>
+              </a:defRPr>
+            </a:pPr>
+            <a:r>
+              <a:rPr b="1" sz="1600">
+                <a:solidFill>
+                  <a:srgbClr val="93C5FD"/>
+                </a:solidFill>
+              </a:rPr>
+              <a:t>  - 최종 답: </a:t>
+            </a:r>
+            <a:r>
+              <a:rPr sz="1400">
+                <a:solidFill>
+                  <a:srgbClr val="CBD5E1"/>
+                </a:solidFill>
+              </a:rPr>
+              <a:t>6명입니다.</a:t>
             </a:r>
           </a:p>
         </p:txBody>
@@ -6148,17 +6849,9 @@
 </p:sld>
 </file>
 
-<file path=ppt/slides/slide9.xml><?xml version="1.0" encoding="utf-8"?>
+<file path=ppt/slides/slide8.xml><?xml version="1.0" encoding="utf-8"?>
 <p:sld xmlns:a="http://schemas.openxmlformats.org/drawingml/2006/main" xmlns:p="http://schemas.openxmlformats.org/presentationml/2006/main" xmlns:r="http://schemas.openxmlformats.org/officeDocument/2006/relationships">
   <p:cSld>
-    <p:bg>
-      <p:bgPr>
-        <a:solidFill>
-          <a:srgbClr val="F8FAFC"/>
-        </a:solidFill>
-        <a:effectLst/>
-      </p:bgPr>
-    </p:bg>
     <p:spTree>
       <p:nvGrpSpPr>
         <p:cNvPr id="1" name=""/>
@@ -6166,9 +6859,33 @@
         <p:nvPr/>
       </p:nvGrpSpPr>
       <p:grpSpPr/>
-      <p:sp>
-        <p:nvSpPr>
-          <p:cNvPr id="2" name="Rectangle 1"/>
+      <p:pic>
+        <p:nvPicPr>
+          <p:cNvPr id="2" name="Picture 1" descr="ai_ppt_bg_1783143682050.png"/>
+          <p:cNvPicPr>
+            <a:picLocks noChangeAspect="1"/>
+          </p:cNvPicPr>
+          <p:nvPr/>
+        </p:nvPicPr>
+        <p:blipFill>
+          <a:blip r:embed="rId2"/>
+          <a:stretch>
+            <a:fillRect/>
+          </a:stretch>
+        </p:blipFill>
+        <p:spPr>
+          <a:xfrm>
+            <a:off x="0" y="0"/>
+            <a:ext cx="12191695" cy="6858000"/>
+          </a:xfrm>
+          <a:prstGeom prst="rect">
+            <a:avLst/>
+          </a:prstGeom>
+        </p:spPr>
+      </p:pic>
+      <p:sp>
+        <p:nvSpPr>
+          <p:cNvPr id="3" name="Rectangle 2"/>
           <p:cNvSpPr/>
           <p:nvPr/>
         </p:nvSpPr>
@@ -6181,7 +6898,7 @@
             <a:avLst/>
           </a:prstGeom>
           <a:solidFill>
-            <a:srgbClr val="2563EB"/>
+            <a:srgbClr val="22D3EE"/>
           </a:solidFill>
           <a:ln>
             <a:noFill/>
@@ -6211,7 +6928,7 @@
       </p:sp>
       <p:sp>
         <p:nvSpPr>
-          <p:cNvPr id="3" name="TextBox 2"/>
+          <p:cNvPr id="4" name="TextBox 3"/>
           <p:cNvSpPr txBox="1"/>
           <p:nvPr/>
         </p:nvSpPr>
@@ -6234,27 +6951,27 @@
             <a:pPr>
               <a:defRPr sz="3200" b="1">
                 <a:solidFill>
-                  <a:srgbClr val="0F172A"/>
-                </a:solidFill>
-                <a:latin typeface="Malgun Gothic"/>
-              </a:defRPr>
-            </a:pPr>
-            <a:r>
-              <a:t>🛠️ 4. AI 활용 실습 (생활밀착형)</a:t>
-            </a:r>
-          </a:p>
-        </p:txBody>
-      </p:sp>
-      <p:sp>
-        <p:nvSpPr>
-          <p:cNvPr id="4" name="TextBox 3"/>
+                  <a:srgbClr val="FFFFFF"/>
+                </a:solidFill>
+                <a:latin typeface="Malgun Gothic"/>
+              </a:defRPr>
+            </a:pPr>
+            <a:r>
+              <a:t>🎯 2-3. 예시 주입: 샷(Shot) 기반 프롬프팅</a:t>
+            </a:r>
+          </a:p>
+        </p:txBody>
+      </p:sp>
+      <p:sp>
+        <p:nvSpPr>
+          <p:cNvPr id="5" name="TextBox 4"/>
           <p:cNvSpPr txBox="1"/>
           <p:nvPr/>
         </p:nvSpPr>
         <p:spPr>
           <a:xfrm>
-            <a:off x="914400" y="1828800"/>
-            <a:ext cx="10332720" cy="4114800"/>
+            <a:off x="914400" y="1645920"/>
+            <a:ext cx="10332720" cy="4572000"/>
           </a:xfrm>
           <a:prstGeom prst="rect">
             <a:avLst/>
@@ -6281,20 +6998,309 @@
             <a:r>
               <a:rPr b="1" sz="2000">
                 <a:solidFill>
-                  <a:srgbClr val="0F172A"/>
-                </a:solidFill>
-              </a:rPr>
-              <a:t>실습 1. Suno AI로 노래 만들기 </a:t>
+                  <a:srgbClr val="93C5FD"/>
+                </a:solidFill>
+              </a:rPr>
+              <a:t>■ 샷(Shot) 종류와 Roblox 대화 실습 예시: </a:t>
             </a:r>
             <a:r>
               <a:rPr sz="1800">
                 <a:solidFill>
-                  <a:srgbClr val="475569"/>
-                </a:solidFill>
-              </a:rPr>
-              <a:t>음악 작사/작곡 메타 정보를 이용한 곡 창작 실습</a:t>
-            </a:r>
-          </a:p>
+                  <a:srgbClr val="CBD5E1"/>
+                </a:solidFill>
+              </a:rPr>
+              <a:t>예시 주입을 통해 상황에 맞는 표현을 유도합니다.</a:t>
+            </a:r>
+          </a:p>
+          <a:p>
+            <a:pPr lvl="1">
+              <a:lnSpc>
+                <a:spcPct val="120000"/>
+              </a:lnSpc>
+              <a:spcAft>
+                <a:spcPts val="800"/>
+              </a:spcAft>
+              <a:defRPr>
+                <a:latin typeface="Malgun Gothic"/>
+              </a:defRPr>
+            </a:pPr>
+            <a:r>
+              <a:rPr b="1" sz="1800">
+                <a:solidFill>
+                  <a:srgbClr val="93C5FD"/>
+                </a:solidFill>
+              </a:rPr>
+              <a:t>• Zero-shot (제로샷): </a:t>
+            </a:r>
+            <a:r>
+              <a:rPr sz="1600">
+                <a:solidFill>
+                  <a:srgbClr val="CBD5E1"/>
+                </a:solidFill>
+              </a:rPr>
+              <a:t>예시 없이 즉시 질문 (예: "로블록스에서 외국인과 대화하고 싶어")</a:t>
+            </a:r>
+          </a:p>
+          <a:p>
+            <a:pPr lvl="1">
+              <a:lnSpc>
+                <a:spcPct val="120000"/>
+              </a:lnSpc>
+              <a:spcAft>
+                <a:spcPts val="800"/>
+              </a:spcAft>
+              <a:defRPr>
+                <a:latin typeface="Malgun Gothic"/>
+              </a:defRPr>
+            </a:pPr>
+            <a:r>
+              <a:rPr b="1" sz="1800">
+                <a:solidFill>
+                  <a:srgbClr val="93C5FD"/>
+                </a:solidFill>
+              </a:rPr>
+              <a:t>• One-shot (원샷): </a:t>
+            </a:r>
+            <a:r>
+              <a:rPr sz="1600">
+                <a:solidFill>
+                  <a:srgbClr val="CBD5E1"/>
+                </a:solidFill>
+              </a:rPr>
+              <a:t>원하는 스타일의 대화 예시를 딱 1개 보여주고 지시</a:t>
+            </a:r>
+          </a:p>
+          <a:p>
+            <a:pPr lvl="2">
+              <a:lnSpc>
+                <a:spcPct val="120000"/>
+              </a:lnSpc>
+              <a:spcAft>
+                <a:spcPts val="800"/>
+              </a:spcAft>
+              <a:defRPr>
+                <a:latin typeface="Malgun Gothic"/>
+              </a:defRPr>
+            </a:pPr>
+            <a:r>
+              <a:rPr b="1" sz="1600">
+                <a:solidFill>
+                  <a:srgbClr val="93C5FD"/>
+                </a:solidFill>
+              </a:rPr>
+              <a:t>  - 주입 예시: </a:t>
+            </a:r>
+            <a:r>
+              <a:rPr sz="1400">
+                <a:solidFill>
+                  <a:srgbClr val="CBD5E1"/>
+                </a:solidFill>
+              </a:rPr>
+              <a:t>"님! 제발 사냥터 A 같이 깨주시면 안될까요?" (번역 뼈대 제공)</a:t>
+            </a:r>
+          </a:p>
+          <a:p>
+            <a:pPr lvl="1">
+              <a:lnSpc>
+                <a:spcPct val="120000"/>
+              </a:lnSpc>
+              <a:spcAft>
+                <a:spcPts val="800"/>
+              </a:spcAft>
+              <a:defRPr>
+                <a:latin typeface="Malgun Gothic"/>
+              </a:defRPr>
+            </a:pPr>
+            <a:r>
+              <a:rPr b="1" sz="1800">
+                <a:solidFill>
+                  <a:srgbClr val="93C5FD"/>
+                </a:solidFill>
+              </a:rPr>
+              <a:t>• Few-shot (퓨샷): </a:t>
+            </a:r>
+            <a:r>
+              <a:rPr sz="1600">
+                <a:solidFill>
+                  <a:srgbClr val="CBD5E1"/>
+                </a:solidFill>
+              </a:rPr>
+              <a:t>구체적인 자주 쓰이는 게임 대화 예시를 3개 이상 입력하여 학습</a:t>
+            </a:r>
+          </a:p>
+          <a:p>
+            <a:pPr lvl="2">
+              <a:lnSpc>
+                <a:spcPct val="120000"/>
+              </a:lnSpc>
+              <a:spcAft>
+                <a:spcPts val="800"/>
+              </a:spcAft>
+              <a:defRPr>
+                <a:latin typeface="Malgun Gothic"/>
+              </a:defRPr>
+            </a:pPr>
+            <a:r>
+              <a:rPr b="1" sz="1600">
+                <a:solidFill>
+                  <a:srgbClr val="93C5FD"/>
+                </a:solidFill>
+              </a:rPr>
+              <a:t>  - 주입 예시: </a:t>
+            </a:r>
+            <a:r>
+              <a:rPr sz="1400">
+                <a:solidFill>
+                  <a:srgbClr val="CBD5E1"/>
+                </a:solidFill>
+              </a:rPr>
+              <a:t>"사냥터 같이 깨주실래요?", "아이템 교환 하실래요?", "내일 또 하실래요?" 등을 학습시켜 완벽한 번역기 톤 모방</a:t>
+            </a:r>
+          </a:p>
+        </p:txBody>
+      </p:sp>
+    </p:spTree>
+  </p:cSld>
+  <p:clrMapOvr>
+    <a:masterClrMapping/>
+  </p:clrMapOvr>
+</p:sld>
+</file>
+
+<file path=ppt/slides/slide9.xml><?xml version="1.0" encoding="utf-8"?>
+<p:sld xmlns:a="http://schemas.openxmlformats.org/drawingml/2006/main" xmlns:p="http://schemas.openxmlformats.org/presentationml/2006/main" xmlns:r="http://schemas.openxmlformats.org/officeDocument/2006/relationships">
+  <p:cSld>
+    <p:spTree>
+      <p:nvGrpSpPr>
+        <p:cNvPr id="1" name=""/>
+        <p:cNvGrpSpPr/>
+        <p:nvPr/>
+      </p:nvGrpSpPr>
+      <p:grpSpPr/>
+      <p:pic>
+        <p:nvPicPr>
+          <p:cNvPr id="2" name="Picture 1" descr="ai_ppt_bg_1783143682050.png"/>
+          <p:cNvPicPr>
+            <a:picLocks noChangeAspect="1"/>
+          </p:cNvPicPr>
+          <p:nvPr/>
+        </p:nvPicPr>
+        <p:blipFill>
+          <a:blip r:embed="rId2"/>
+          <a:stretch>
+            <a:fillRect/>
+          </a:stretch>
+        </p:blipFill>
+        <p:spPr>
+          <a:xfrm>
+            <a:off x="0" y="0"/>
+            <a:ext cx="12191695" cy="6858000"/>
+          </a:xfrm>
+          <a:prstGeom prst="rect">
+            <a:avLst/>
+          </a:prstGeom>
+        </p:spPr>
+      </p:pic>
+      <p:sp>
+        <p:nvSpPr>
+          <p:cNvPr id="3" name="Rectangle 2"/>
+          <p:cNvSpPr/>
+          <p:nvPr/>
+        </p:nvSpPr>
+        <p:spPr>
+          <a:xfrm>
+            <a:off x="731520" y="548640"/>
+            <a:ext cx="109728" cy="731520"/>
+          </a:xfrm>
+          <a:prstGeom prst="rect">
+            <a:avLst/>
+          </a:prstGeom>
+          <a:solidFill>
+            <a:srgbClr val="22D3EE"/>
+          </a:solidFill>
+          <a:ln>
+            <a:noFill/>
+          </a:ln>
+        </p:spPr>
+        <p:style>
+          <a:lnRef idx="1">
+            <a:schemeClr val="accent1"/>
+          </a:lnRef>
+          <a:fillRef idx="3">
+            <a:schemeClr val="accent1"/>
+          </a:fillRef>
+          <a:effectRef idx="2">
+            <a:schemeClr val="accent1"/>
+          </a:effectRef>
+          <a:fontRef idx="minor">
+            <a:schemeClr val="lt1"/>
+          </a:fontRef>
+        </p:style>
+        <p:txBody>
+          <a:bodyPr rtlCol="0" anchor="ctr"/>
+          <a:lstStyle/>
+          <a:p>
+            <a:pPr algn="ctr"/>
+          </a:p>
+        </p:txBody>
+      </p:sp>
+      <p:sp>
+        <p:nvSpPr>
+          <p:cNvPr id="4" name="TextBox 3"/>
+          <p:cNvSpPr txBox="1"/>
+          <p:nvPr/>
+        </p:nvSpPr>
+        <p:spPr>
+          <a:xfrm>
+            <a:off x="1005840" y="457200"/>
+            <a:ext cx="10058400" cy="914400"/>
+          </a:xfrm>
+          <a:prstGeom prst="rect">
+            <a:avLst/>
+          </a:prstGeom>
+          <a:noFill/>
+        </p:spPr>
+        <p:txBody>
+          <a:bodyPr wrap="square" lIns="0" rIns="0" tIns="0" bIns="0">
+            <a:spAutoFit/>
+          </a:bodyPr>
+          <a:lstStyle/>
+          <a:p>
+            <a:pPr>
+              <a:defRPr sz="3200" b="1">
+                <a:solidFill>
+                  <a:srgbClr val="FFFFFF"/>
+                </a:solidFill>
+                <a:latin typeface="Malgun Gothic"/>
+              </a:defRPr>
+            </a:pPr>
+            <a:r>
+              <a:t>🏄‍♂️ 3. 바이브 코딩 (Vibe Coding)</a:t>
+            </a:r>
+          </a:p>
+        </p:txBody>
+      </p:sp>
+      <p:sp>
+        <p:nvSpPr>
+          <p:cNvPr id="5" name="TextBox 4"/>
+          <p:cNvSpPr txBox="1"/>
+          <p:nvPr/>
+        </p:nvSpPr>
+        <p:spPr>
+          <a:xfrm>
+            <a:off x="914400" y="1828800"/>
+            <a:ext cx="10332720" cy="4114800"/>
+          </a:xfrm>
+          <a:prstGeom prst="rect">
+            <a:avLst/>
+          </a:prstGeom>
+          <a:noFill/>
+        </p:spPr>
+        <p:txBody>
+          <a:bodyPr wrap="square">
+            <a:spAutoFit/>
+          </a:bodyPr>
+          <a:lstStyle/>
           <a:p>
             <a:pPr>
               <a:lnSpc>
@@ -6310,18 +7316,18 @@
             <a:r>
               <a:rPr b="1" sz="2000">
                 <a:solidFill>
-                  <a:srgbClr val="0F172A"/>
-                </a:solidFill>
-              </a:rPr>
-              <a:t>실습 2. 가족 맞춤형 일본 여행 계획 짜기 </a:t>
+                  <a:srgbClr val="93C5FD"/>
+                </a:solidFill>
+              </a:rPr>
+              <a:t>■ 정의: </a:t>
             </a:r>
             <a:r>
               <a:rPr sz="1800">
                 <a:solidFill>
-                  <a:srgbClr val="475569"/>
-                </a:solidFill>
-              </a:rPr>
-              <a:t>걸음 최소화 동선 설계를 위한 R-C-T-F 적용</a:t>
+                  <a:srgbClr val="CBD5E1"/>
+                </a:solidFill>
+              </a:rPr>
+              <a:t>개발자가 문법을 작성하는 대신 자연어로 의도와 '느낌(Vibe)'을 설명하고, 실제 개발은 AI 에이전트가 수행하는 패러다임</a:t>
             </a:r>
           </a:p>
           <a:p>
@@ -6339,22 +7345,22 @@
             <a:r>
               <a:rPr b="1" sz="2000">
                 <a:solidFill>
-                  <a:srgbClr val="0F172A"/>
-                </a:solidFill>
-              </a:rPr>
-              <a:t>실습 3. 백종원 스타일 냉장고 털이 레시피 </a:t>
+                  <a:srgbClr val="93C5FD"/>
+                </a:solidFill>
+              </a:rPr>
+              <a:t>■ 3단계 개발 프로세스: </a:t>
             </a:r>
             <a:r>
               <a:rPr sz="1800">
                 <a:solidFill>
-                  <a:srgbClr val="475569"/>
-                </a:solidFill>
-              </a:rPr>
-              <a:t>냉장고 속 남은 재료 맞춤형 3단계 레시피 짜기</a:t>
-            </a:r>
-          </a:p>
-          <a:p>
-            <a:pPr>
+                  <a:srgbClr val="CBD5E1"/>
+                </a:solidFill>
+              </a:rPr>
+              <a:t/>
+            </a:r>
+          </a:p>
+          <a:p>
+            <a:pPr lvl="1">
               <a:lnSpc>
                 <a:spcPct val="120000"/>
               </a:lnSpc>
@@ -6366,24 +7372,24 @@
               </a:defRPr>
             </a:pPr>
             <a:r>
-              <a:rPr b="1" sz="2000">
-                <a:solidFill>
-                  <a:srgbClr val="0F172A"/>
-                </a:solidFill>
-              </a:rPr>
-              <a:t>실습 4. 자녀 수학 숙제 캐리하기 </a:t>
-            </a:r>
-            <a:r>
-              <a:rPr sz="1800">
-                <a:solidFill>
-                  <a:srgbClr val="475569"/>
-                </a:solidFill>
-              </a:rPr>
-              <a:t>게임 비유와 CoT(생각의 고리)를 통한 개념 설명</a:t>
-            </a:r>
-          </a:p>
-          <a:p>
-            <a:pPr>
+              <a:rPr b="1" sz="1800">
+                <a:solidFill>
+                  <a:srgbClr val="93C5FD"/>
+                </a:solidFill>
+              </a:rPr>
+              <a:t>1. 지시(Vibe)하기: </a:t>
+            </a:r>
+            <a:r>
+              <a:rPr sz="1600">
+                <a:solidFill>
+                  <a:srgbClr val="CBD5E1"/>
+                </a:solidFill>
+              </a:rPr>
+              <a:t>"외국인과 게임을 같이 하기 위해 실시간 번역해주는 앱을 만들고 싶어" 처럼 자연어로 기획 설명</a:t>
+            </a:r>
+          </a:p>
+          <a:p>
+            <a:pPr lvl="1">
               <a:lnSpc>
                 <a:spcPct val="120000"/>
               </a:lnSpc>
@@ -6395,20 +7401,49 @@
               </a:defRPr>
             </a:pPr>
             <a:r>
-              <a:rPr b="1" sz="2000">
-                <a:solidFill>
-                  <a:srgbClr val="0F172A"/>
-                </a:solidFill>
-              </a:rPr>
-              <a:t>실습 5. 중고등학생 축제/동아리 기획서 짜기 </a:t>
-            </a:r>
-            <a:r>
-              <a:rPr sz="1800">
-                <a:solidFill>
-                  <a:srgbClr val="475569"/>
-                </a:solidFill>
-              </a:rPr>
-              <a:t>형식화된 기획 초안 문서를 단번에 생성</a:t>
+              <a:rPr b="1" sz="1800">
+                <a:solidFill>
+                  <a:srgbClr val="93C5FD"/>
+                </a:solidFill>
+              </a:rPr>
+              <a:t>2. AI 자동 빌드: </a:t>
+            </a:r>
+            <a:r>
+              <a:rPr sz="1600">
+                <a:solidFill>
+                  <a:srgbClr val="CBD5E1"/>
+                </a:solidFill>
+              </a:rPr>
+              <a:t>AI 에이전트가 코드를 스스로 설계/작성하고 에러도 스스로 디버깅 진행</a:t>
+            </a:r>
+          </a:p>
+          <a:p>
+            <a:pPr lvl="1">
+              <a:lnSpc>
+                <a:spcPct val="120000"/>
+              </a:lnSpc>
+              <a:spcAft>
+                <a:spcPts val="800"/>
+              </a:spcAft>
+              <a:defRPr>
+                <a:latin typeface="Malgun Gothic"/>
+              </a:defRPr>
+            </a:pPr>
+            <a:r>
+              <a:rPr b="1" sz="1800">
+                <a:solidFill>
+                  <a:srgbClr val="93C5FD"/>
+                </a:solidFill>
+              </a:rPr>
+              <a:t>3. 검증 및 지휘: </a:t>
+            </a:r>
+            <a:r>
+              <a:rPr sz="1600">
+                <a:solidFill>
+                  <a:srgbClr val="CBD5E1"/>
+                </a:solidFill>
+              </a:rPr>
+              <a:t>사람은 소스 코드를 일일이 뜯어보지 않고, 구현된 완성본을 보면서 추가 수정 피드백(지휘)만 수행</a:t>
             </a:r>
           </a:p>
         </p:txBody>

--- a/AI_companion_lecture.pptx
+++ b/AI_companion_lecture.pptx
@@ -6,20 +6,19 @@
   </p:sldMasterIdLst>
   <p:sldIdLst>
     <p:sldId id="256" r:id="rId7"/>
-    <p:sldId id="257" r:id="rId8"/>
-    <p:sldId id="258" r:id="rId9"/>
-    <p:sldId id="259" r:id="rId10"/>
-    <p:sldId id="260" r:id="rId11"/>
-    <p:sldId id="261" r:id="rId12"/>
-    <p:sldId id="262" r:id="rId13"/>
-    <p:sldId id="263" r:id="rId14"/>
-    <p:sldId id="264" r:id="rId15"/>
-    <p:sldId id="265" r:id="rId16"/>
-    <p:sldId id="266" r:id="rId17"/>
-    <p:sldId id="267" r:id="rId18"/>
-    <p:sldId id="268" r:id="rId19"/>
-    <p:sldId id="269" r:id="rId20"/>
-    <p:sldId id="270" r:id="rId21"/>
+    <p:sldId id="257" r:id="rId9"/>
+    <p:sldId id="258" r:id="rId10"/>
+    <p:sldId id="259" r:id="rId11"/>
+    <p:sldId id="260" r:id="rId12"/>
+    <p:sldId id="261" r:id="rId13"/>
+    <p:sldId id="262" r:id="rId14"/>
+    <p:sldId id="263" r:id="rId15"/>
+    <p:sldId id="264" r:id="rId16"/>
+    <p:sldId id="265" r:id="rId17"/>
+    <p:sldId id="266" r:id="rId18"/>
+    <p:sldId id="267" r:id="rId19"/>
+    <p:sldId id="268" r:id="rId20"/>
+    <p:sldId id="269" r:id="rId21"/>
   </p:sldIdLst>
   <p:sldSz cx="12191695" cy="6858000" type="screen4x3"/>
   <p:notesSz cx="6858000" cy="9144000"/>
@@ -119,6 +118,526 @@
     </a:lvl9pPr>
   </p:defaultTextStyle>
 </p:presentation>
+</file>
+
+<file path=ppt/notesMasters/notesMaster1.xml><?xml version="1.0" encoding="utf-8"?>
+<p:notesMaster xmlns:a="http://schemas.openxmlformats.org/drawingml/2006/main" xmlns:p="http://schemas.openxmlformats.org/presentationml/2006/main" xmlns:r="http://schemas.openxmlformats.org/officeDocument/2006/relationships">
+  <p:cSld>
+    <p:bg>
+      <p:bgRef idx="1001">
+        <a:schemeClr val="bg1"/>
+      </p:bgRef>
+    </p:bg>
+    <p:spTree>
+      <p:nvGrpSpPr>
+        <p:cNvPr id="1" name=""/>
+        <p:cNvGrpSpPr/>
+        <p:nvPr/>
+      </p:nvGrpSpPr>
+      <p:grpSpPr>
+        <a:xfrm>
+          <a:off x="0" y="0"/>
+          <a:ext cx="0" cy="0"/>
+          <a:chOff x="0" y="0"/>
+          <a:chExt cx="0" cy="0"/>
+        </a:xfrm>
+      </p:grpSpPr>
+      <p:sp>
+        <p:nvSpPr>
+          <p:cNvPr id="2" name="Header Placeholder 1"/>
+          <p:cNvSpPr>
+            <a:spLocks noGrp="1"/>
+          </p:cNvSpPr>
+          <p:nvPr>
+            <p:ph type="hdr" sz="quarter"/>
+          </p:nvPr>
+        </p:nvSpPr>
+        <p:spPr>
+          <a:xfrm>
+            <a:off x="0" y="0"/>
+            <a:ext cx="2971800" cy="457200"/>
+          </a:xfrm>
+          <a:prstGeom prst="rect">
+            <a:avLst/>
+          </a:prstGeom>
+        </p:spPr>
+        <p:txBody>
+          <a:bodyPr vert="horz" lIns="91440" tIns="45720" rIns="91440" bIns="45720" rtlCol="0"/>
+          <a:lstStyle>
+            <a:lvl1pPr algn="l">
+              <a:defRPr sz="1200"/>
+            </a:lvl1pPr>
+          </a:lstStyle>
+          <a:p>
+            <a:endParaRPr lang="en-US"/>
+          </a:p>
+        </p:txBody>
+      </p:sp>
+      <p:sp>
+        <p:nvSpPr>
+          <p:cNvPr id="3" name="Date Placeholder 2"/>
+          <p:cNvSpPr>
+            <a:spLocks noGrp="1"/>
+          </p:cNvSpPr>
+          <p:nvPr>
+            <p:ph type="dt" idx="1"/>
+          </p:nvPr>
+        </p:nvSpPr>
+        <p:spPr>
+          <a:xfrm>
+            <a:off x="3884613" y="0"/>
+            <a:ext cx="2971800" cy="457200"/>
+          </a:xfrm>
+          <a:prstGeom prst="rect">
+            <a:avLst/>
+          </a:prstGeom>
+        </p:spPr>
+        <p:txBody>
+          <a:bodyPr vert="horz" lIns="91440" tIns="45720" rIns="91440" bIns="45720" rtlCol="0"/>
+          <a:lstStyle>
+            <a:lvl1pPr algn="r">
+              <a:defRPr sz="1200"/>
+            </a:lvl1pPr>
+          </a:lstStyle>
+          <a:p>
+            <a:fld id="{0F89C1C7-3DCD-1040-A9CF-14679D8B5DDD}" type="datetimeFigureOut">
+              <a:rPr lang="en-US" smtClean="0"/>
+              <a:t>10/17/16</a:t>
+            </a:fld>
+            <a:endParaRPr lang="en-US"/>
+          </a:p>
+        </p:txBody>
+      </p:sp>
+      <p:sp>
+        <p:nvSpPr>
+          <p:cNvPr id="4" name="Slide Image Placeholder 3"/>
+          <p:cNvSpPr>
+            <a:spLocks noGrp="1" noRot="1" noChangeAspect="1"/>
+          </p:cNvSpPr>
+          <p:nvPr>
+            <p:ph type="sldImg" idx="2"/>
+          </p:nvPr>
+        </p:nvSpPr>
+        <p:spPr>
+          <a:xfrm>
+            <a:off x="1143000" y="685800"/>
+            <a:ext cx="4572000" cy="3429000"/>
+          </a:xfrm>
+          <a:prstGeom prst="rect">
+            <a:avLst/>
+          </a:prstGeom>
+          <a:noFill/>
+          <a:ln w="12700">
+            <a:solidFill>
+              <a:prstClr val="black"/>
+            </a:solidFill>
+          </a:ln>
+        </p:spPr>
+        <p:txBody>
+          <a:bodyPr vert="horz" lIns="91440" tIns="45720" rIns="91440" bIns="45720" rtlCol="0" anchor="ctr"/>
+          <a:lstStyle/>
+          <a:p>
+            <a:endParaRPr lang="en-US"/>
+          </a:p>
+        </p:txBody>
+      </p:sp>
+      <p:sp>
+        <p:nvSpPr>
+          <p:cNvPr id="5" name="Notes Placeholder 4"/>
+          <p:cNvSpPr>
+            <a:spLocks noGrp="1"/>
+          </p:cNvSpPr>
+          <p:nvPr>
+            <p:ph type="body" sz="quarter" idx="3"/>
+          </p:nvPr>
+        </p:nvSpPr>
+        <p:spPr>
+          <a:xfrm>
+            <a:off x="685800" y="4343400"/>
+            <a:ext cx="5486400" cy="4114800"/>
+          </a:xfrm>
+          <a:prstGeom prst="rect">
+            <a:avLst/>
+          </a:prstGeom>
+        </p:spPr>
+        <p:txBody>
+          <a:bodyPr vert="horz" lIns="91440" tIns="45720" rIns="91440" bIns="45720" rtlCol="0"/>
+          <a:lstStyle/>
+          <a:p>
+            <a:pPr lvl="0"/>
+            <a:r>
+              <a:rPr lang="en-US" smtClean="0"/>
+              <a:t>Click to edit Master text styles</a:t>
+            </a:r>
+          </a:p>
+          <a:p>
+            <a:pPr lvl="1"/>
+            <a:r>
+              <a:rPr lang="en-US" smtClean="0"/>
+              <a:t>Second level</a:t>
+            </a:r>
+          </a:p>
+          <a:p>
+            <a:pPr lvl="2"/>
+            <a:r>
+              <a:rPr lang="en-US" smtClean="0"/>
+              <a:t>Third level</a:t>
+            </a:r>
+          </a:p>
+          <a:p>
+            <a:pPr lvl="3"/>
+            <a:r>
+              <a:rPr lang="en-US" smtClean="0"/>
+              <a:t>Fourth level</a:t>
+            </a:r>
+          </a:p>
+          <a:p>
+            <a:pPr lvl="4"/>
+            <a:r>
+              <a:rPr lang="en-US" smtClean="0"/>
+              <a:t>Fifth level</a:t>
+            </a:r>
+            <a:endParaRPr lang="en-US"/>
+          </a:p>
+        </p:txBody>
+      </p:sp>
+      <p:sp>
+        <p:nvSpPr>
+          <p:cNvPr id="6" name="Footer Placeholder 5"/>
+          <p:cNvSpPr>
+            <a:spLocks noGrp="1"/>
+          </p:cNvSpPr>
+          <p:nvPr>
+            <p:ph type="ftr" sz="quarter" idx="4"/>
+          </p:nvPr>
+        </p:nvSpPr>
+        <p:spPr>
+          <a:xfrm>
+            <a:off x="0" y="8685213"/>
+            <a:ext cx="2971800" cy="457200"/>
+          </a:xfrm>
+          <a:prstGeom prst="rect">
+            <a:avLst/>
+          </a:prstGeom>
+        </p:spPr>
+        <p:txBody>
+          <a:bodyPr vert="horz" lIns="91440" tIns="45720" rIns="91440" bIns="45720" rtlCol="0" anchor="b"/>
+          <a:lstStyle>
+            <a:lvl1pPr algn="l">
+              <a:defRPr sz="1200"/>
+            </a:lvl1pPr>
+          </a:lstStyle>
+          <a:p>
+            <a:endParaRPr lang="en-US"/>
+          </a:p>
+        </p:txBody>
+      </p:sp>
+      <p:sp>
+        <p:nvSpPr>
+          <p:cNvPr id="7" name="Slide Number Placeholder 6"/>
+          <p:cNvSpPr>
+            <a:spLocks noGrp="1"/>
+          </p:cNvSpPr>
+          <p:nvPr>
+            <p:ph type="sldNum" sz="quarter" idx="5"/>
+          </p:nvPr>
+        </p:nvSpPr>
+        <p:spPr>
+          <a:xfrm>
+            <a:off x="3884613" y="8685213"/>
+            <a:ext cx="2971800" cy="457200"/>
+          </a:xfrm>
+          <a:prstGeom prst="rect">
+            <a:avLst/>
+          </a:prstGeom>
+        </p:spPr>
+        <p:txBody>
+          <a:bodyPr vert="horz" lIns="91440" tIns="45720" rIns="91440" bIns="45720" rtlCol="0" anchor="b"/>
+          <a:lstStyle>
+            <a:lvl1pPr algn="r">
+              <a:defRPr sz="1200"/>
+            </a:lvl1pPr>
+          </a:lstStyle>
+          <a:p>
+            <a:fld id="{BB5E49A5-4136-284D-997B-48E1D791AD67}" type="slidenum">
+              <a:rPr lang="en-US" smtClean="0"/>
+              <a:t>‹#›</a:t>
+            </a:fld>
+            <a:endParaRPr lang="en-US"/>
+          </a:p>
+        </p:txBody>
+      </p:sp>
+    </p:spTree>
+    <p:extLst>
+      <p:ext uri="{BB962C8B-B14F-4D97-AF65-F5344CB8AC3E}">
+        <p14:creationId xmlns:p14="http://schemas.microsoft.com/office/powerpoint/2010/main" val="2623252185"/>
+      </p:ext>
+    </p:extLst>
+  </p:cSld>
+  <p:clrMap bg1="lt1" tx1="dk1" bg2="lt2" tx2="dk2" accent1="accent1" accent2="accent2" accent3="accent3" accent4="accent4" accent5="accent5" accent6="accent6" hlink="hlink" folHlink="folHlink"/>
+  <p:notesStyle>
+    <a:lvl1pPr marL="0" algn="l" defTabSz="457200" rtl="0" eaLnBrk="1" latinLnBrk="0" hangingPunct="1">
+      <a:defRPr sz="1200" kern="1200">
+        <a:solidFill>
+          <a:schemeClr val="tx1"/>
+        </a:solidFill>
+        <a:latin typeface="+mn-lt"/>
+        <a:ea typeface="+mn-ea"/>
+        <a:cs typeface="+mn-cs"/>
+      </a:defRPr>
+    </a:lvl1pPr>
+    <a:lvl2pPr marL="457200" algn="l" defTabSz="457200" rtl="0" eaLnBrk="1" latinLnBrk="0" hangingPunct="1">
+      <a:defRPr sz="1200" kern="1200">
+        <a:solidFill>
+          <a:schemeClr val="tx1"/>
+        </a:solidFill>
+        <a:latin typeface="+mn-lt"/>
+        <a:ea typeface="+mn-ea"/>
+        <a:cs typeface="+mn-cs"/>
+      </a:defRPr>
+    </a:lvl2pPr>
+    <a:lvl3pPr marL="914400" algn="l" defTabSz="457200" rtl="0" eaLnBrk="1" latinLnBrk="0" hangingPunct="1">
+      <a:defRPr sz="1200" kern="1200">
+        <a:solidFill>
+          <a:schemeClr val="tx1"/>
+        </a:solidFill>
+        <a:latin typeface="+mn-lt"/>
+        <a:ea typeface="+mn-ea"/>
+        <a:cs typeface="+mn-cs"/>
+      </a:defRPr>
+    </a:lvl3pPr>
+    <a:lvl4pPr marL="1371600" algn="l" defTabSz="457200" rtl="0" eaLnBrk="1" latinLnBrk="0" hangingPunct="1">
+      <a:defRPr sz="1200" kern="1200">
+        <a:solidFill>
+          <a:schemeClr val="tx1"/>
+        </a:solidFill>
+        <a:latin typeface="+mn-lt"/>
+        <a:ea typeface="+mn-ea"/>
+        <a:cs typeface="+mn-cs"/>
+      </a:defRPr>
+    </a:lvl4pPr>
+    <a:lvl5pPr marL="1828800" algn="l" defTabSz="457200" rtl="0" eaLnBrk="1" latinLnBrk="0" hangingPunct="1">
+      <a:defRPr sz="1200" kern="1200">
+        <a:solidFill>
+          <a:schemeClr val="tx1"/>
+        </a:solidFill>
+        <a:latin typeface="+mn-lt"/>
+        <a:ea typeface="+mn-ea"/>
+        <a:cs typeface="+mn-cs"/>
+      </a:defRPr>
+    </a:lvl5pPr>
+    <a:lvl6pPr marL="2286000" algn="l" defTabSz="457200" rtl="0" eaLnBrk="1" latinLnBrk="0" hangingPunct="1">
+      <a:defRPr sz="1200" kern="1200">
+        <a:solidFill>
+          <a:schemeClr val="tx1"/>
+        </a:solidFill>
+        <a:latin typeface="+mn-lt"/>
+        <a:ea typeface="+mn-ea"/>
+        <a:cs typeface="+mn-cs"/>
+      </a:defRPr>
+    </a:lvl6pPr>
+    <a:lvl7pPr marL="2743200" algn="l" defTabSz="457200" rtl="0" eaLnBrk="1" latinLnBrk="0" hangingPunct="1">
+      <a:defRPr sz="1200" kern="1200">
+        <a:solidFill>
+          <a:schemeClr val="tx1"/>
+        </a:solidFill>
+        <a:latin typeface="+mn-lt"/>
+        <a:ea typeface="+mn-ea"/>
+        <a:cs typeface="+mn-cs"/>
+      </a:defRPr>
+    </a:lvl7pPr>
+    <a:lvl8pPr marL="3200400" algn="l" defTabSz="457200" rtl="0" eaLnBrk="1" latinLnBrk="0" hangingPunct="1">
+      <a:defRPr sz="1200" kern="1200">
+        <a:solidFill>
+          <a:schemeClr val="tx1"/>
+        </a:solidFill>
+        <a:latin typeface="+mn-lt"/>
+        <a:ea typeface="+mn-ea"/>
+        <a:cs typeface="+mn-cs"/>
+      </a:defRPr>
+    </a:lvl8pPr>
+    <a:lvl9pPr marL="3657600" algn="l" defTabSz="457200" rtl="0" eaLnBrk="1" latinLnBrk="0" hangingPunct="1">
+      <a:defRPr sz="1200" kern="1200">
+        <a:solidFill>
+          <a:schemeClr val="tx1"/>
+        </a:solidFill>
+        <a:latin typeface="+mn-lt"/>
+        <a:ea typeface="+mn-ea"/>
+        <a:cs typeface="+mn-cs"/>
+      </a:defRPr>
+    </a:lvl9pPr>
+  </p:notesStyle>
+</p:notesMaster>
+</file>
+
+<file path=ppt/notesSlides/notesSlide1.xml><?xml version="1.0" encoding="utf-8"?>
+<p:notes xmlns:a="http://schemas.openxmlformats.org/drawingml/2006/main" xmlns:p="http://schemas.openxmlformats.org/presentationml/2006/main" xmlns:r="http://schemas.openxmlformats.org/officeDocument/2006/relationships">
+  <p:cSld>
+    <p:spTree>
+      <p:nvGrpSpPr>
+        <p:cNvPr id="1" name=""/>
+        <p:cNvGrpSpPr/>
+        <p:nvPr/>
+      </p:nvGrpSpPr>
+      <p:grpSpPr>
+        <a:xfrm>
+          <a:off x="0" y="0"/>
+          <a:ext cx="0" cy="0"/>
+          <a:chOff x="0" y="0"/>
+          <a:chExt cx="0" cy="0"/>
+        </a:xfrm>
+      </p:grpSpPr>
+      <p:sp>
+        <p:nvSpPr>
+          <p:cNvPr id="2" name="Slide Image Placeholder 1"/>
+          <p:cNvSpPr>
+            <a:spLocks noGrp="1"/>
+          </p:cNvSpPr>
+          <p:nvPr>
+            <p:ph type="sldImg" idx="2"/>
+          </p:nvPr>
+        </p:nvSpPr>
+        <p:spPr/>
+      </p:sp>
+      <p:sp>
+        <p:nvSpPr>
+          <p:cNvPr id="3" name="Notes Placeholder 2"/>
+          <p:cNvSpPr>
+            <a:spLocks noGrp="1"/>
+          </p:cNvSpPr>
+          <p:nvPr>
+            <p:ph type="body" idx="3" sz="quarter"/>
+          </p:nvPr>
+        </p:nvSpPr>
+        <p:spPr/>
+        <p:txBody>
+          <a:bodyPr/>
+          <a:lstStyle/>
+          <a:p>
+            <a:r>
+              <a:t>[강사 오프닝 멘트]</a:t>
+            </a:r>
+          </a:p>
+          <a:p>
+            <a:r>
+              <a:t>"안녕하세요. 프리랜서 개발자로 20년째 일하고 있는 구자광이라고 합니다."</a:t>
+            </a:r>
+          </a:p>
+          <a:p>
+            <a:r>
+              <a:t>"오늘은 'AI는 동반자다!' 라는 주제로 AI의 동향과 3가지 프롬프트 기법을 통해 AI를 다루는 법을 배워보겠습니다."</a:t>
+            </a:r>
+          </a:p>
+          <a:p>
+            <a:r>
+              <a:t>"먼저 현재 AI가 어떻게 활용되는지 영상을 보시겠습니다."</a:t>
+            </a:r>
+          </a:p>
+          <a:p>
+            <a:r>
+              <a:t>"영상을 보시는 중에 노트북 또는 핸드폰에 GPT, Claude, Gemini 중 하나와 Suno AI 앱을 설치해 주시기 바랍니다."</a:t>
+            </a:r>
+          </a:p>
+        </p:txBody>
+      </p:sp>
+      <p:sp>
+        <p:nvSpPr>
+          <p:cNvPr id="4" name="Slide Number Placeholder 3"/>
+          <p:cNvSpPr>
+            <a:spLocks noGrp="1"/>
+          </p:cNvSpPr>
+          <p:nvPr>
+            <p:ph type="sldNum" idx="5" sz="quarter"/>
+          </p:nvPr>
+        </p:nvSpPr>
+        <p:spPr/>
+      </p:sp>
+    </p:spTree>
+  </p:cSld>
+  <p:clrMapOvr>
+    <a:masterClrMapping/>
+  </p:clrMapOvr>
+</p:notes>
+</file>
+
+<file path=ppt/notesSlides/notesSlide2.xml><?xml version="1.0" encoding="utf-8"?>
+<p:notes xmlns:a="http://schemas.openxmlformats.org/drawingml/2006/main" xmlns:p="http://schemas.openxmlformats.org/presentationml/2006/main" xmlns:r="http://schemas.openxmlformats.org/officeDocument/2006/relationships">
+  <p:cSld>
+    <p:spTree>
+      <p:nvGrpSpPr>
+        <p:cNvPr id="1" name=""/>
+        <p:cNvGrpSpPr/>
+        <p:nvPr/>
+      </p:nvGrpSpPr>
+      <p:grpSpPr>
+        <a:xfrm>
+          <a:off x="0" y="0"/>
+          <a:ext cx="0" cy="0"/>
+          <a:chOff x="0" y="0"/>
+          <a:chExt cx="0" cy="0"/>
+        </a:xfrm>
+      </p:grpSpPr>
+      <p:sp>
+        <p:nvSpPr>
+          <p:cNvPr id="2" name="Slide Image Placeholder 1"/>
+          <p:cNvSpPr>
+            <a:spLocks noGrp="1"/>
+          </p:cNvSpPr>
+          <p:nvPr>
+            <p:ph type="sldImg" idx="2"/>
+          </p:nvPr>
+        </p:nvSpPr>
+        <p:spPr/>
+      </p:sp>
+      <p:sp>
+        <p:nvSpPr>
+          <p:cNvPr id="3" name="Notes Placeholder 2"/>
+          <p:cNvSpPr>
+            <a:spLocks noGrp="1"/>
+          </p:cNvSpPr>
+          <p:nvPr>
+            <p:ph type="body" idx="3" sz="quarter"/>
+          </p:nvPr>
+        </p:nvSpPr>
+        <p:spPr/>
+        <p:txBody>
+          <a:bodyPr/>
+          <a:lstStyle/>
+          <a:p>
+            <a:r>
+              <a:t>[강사 멘트]</a:t>
+            </a:r>
+          </a:p>
+          <a:p>
+            <a:r>
+              <a:t>"자 이제 3가지 프롬프트 기법과 바이브 코딩에 대해 배워보겠습니다."</a:t>
+            </a:r>
+          </a:p>
+          <a:p>
+            <a:r>
+              <a:t>"우리가 원하는 답변을 단번에 정확하게 얻어내기 위해 R-C-T-F 네 가지 요소를 꼭 기억하세요."</a:t>
+            </a:r>
+          </a:p>
+        </p:txBody>
+      </p:sp>
+      <p:sp>
+        <p:nvSpPr>
+          <p:cNvPr id="4" name="Slide Number Placeholder 3"/>
+          <p:cNvSpPr>
+            <a:spLocks noGrp="1"/>
+          </p:cNvSpPr>
+          <p:nvPr>
+            <p:ph type="sldNum" idx="5" sz="quarter"/>
+          </p:nvPr>
+        </p:nvSpPr>
+        <p:spPr/>
+      </p:sp>
+    </p:spTree>
+  </p:cSld>
+  <p:clrMapOvr>
+    <a:masterClrMapping/>
+  </p:clrMapOvr>
+</p:notes>
 </file>
 
 <file path=ppt/slideLayouts/slideLayout1.xml><?xml version="1.0" encoding="utf-8"?>
@@ -3294,7 +3813,7 @@
               </a:defRPr>
             </a:pPr>
             <a:r>
-              <a:t>🛠️ 4. AI 활용 실습 (생활밀착형)</a:t>
+              <a:t>🎵 실습 1. Suno AI로 노래 만들기</a:t>
             </a:r>
           </a:p>
         </p:txBody>
@@ -3307,8 +3826,8 @@
         </p:nvSpPr>
         <p:spPr>
           <a:xfrm>
-            <a:off x="914400" y="1828800"/>
-            <a:ext cx="10332720" cy="4114800"/>
+            <a:off x="914400" y="1645920"/>
+            <a:ext cx="10332720" cy="4572000"/>
           </a:xfrm>
           <a:prstGeom prst="rect">
             <a:avLst/>
@@ -3338,15 +3857,15 @@
                   <a:srgbClr val="93C5FD"/>
                 </a:solidFill>
               </a:rPr>
-              <a:t>실습 1. Suno AI로 노래 만들기 </a:t>
-            </a:r>
-            <a:r>
-              <a:rPr sz="1800">
-                <a:solidFill>
-                  <a:srgbClr val="CBD5E1"/>
-                </a:solidFill>
-              </a:rPr>
-              <a:t>음악 작사/작곡 메타 정보를 이용한 댄스곡 창작 실습 (RCTF)</a:t>
+              <a:t>■ 참고 가이드 영상: </a:t>
+            </a:r>
+            <a:r>
+              <a:rPr sz="1800" u="sng">
+                <a:solidFill>
+                  <a:srgbClr val="2DD4BF"/>
+                </a:solidFill>
+              </a:rPr>
+              <a:t>https://www.youtube.com/shorts/4sZpKfbCo7A</a:t>
             </a:r>
           </a:p>
           <a:p>
@@ -3367,7 +3886,7 @@
                   <a:srgbClr val="93C5FD"/>
                 </a:solidFill>
               </a:rPr>
-              <a:t>실습 2. 백종원 스타일 냉장고 털이 레시피 </a:t>
+              <a:t>■ 무료 크레딧 안내: </a:t>
             </a:r>
             <a:r>
               <a:rPr sz="1800">
@@ -3375,7 +3894,7 @@
                   <a:srgbClr val="CBD5E1"/>
                 </a:solidFill>
               </a:rPr>
-              <a:t>냉장고 속 남은 재료 맞춤형 3단계 레시피 짜기 (R-C-T-F)</a:t>
+              <a:t>매일 50크레딧 리셋 (1회당 10크레딧 소모 ➡️ 2곡 생성, 하루 총 10곡 무료)</a:t>
             </a:r>
           </a:p>
           <a:p>
@@ -3396,7 +3915,7 @@
                   <a:srgbClr val="93C5FD"/>
                 </a:solidFill>
               </a:rPr>
-              <a:t>실습 3. 자녀 수학 숙제 캐리하기 </a:t>
+              <a:t>■ 1단계: GPT를 통한 작사(RCTF 프롬프트): </a:t>
             </a:r>
             <a:r>
               <a:rPr sz="1800">
@@ -3404,7 +3923,65 @@
                   <a:srgbClr val="CBD5E1"/>
                 </a:solidFill>
               </a:rPr>
-              <a:t>통분과 최소공배수 개념을 가르치는 친절한 설명 및 음성(TTS)용 멘트 작성 (COT)</a:t>
+              <a:t/>
+            </a:r>
+          </a:p>
+          <a:p>
+            <a:pPr lvl="1">
+              <a:lnSpc>
+                <a:spcPct val="120000"/>
+              </a:lnSpc>
+              <a:spcAft>
+                <a:spcPts val="800"/>
+              </a:spcAft>
+              <a:defRPr>
+                <a:latin typeface="Malgun Gothic"/>
+              </a:defRPr>
+            </a:pPr>
+            <a:r>
+              <a:rPr b="1" sz="1800">
+                <a:solidFill>
+                  <a:srgbClr val="93C5FD"/>
+                </a:solidFill>
+              </a:rPr>
+              <a:t>• Role/Context: </a:t>
+            </a:r>
+            <a:r>
+              <a:rPr sz="1600">
+                <a:solidFill>
+                  <a:srgbClr val="CBD5E1"/>
+                </a:solidFill>
+              </a:rPr>
+              <a:t>"너는 방탄소년단 곡들을 모두 만든 천재 작곡가야", "중학교 2학년 학생이고 기말고사로 많이 지쳐있어. 난 학원만 저녁에 3개 다녀. 누워서 뒹굴 거리다 종종 낮 잠도 자고 싶어."</a:t>
+            </a:r>
+          </a:p>
+          <a:p>
+            <a:pPr lvl="1">
+              <a:lnSpc>
+                <a:spcPct val="120000"/>
+              </a:lnSpc>
+              <a:spcAft>
+                <a:spcPts val="800"/>
+              </a:spcAft>
+              <a:defRPr>
+                <a:latin typeface="Malgun Gothic"/>
+              </a:defRPr>
+            </a:pPr>
+            <a:r>
+              <a:rPr b="1" sz="1800">
+                <a:solidFill>
+                  <a:srgbClr val="93C5FD"/>
+                </a:solidFill>
+              </a:rPr>
+              <a:t>• Task/Format: </a:t>
+            </a:r>
+            <a:r>
+              <a:rPr sz="1600">
+                <a:solidFill>
+                  <a:srgbClr val="CBD5E1"/>
+                </a:solidFill>
+              </a:rPr>
+              <a:t>"방탄소년단 스타일 EDM 분위기 댄스곡 가사를 작사해줘", "가사를 suno ai가 분석하기 편하게 markdown 문법으로 작성해줘"</a:t>
             </a:r>
           </a:p>
           <a:p>
@@ -3425,7 +4002,7 @@
                   <a:srgbClr val="93C5FD"/>
                 </a:solidFill>
               </a:rPr>
-              <a:t>실습 5. 중고등학생 축제/동아리 기획서 짜기 </a:t>
+              <a:t>■ 2단계: Suno AI 가사 및 세부 조건 지정: </a:t>
             </a:r>
             <a:r>
               <a:rPr sz="1800">
@@ -3433,7 +4010,36 @@
                   <a:srgbClr val="CBD5E1"/>
                 </a:solidFill>
               </a:rPr>
-              <a:t>AI와 다단계 검증 및 질의응답 피드백을 통해 최종 기획서 PPTX 완성 (바이브 코딩)</a:t>
+              <a:t/>
+            </a:r>
+          </a:p>
+          <a:p>
+            <a:pPr lvl="1">
+              <a:lnSpc>
+                <a:spcPct val="120000"/>
+              </a:lnSpc>
+              <a:spcAft>
+                <a:spcPts val="800"/>
+              </a:spcAft>
+              <a:defRPr>
+                <a:latin typeface="Malgun Gothic"/>
+              </a:defRPr>
+            </a:pPr>
+            <a:r>
+              <a:rPr b="1" sz="1800">
+                <a:solidFill>
+                  <a:srgbClr val="93C5FD"/>
+                </a:solidFill>
+              </a:rPr>
+              <a:t>• Task / 조건: </a:t>
+            </a:r>
+            <a:r>
+              <a:rPr sz="1600">
+                <a:solidFill>
+                  <a:srgbClr val="CBD5E1"/>
+                </a:solidFill>
+              </a:rPr>
+              <a:t>"이 가사로 노래 만들어줘.", "욕이 나오면 안되고 초등 중등 학생들 비하하는 표현이 나오면 안돼. 너무 슬프지는 않았으면 좋겠어. 처음 인트로는 드럼 솔로로 강력하게 시작했으면 좋겠어. 방탄 스러운 보이스의 남자 가수 스타일로 불렀으면 좋겠어."</a:t>
             </a:r>
           </a:p>
         </p:txBody>
@@ -3554,7 +4160,7 @@
               </a:defRPr>
             </a:pPr>
             <a:r>
-              <a:t>🎵 실습 1. Suno AI로 노래 만들기</a:t>
+              <a:t>🍳 실습 2. 엄마 없는 날, 백종원 스타일 레시피</a:t>
             </a:r>
           </a:p>
         </p:txBody>
@@ -3598,36 +4204,7 @@
                   <a:srgbClr val="93C5FD"/>
                 </a:solidFill>
               </a:rPr>
-              <a:t>■ 참고 가이드 영상: </a:t>
-            </a:r>
-            <a:r>
-              <a:rPr sz="1800" u="sng">
-                <a:solidFill>
-                  <a:srgbClr val="2DD4BF"/>
-                </a:solidFill>
-              </a:rPr>
-              <a:t>https://www.youtube.com/shorts/4sZpKfbCo7A</a:t>
-            </a:r>
-          </a:p>
-          <a:p>
-            <a:pPr>
-              <a:lnSpc>
-                <a:spcPct val="120000"/>
-              </a:lnSpc>
-              <a:spcAft>
-                <a:spcPts val="800"/>
-              </a:spcAft>
-              <a:defRPr>
-                <a:latin typeface="Malgun Gothic"/>
-              </a:defRPr>
-            </a:pPr>
-            <a:r>
-              <a:rPr b="1" sz="2000">
-                <a:solidFill>
-                  <a:srgbClr val="93C5FD"/>
-                </a:solidFill>
-              </a:rPr>
-              <a:t>■ 무료 크레딧 안내: </a:t>
+              <a:t>■ 엄마 없는 날, 백종원 스타일 냉장고 털이 (R-C-T-F) </a:t>
             </a:r>
             <a:r>
               <a:rPr sz="1800">
@@ -3635,36 +4212,7 @@
                   <a:srgbClr val="CBD5E1"/>
                 </a:solidFill>
               </a:rPr>
-              <a:t>매일 50크레딧 리셋 (1회당 10크레딧 소모 ➡️ 2곡 생성, 하루 총 10곡 무료)</a:t>
-            </a:r>
-          </a:p>
-          <a:p>
-            <a:pPr>
-              <a:lnSpc>
-                <a:spcPct val="120000"/>
-              </a:lnSpc>
-              <a:spcAft>
-                <a:spcPts val="800"/>
-              </a:spcAft>
-              <a:defRPr>
-                <a:latin typeface="Malgun Gothic"/>
-              </a:defRPr>
-            </a:pPr>
-            <a:r>
-              <a:rPr b="1" sz="2000">
-                <a:solidFill>
-                  <a:srgbClr val="93C5FD"/>
-                </a:solidFill>
-              </a:rPr>
-              <a:t>■ 1단계: GPT를 통한 작사(RCTF 프롬프트): </a:t>
-            </a:r>
-            <a:r>
-              <a:rPr sz="1800">
-                <a:solidFill>
-                  <a:srgbClr val="CBD5E1"/>
-                </a:solidFill>
-              </a:rPr>
-              <a:t/>
+              <a:t>냉장고 속 방치된 재료들을 모아 전문 셰프급 요리로 재탄생시킵니다.</a:t>
             </a:r>
           </a:p>
           <a:p>
@@ -3685,7 +4233,7 @@
                   <a:srgbClr val="93C5FD"/>
                 </a:solidFill>
               </a:rPr>
-              <a:t>• Role/Context: </a:t>
+              <a:t>• 요리사 선택: </a:t>
             </a:r>
             <a:r>
               <a:rPr sz="1600">
@@ -3693,7 +4241,7 @@
                   <a:srgbClr val="CBD5E1"/>
                 </a:solidFill>
               </a:rPr>
-              <a:t>"천재 작곡가 페르소나", "학원에 지친 중2 상황 및 누워서 뒹굴거리고 싶은 마음"</a:t>
+              <a:t>백종원 또는 김풍 요리사 중 본인의 요리 콘셉트에 맞춰 선택 가능</a:t>
             </a:r>
           </a:p>
           <a:p>
@@ -3714,7 +4262,7 @@
                   <a:srgbClr val="93C5FD"/>
                 </a:solidFill>
               </a:rPr>
-              <a:t>• Task/Format: </a:t>
+              <a:t>• 입력 데이터: </a:t>
             </a:r>
             <a:r>
               <a:rPr sz="1600">
@@ -3722,36 +4270,7 @@
                   <a:srgbClr val="CBD5E1"/>
                 </a:solidFill>
               </a:rPr>
-              <a:t>"방탄 스타일 EDM 분위기 댄스곡 가사를 작사해줘", "Markdown 형식"</a:t>
-            </a:r>
-          </a:p>
-          <a:p>
-            <a:pPr>
-              <a:lnSpc>
-                <a:spcPct val="120000"/>
-              </a:lnSpc>
-              <a:spcAft>
-                <a:spcPts val="800"/>
-              </a:spcAft>
-              <a:defRPr>
-                <a:latin typeface="Malgun Gothic"/>
-              </a:defRPr>
-            </a:pPr>
-            <a:r>
-              <a:rPr b="1" sz="2000">
-                <a:solidFill>
-                  <a:srgbClr val="93C5FD"/>
-                </a:solidFill>
-              </a:rPr>
-              <a:t>■ 2단계: Suno AI 가사 및 세부 조건 지정: </a:t>
-            </a:r>
-            <a:r>
-              <a:rPr sz="1800">
-                <a:solidFill>
-                  <a:srgbClr val="CBD5E1"/>
-                </a:solidFill>
-              </a:rPr>
-              <a:t/>
+              <a:t>냉장고 속 식재료 리스트 (예: 어제 먹다 남은 햄 조금, 시들어가는 대파, 냉동실 찬밥 2공기, 계란 2개 등)</a:t>
             </a:r>
           </a:p>
           <a:p>
@@ -3772,7 +4291,7 @@
                   <a:srgbClr val="93C5FD"/>
                 </a:solidFill>
               </a:rPr>
-              <a:t>• 조건: </a:t>
+              <a:t>• 수행 미션 (Task): </a:t>
             </a:r>
             <a:r>
               <a:rPr sz="1600">
@@ -3780,7 +4299,36 @@
                   <a:srgbClr val="CBD5E1"/>
                 </a:solidFill>
               </a:rPr>
-              <a:t>욕설 비하 배제, 슬프지 않고 신나게, 인트로 드럼 솔로, 남자 가수 스타일 음색 지정</a:t>
+              <a:t>설거지거리를 최소화(원팬 요리 권장)하면서, 친구나 아이들과 함께 한 끼를 맛있게 뚝딱 해결할 수 있는 초간단 레시피 제안</a:t>
+            </a:r>
+          </a:p>
+          <a:p>
+            <a:pPr lvl="1">
+              <a:lnSpc>
+                <a:spcPct val="120000"/>
+              </a:lnSpc>
+              <a:spcAft>
+                <a:spcPts val="800"/>
+              </a:spcAft>
+              <a:defRPr>
+                <a:latin typeface="Malgun Gothic"/>
+              </a:defRPr>
+            </a:pPr>
+            <a:r>
+              <a:rPr b="1" sz="1800">
+                <a:solidFill>
+                  <a:srgbClr val="93C5FD"/>
+                </a:solidFill>
+              </a:rPr>
+              <a:t>• 최종 포맷 (Format): </a:t>
+            </a:r>
+            <a:r>
+              <a:rPr sz="1600">
+                <a:solidFill>
+                  <a:srgbClr val="CBD5E1"/>
+                </a:solidFill>
+              </a:rPr>
+              <a:t>친근한 백종원 말투(~쥬, ~해봐요잉)로 구성된 요리 이름, 필요한 도구 및 재료 준비, 딱 3단계 조리 순서, 맛을 2배로 올려줄 백종원의 비밀 팁</a:t>
             </a:r>
           </a:p>
         </p:txBody>
@@ -3901,7 +4449,7 @@
               </a:defRPr>
             </a:pPr>
             <a:r>
-              <a:t>🍳 실습 2. 백종원 스타일 레시피</a:t>
+              <a:t>🏫 실습 3. 자녀 수학 숙제 캐리하기 (COT 방식)</a:t>
             </a:r>
           </a:p>
         </p:txBody>
@@ -3945,7 +4493,7 @@
                   <a:srgbClr val="93C5FD"/>
                 </a:solidFill>
               </a:rPr>
-              <a:t>■ 엄마 없는 날, 백종원 스타일 냉장고 털이 (R-C-T-F) </a:t>
+              <a:t>■ 통분을 어려워하는 아이를 위한 수학 도우미: </a:t>
             </a:r>
             <a:r>
               <a:rPr sz="1800">
@@ -3953,7 +4501,7 @@
                   <a:srgbClr val="CBD5E1"/>
                 </a:solidFill>
               </a:rPr>
-              <a:t>냉장고 속 방치된 재료들을 모아 전문 셰프급 요리로 재탄생시킵니다.</a:t>
+              <a:t>아이가 분수 계산식에서 통분을 어려워하는 상황에 대처합니다. (Gemini 활용)</a:t>
             </a:r>
           </a:p>
           <a:p>
@@ -3974,7 +4522,7 @@
                   <a:srgbClr val="93C5FD"/>
                 </a:solidFill>
               </a:rPr>
-              <a:t>• 요리사 선택: </a:t>
+              <a:t>• 실습 프롬프트: </a:t>
             </a:r>
             <a:r>
               <a:rPr sz="1600">
@@ -3982,7 +4530,7 @@
                   <a:srgbClr val="CBD5E1"/>
                 </a:solidFill>
               </a:rPr>
-              <a:t>백종원 또는 김풍 요리사 중 본인의 요리 콘셉트에 맞춰 선택 가능</a:t>
+              <a:t>"아이가 분수 계산식에서 분모 통분하는 법을 모르는데... 최소공배수를 이해하지 못해서 그런 것 같아. ** 곱셈부터 단계적으로 설명해서 통분을 이해하고 분수 계산을 할 수 있게 설명해줘. **"</a:t>
             </a:r>
           </a:p>
           <a:p>
@@ -4003,7 +4551,7 @@
                   <a:srgbClr val="93C5FD"/>
                 </a:solidFill>
               </a:rPr>
-              <a:t>• 입력 데이터: </a:t>
+              <a:t>• 음성 멘트 출력 유도: </a:t>
             </a:r>
             <a:r>
               <a:rPr sz="1600">
@@ -4011,65 +4559,7 @@
                   <a:srgbClr val="CBD5E1"/>
                 </a:solidFill>
               </a:rPr>
-              <a:t>냉장고 속 식재료 리스트 (예: 어제 먹던 햄, 시들어가는 대파, 찬밥 등)</a:t>
-            </a:r>
-          </a:p>
-          <a:p>
-            <a:pPr lvl="1">
-              <a:lnSpc>
-                <a:spcPct val="120000"/>
-              </a:lnSpc>
-              <a:spcAft>
-                <a:spcPts val="800"/>
-              </a:spcAft>
-              <a:defRPr>
-                <a:latin typeface="Malgun Gothic"/>
-              </a:defRPr>
-            </a:pPr>
-            <a:r>
-              <a:rPr b="1" sz="1800">
-                <a:solidFill>
-                  <a:srgbClr val="93C5FD"/>
-                </a:solidFill>
-              </a:rPr>
-              <a:t>• 수행 미션: </a:t>
-            </a:r>
-            <a:r>
-              <a:rPr sz="1600">
-                <a:solidFill>
-                  <a:srgbClr val="CBD5E1"/>
-                </a:solidFill>
-              </a:rPr>
-              <a:t>설거지거리를 줄이는 '초간단 원팬(One-pan) 요리' 제안 요청</a:t>
-            </a:r>
-          </a:p>
-          <a:p>
-            <a:pPr lvl="1">
-              <a:lnSpc>
-                <a:spcPct val="120000"/>
-              </a:lnSpc>
-              <a:spcAft>
-                <a:spcPts val="800"/>
-              </a:spcAft>
-              <a:defRPr>
-                <a:latin typeface="Malgun Gothic"/>
-              </a:defRPr>
-            </a:pPr>
-            <a:r>
-              <a:rPr b="1" sz="1800">
-                <a:solidFill>
-                  <a:srgbClr val="93C5FD"/>
-                </a:solidFill>
-              </a:rPr>
-              <a:t>• 최종 포맷: </a:t>
-            </a:r>
-            <a:r>
-              <a:rPr sz="1600">
-                <a:solidFill>
-                  <a:srgbClr val="CBD5E1"/>
-                </a:solidFill>
-              </a:rPr>
-              <a:t>친근한 백종원 말투(~쥬)로 구성된 요리명, 준비물, 3단계 조리법, 비밀 팁</a:t>
+              <a:t>결과를 스마트폰에서 즉시 읽어줄 수 있도록 '음성으로 설명하는 멘트 형태'로 작성을 요청 (모바일 기기 재생 가능)</a:t>
             </a:r>
           </a:p>
         </p:txBody>
@@ -4190,7 +4680,7 @@
               </a:defRPr>
             </a:pPr>
             <a:r>
-              <a:t>🏫 실습 3. 자녀 수학 숙제 캐리하기 (COT 방식)</a:t>
+              <a:t>🎪 실습 5. 축제/동아리 기획서 초안 짜기 (바이브 코딩)</a:t>
             </a:r>
           </a:p>
         </p:txBody>
@@ -4234,7 +4724,7 @@
                   <a:srgbClr val="93C5FD"/>
                 </a:solidFill>
               </a:rPr>
-              <a:t>■ 통분을 어려워하는 아이를 위한 수학 도우미: </a:t>
+              <a:t>■ AI와 피드백을 반복하며 완성해 나가는 바이브 코딩 프로세스: </a:t>
             </a:r>
             <a:r>
               <a:rPr sz="1800">
@@ -4242,7 +4732,7 @@
                   <a:srgbClr val="CBD5E1"/>
                 </a:solidFill>
               </a:rPr>
-              <a:t>공식을 암기시키는 칠판식 수학이 아닌 논리 유도 설명입니다.</a:t>
+              <a:t>점진적으로 요구사항을 수정 반영하여 높은 완성도의 기획서를 얻어냅니다.</a:t>
             </a:r>
           </a:p>
           <a:p>
@@ -4263,7 +4753,7 @@
                   <a:srgbClr val="93C5FD"/>
                 </a:solidFill>
               </a:rPr>
-              <a:t>• 페르소나 설정: </a:t>
+              <a:t>• 1차 결과 검증 (Request): </a:t>
             </a:r>
             <a:r>
               <a:rPr sz="1600">
@@ -4271,7 +4761,7 @@
                   <a:srgbClr val="CBD5E1"/>
                 </a:solidFill>
               </a:rPr>
-              <a:t>이해하기 쉽고 직관적으로 설명하는 공대생 T 성향의 Gemini 비서 가동</a:t>
+              <a:t>"비가 올 경우, 햇볕이 너무 강할 경우에 대한 야외 대비책이 안 되어 있어."</a:t>
             </a:r>
           </a:p>
           <a:p>
@@ -4292,7 +4782,7 @@
                   <a:srgbClr val="93C5FD"/>
                 </a:solidFill>
               </a:rPr>
-              <a:t>• 실습 프롬프트: </a:t>
+              <a:t>• 2차 결과 검증 (Question): </a:t>
             </a:r>
             <a:r>
               <a:rPr sz="1600">
@@ -4300,7 +4790,7 @@
                   <a:srgbClr val="CBD5E1"/>
                 </a:solidFill>
               </a:rPr>
-              <a:t>"아이가 분수 계산식에서 분모 통분하는 법을 모르는데 최소공배수를 이해하지 못해서 그런 것 같아. 곱셈부터 단계적으로 설명해서 통분을 이해하고 분수 계산을 할 수 있게 차근차근 설명해줘."</a:t>
+              <a:t>"기본적인 음악을 깔아두는 게 좋을까? 그럼 어떤 음악들이 좋을까?"</a:t>
             </a:r>
           </a:p>
           <a:p>
@@ -4321,7 +4811,7 @@
                   <a:srgbClr val="93C5FD"/>
                 </a:solidFill>
               </a:rPr>
-              <a:t>• 오디오 음성 설명 유도: </a:t>
+              <a:t>• 3차 포맷 지정 및 최종 요청 (Format): </a:t>
             </a:r>
             <a:r>
               <a:rPr sz="1600">
@@ -4329,7 +4819,7 @@
                   <a:srgbClr val="CBD5E1"/>
                 </a:solidFill>
               </a:rPr>
-              <a:t>결과물을 스마트폰의 읽어주기 기능(TTS)으로 직접 들을 수 있도록 친근한 '구어체 음성 멘트 형식'으로 답변을 요청</a:t>
+              <a:t>"선생님과 친구들 앞에서 발표 할수 있도록 (제목, 목적, 운영 계획, 필요 물품, 기대 효과) 형식으로 PPTX 파일로 작성해 줘. 표지에는 월봉중학교 건물 사진이 포함되었으면 좋겠어."</a:t>
             </a:r>
           </a:p>
         </p:txBody>
@@ -4450,7 +4940,7 @@
               </a:defRPr>
             </a:pPr>
             <a:r>
-              <a:t>🎪 실습 5. 축제/동아리 기획서 초안 짜기 (바이브 코딩)</a:t>
+              <a:t>📝 내용 요약 및 1강 도전해보기</a:t>
             </a:r>
           </a:p>
         </p:txBody>
@@ -4494,7 +4984,7 @@
                   <a:srgbClr val="93C5FD"/>
                 </a:solidFill>
               </a:rPr>
-              <a:t>■ AI와 피드백을 반복하며 완성해 나가는 바이브 코딩 프로세스: </a:t>
+              <a:t>■ 오늘 배운 내용 요약: </a:t>
             </a:r>
             <a:r>
               <a:rPr sz="1800">
@@ -4502,7 +4992,7 @@
                   <a:srgbClr val="CBD5E1"/>
                 </a:solidFill>
               </a:rPr>
-              <a:t>점진적으로 요구사항을 수정 반영합니다.</a:t>
+              <a:t/>
             </a:r>
           </a:p>
           <a:p>
@@ -4523,7 +5013,7 @@
                   <a:srgbClr val="93C5FD"/>
                 </a:solidFill>
               </a:rPr>
-              <a:t>• 1차 요청 (기획 초안): </a:t>
+              <a:t>1. R-C-T-F 기법: </a:t>
             </a:r>
             <a:r>
               <a:rPr sz="1600">
@@ -4531,7 +5021,7 @@
                   <a:srgbClr val="CBD5E1"/>
                 </a:solidFill>
               </a:rPr>
-              <a:t>축제 부스의 운영 방식, 준비물 리스트, 예산, 기대 효과 생성</a:t>
+              <a:t>기본적이고 구체적인 의사소통 뼈대 수립</a:t>
             </a:r>
           </a:p>
           <a:p>
@@ -4552,7 +5042,7 @@
                   <a:srgbClr val="93C5FD"/>
                 </a:solidFill>
               </a:rPr>
-              <a:t>• 2차 요청 (예외 상황 대비 검증): </a:t>
+              <a:t>2. CoT 기법: </a:t>
             </a:r>
             <a:r>
               <a:rPr sz="1600">
@@ -4560,7 +5050,7 @@
                   <a:srgbClr val="CBD5E1"/>
                 </a:solidFill>
               </a:rPr>
-              <a:t>"비가 올 경우나 햇볕이 너무 강할 경우에 대한 야외 운영 대비책을 추가해줘."</a:t>
+              <a:t>논리적 절차를 순차적으로 생각하게 유도</a:t>
             </a:r>
           </a:p>
           <a:p>
@@ -4581,7 +5071,7 @@
                   <a:srgbClr val="93C5FD"/>
                 </a:solidFill>
               </a:rPr>
-              <a:t>• 3차 요청 (기획 완성도 조율): </a:t>
+              <a:t>3. Shot 기법: </a:t>
             </a:r>
             <a:r>
               <a:rPr sz="1600">
@@ -4589,7 +5079,36 @@
                   <a:srgbClr val="CBD5E1"/>
                 </a:solidFill>
               </a:rPr>
-              <a:t>"기본적인 음악을 깔아두는 것이 좋을까? 그렇다면 어떤 장르가 부스에 어울릴까?"</a:t>
+              <a:t>예시를 통해 원하는 문서 형식과 뉘앙스를 교육</a:t>
+            </a:r>
+          </a:p>
+          <a:p>
+            <a:pPr>
+              <a:lnSpc>
+                <a:spcPct val="120000"/>
+              </a:lnSpc>
+              <a:spcAft>
+                <a:spcPts val="800"/>
+              </a:spcAft>
+              <a:defRPr>
+                <a:latin typeface="Malgun Gothic"/>
+              </a:defRPr>
+            </a:pPr>
+            <a:r>
+              <a:rPr b="1" sz="2000">
+                <a:solidFill>
+                  <a:srgbClr val="93C5FD"/>
+                </a:solidFill>
+              </a:rPr>
+              <a:t>■ 1강 도전해보기 (미션): </a:t>
+            </a:r>
+            <a:r>
+              <a:rPr sz="1800">
+                <a:solidFill>
+                  <a:srgbClr val="CBD5E1"/>
+                </a:solidFill>
+              </a:rPr>
+              <a:t/>
             </a:r>
           </a:p>
           <a:p>
@@ -4610,7 +5129,7 @@
                   <a:srgbClr val="93C5FD"/>
                 </a:solidFill>
               </a:rPr>
-              <a:t>• 4차 요청 (최종 발표 포맷 지정): </a:t>
+              <a:t>1. AI를 이용해 내 목소리로 노래 만들기 </a:t>
             </a:r>
             <a:r>
               <a:rPr sz="1600">
@@ -4618,180 +5137,7 @@
                   <a:srgbClr val="CBD5E1"/>
                 </a:solidFill>
               </a:rPr>
-              <a:t>발표가 가능하도록 (제목, 목적, 운영 계획, 필요 물품, 기대 효과) 순의 PPTX 파일 작성을 지시 (표지에 월봉중학교 건물 사진 포함 조건 명시)</a:t>
-            </a:r>
-          </a:p>
-        </p:txBody>
-      </p:sp>
-    </p:spTree>
-  </p:cSld>
-  <p:clrMapOvr>
-    <a:masterClrMapping/>
-  </p:clrMapOvr>
-</p:sld>
-</file>
-
-<file path=ppt/slides/slide15.xml><?xml version="1.0" encoding="utf-8"?>
-<p:sld xmlns:a="http://schemas.openxmlformats.org/drawingml/2006/main" xmlns:p="http://schemas.openxmlformats.org/presentationml/2006/main" xmlns:r="http://schemas.openxmlformats.org/officeDocument/2006/relationships">
-  <p:cSld>
-    <p:spTree>
-      <p:nvGrpSpPr>
-        <p:cNvPr id="1" name=""/>
-        <p:cNvGrpSpPr/>
-        <p:nvPr/>
-      </p:nvGrpSpPr>
-      <p:grpSpPr/>
-      <p:pic>
-        <p:nvPicPr>
-          <p:cNvPr id="2" name="Picture 1" descr="ai_ppt_bg_1783143682050.png"/>
-          <p:cNvPicPr>
-            <a:picLocks noChangeAspect="1"/>
-          </p:cNvPicPr>
-          <p:nvPr/>
-        </p:nvPicPr>
-        <p:blipFill>
-          <a:blip r:embed="rId2"/>
-          <a:stretch>
-            <a:fillRect/>
-          </a:stretch>
-        </p:blipFill>
-        <p:spPr>
-          <a:xfrm>
-            <a:off x="0" y="0"/>
-            <a:ext cx="12191695" cy="6858000"/>
-          </a:xfrm>
-          <a:prstGeom prst="rect">
-            <a:avLst/>
-          </a:prstGeom>
-        </p:spPr>
-      </p:pic>
-      <p:sp>
-        <p:nvSpPr>
-          <p:cNvPr id="3" name="Rectangle 2"/>
-          <p:cNvSpPr/>
-          <p:nvPr/>
-        </p:nvSpPr>
-        <p:spPr>
-          <a:xfrm>
-            <a:off x="731520" y="548640"/>
-            <a:ext cx="109728" cy="731520"/>
-          </a:xfrm>
-          <a:prstGeom prst="rect">
-            <a:avLst/>
-          </a:prstGeom>
-          <a:solidFill>
-            <a:srgbClr val="22D3EE"/>
-          </a:solidFill>
-          <a:ln>
-            <a:noFill/>
-          </a:ln>
-        </p:spPr>
-        <p:style>
-          <a:lnRef idx="1">
-            <a:schemeClr val="accent1"/>
-          </a:lnRef>
-          <a:fillRef idx="3">
-            <a:schemeClr val="accent1"/>
-          </a:fillRef>
-          <a:effectRef idx="2">
-            <a:schemeClr val="accent1"/>
-          </a:effectRef>
-          <a:fontRef idx="minor">
-            <a:schemeClr val="lt1"/>
-          </a:fontRef>
-        </p:style>
-        <p:txBody>
-          <a:bodyPr rtlCol="0" anchor="ctr"/>
-          <a:lstStyle/>
-          <a:p>
-            <a:pPr algn="ctr"/>
-          </a:p>
-        </p:txBody>
-      </p:sp>
-      <p:sp>
-        <p:nvSpPr>
-          <p:cNvPr id="4" name="TextBox 3"/>
-          <p:cNvSpPr txBox="1"/>
-          <p:nvPr/>
-        </p:nvSpPr>
-        <p:spPr>
-          <a:xfrm>
-            <a:off x="1005840" y="457200"/>
-            <a:ext cx="10058400" cy="914400"/>
-          </a:xfrm>
-          <a:prstGeom prst="rect">
-            <a:avLst/>
-          </a:prstGeom>
-          <a:noFill/>
-        </p:spPr>
-        <p:txBody>
-          <a:bodyPr wrap="square" lIns="0" rIns="0" tIns="0" bIns="0">
-            <a:spAutoFit/>
-          </a:bodyPr>
-          <a:lstStyle/>
-          <a:p>
-            <a:pPr>
-              <a:defRPr sz="3200" b="1">
-                <a:solidFill>
-                  <a:srgbClr val="FFFFFF"/>
-                </a:solidFill>
-                <a:latin typeface="Malgun Gothic"/>
-              </a:defRPr>
-            </a:pPr>
-            <a:r>
-              <a:t>📝 내용 요약 및 1강 도전해보기</a:t>
-            </a:r>
-          </a:p>
-        </p:txBody>
-      </p:sp>
-      <p:sp>
-        <p:nvSpPr>
-          <p:cNvPr id="5" name="TextBox 4"/>
-          <p:cNvSpPr txBox="1"/>
-          <p:nvPr/>
-        </p:nvSpPr>
-        <p:spPr>
-          <a:xfrm>
-            <a:off x="914400" y="1645920"/>
-            <a:ext cx="10332720" cy="4572000"/>
-          </a:xfrm>
-          <a:prstGeom prst="rect">
-            <a:avLst/>
-          </a:prstGeom>
-          <a:noFill/>
-        </p:spPr>
-        <p:txBody>
-          <a:bodyPr wrap="square">
-            <a:spAutoFit/>
-          </a:bodyPr>
-          <a:lstStyle/>
-          <a:p>
-            <a:pPr>
-              <a:lnSpc>
-                <a:spcPct val="120000"/>
-              </a:lnSpc>
-              <a:spcAft>
-                <a:spcPts val="800"/>
-              </a:spcAft>
-              <a:defRPr>
-                <a:latin typeface="Malgun Gothic"/>
-              </a:defRPr>
-            </a:pPr>
-            <a:r>
-              <a:rPr b="1" sz="2000">
-                <a:solidFill>
-                  <a:srgbClr val="93C5FD"/>
-                </a:solidFill>
-              </a:rPr>
-              <a:t>■ 오늘 배운 내용 요약: </a:t>
-            </a:r>
-            <a:r>
-              <a:rPr sz="1800">
-                <a:solidFill>
-                  <a:srgbClr val="CBD5E1"/>
-                </a:solidFill>
-              </a:rPr>
-              <a:t/>
+              <a:t>(suno-ai-app 이용)</a:t>
             </a:r>
           </a:p>
           <a:p>
@@ -4812,7 +5158,7 @@
                   <a:srgbClr val="93C5FD"/>
                 </a:solidFill>
               </a:rPr>
-              <a:t>1. R-C-T-F 기법: </a:t>
+              <a:t>2. AI를 이용해 함께하고 싶은 게임 만들기 </a:t>
             </a:r>
             <a:r>
               <a:rPr sz="1600">
@@ -4820,7 +5166,7 @@
                   <a:srgbClr val="CBD5E1"/>
                 </a:solidFill>
               </a:rPr>
-              <a:t>기본적이고 구체적인 의사소통 뼈대 수립</a:t>
+              <a:t>(AI와 함께하는 블록코딩으로 레고처럼 만들어보기)</a:t>
             </a:r>
           </a:p>
           <a:p>
@@ -4841,151 +5187,6 @@
                   <a:srgbClr val="93C5FD"/>
                 </a:solidFill>
               </a:rPr>
-              <a:t>2. CoT 기법: </a:t>
-            </a:r>
-            <a:r>
-              <a:rPr sz="1600">
-                <a:solidFill>
-                  <a:srgbClr val="CBD5E1"/>
-                </a:solidFill>
-              </a:rPr>
-              <a:t>논리적 절차를 순차적으로 생각하게 유도</a:t>
-            </a:r>
-          </a:p>
-          <a:p>
-            <a:pPr lvl="1">
-              <a:lnSpc>
-                <a:spcPct val="120000"/>
-              </a:lnSpc>
-              <a:spcAft>
-                <a:spcPts val="800"/>
-              </a:spcAft>
-              <a:defRPr>
-                <a:latin typeface="Malgun Gothic"/>
-              </a:defRPr>
-            </a:pPr>
-            <a:r>
-              <a:rPr b="1" sz="1800">
-                <a:solidFill>
-                  <a:srgbClr val="93C5FD"/>
-                </a:solidFill>
-              </a:rPr>
-              <a:t>3. Shot 기법: </a:t>
-            </a:r>
-            <a:r>
-              <a:rPr sz="1600">
-                <a:solidFill>
-                  <a:srgbClr val="CBD5E1"/>
-                </a:solidFill>
-              </a:rPr>
-              <a:t>예시를 통해 원하는 문서 형식과 뉘앙스를 교육</a:t>
-            </a:r>
-          </a:p>
-          <a:p>
-            <a:pPr>
-              <a:lnSpc>
-                <a:spcPct val="120000"/>
-              </a:lnSpc>
-              <a:spcAft>
-                <a:spcPts val="800"/>
-              </a:spcAft>
-              <a:defRPr>
-                <a:latin typeface="Malgun Gothic"/>
-              </a:defRPr>
-            </a:pPr>
-            <a:r>
-              <a:rPr b="1" sz="2000">
-                <a:solidFill>
-                  <a:srgbClr val="93C5FD"/>
-                </a:solidFill>
-              </a:rPr>
-              <a:t>■ 1강 도전해보기 (미션): </a:t>
-            </a:r>
-            <a:r>
-              <a:rPr sz="1800">
-                <a:solidFill>
-                  <a:srgbClr val="CBD5E1"/>
-                </a:solidFill>
-              </a:rPr>
-              <a:t/>
-            </a:r>
-          </a:p>
-          <a:p>
-            <a:pPr lvl="1">
-              <a:lnSpc>
-                <a:spcPct val="120000"/>
-              </a:lnSpc>
-              <a:spcAft>
-                <a:spcPts val="800"/>
-              </a:spcAft>
-              <a:defRPr>
-                <a:latin typeface="Malgun Gothic"/>
-              </a:defRPr>
-            </a:pPr>
-            <a:r>
-              <a:rPr b="1" sz="1800">
-                <a:solidFill>
-                  <a:srgbClr val="93C5FD"/>
-                </a:solidFill>
-              </a:rPr>
-              <a:t>1. AI를 이용해 내 목소리로 노래 만들기 </a:t>
-            </a:r>
-            <a:r>
-              <a:rPr sz="1600">
-                <a:solidFill>
-                  <a:srgbClr val="CBD5E1"/>
-                </a:solidFill>
-              </a:rPr>
-              <a:t>(suno-ai-app 이용)</a:t>
-            </a:r>
-          </a:p>
-          <a:p>
-            <a:pPr lvl="1">
-              <a:lnSpc>
-                <a:spcPct val="120000"/>
-              </a:lnSpc>
-              <a:spcAft>
-                <a:spcPts val="800"/>
-              </a:spcAft>
-              <a:defRPr>
-                <a:latin typeface="Malgun Gothic"/>
-              </a:defRPr>
-            </a:pPr>
-            <a:r>
-              <a:rPr b="1" sz="1800">
-                <a:solidFill>
-                  <a:srgbClr val="93C5FD"/>
-                </a:solidFill>
-              </a:rPr>
-              <a:t>2. AI를 이용해 함께하고 싶은 게임 만들기 </a:t>
-            </a:r>
-            <a:r>
-              <a:rPr sz="1600">
-                <a:solidFill>
-                  <a:srgbClr val="CBD5E1"/>
-                </a:solidFill>
-              </a:rPr>
-              <a:t>(AI와 함께하는 블록코딩으로 레고처럼 만들어보기)</a:t>
-            </a:r>
-          </a:p>
-          <a:p>
-            <a:pPr lvl="1">
-              <a:lnSpc>
-                <a:spcPct val="120000"/>
-              </a:lnSpc>
-              <a:spcAft>
-                <a:spcPts val="800"/>
-              </a:spcAft>
-              <a:defRPr>
-                <a:latin typeface="Malgun Gothic"/>
-              </a:defRPr>
-            </a:pPr>
-            <a:r>
-              <a:rPr b="1" sz="1800">
-                <a:solidFill>
-                  <a:srgbClr val="93C5FD"/>
-                </a:solidFill>
-              </a:rPr>
               <a:t>3. AI를 이용해 3분 이하 다큐멘터리 영상 초안 만들기 (자막 포함) </a:t>
             </a:r>
             <a:r>
@@ -5015,7 +5216,7 @@
                   <a:srgbClr val="93C5FD"/>
                 </a:solidFill>
               </a:rPr>
-              <a:t>• 추천 주제: </a:t>
+              <a:t>  - 추천 주제: </a:t>
             </a:r>
             <a:r>
               <a:rPr sz="1400">
@@ -5023,7 +5224,7 @@
                   <a:srgbClr val="CBD5E1"/>
                 </a:solidFill>
               </a:rPr>
-              <a:t>내 남동생을 소개합니다, 우리집 강아지 소개 등 친근한 일상 이야기</a:t>
+              <a:t>내 남동생을 소개합니다, 우리집 강아지 소개 등 일상적인 콘텐츠</a:t>
             </a:r>
           </a:p>
         </p:txBody>
@@ -5196,7 +5397,7 @@
                   <a:srgbClr val="CBD5E1"/>
                 </a:solidFill>
               </a:rPr>
-              <a:t>AI를 처음 다루거나 제대로 활용하지 못하는 분들에게 생활 속에서 AI를 즐겁게 활용하는 구체적인 가이드와 요령을 소개합니다.</a:t>
+              <a:t>AI를 처음 다루거나 제대로 활용하지 못하는 사람들에게 AI를 생활 속에서 즐겁게 활용하는 방법을 소개하는 강좌</a:t>
             </a:r>
           </a:p>
           <a:p>
@@ -5246,7 +5447,7 @@
                   <a:srgbClr val="CBD5E1"/>
                 </a:solidFill>
               </a:rPr>
-              <a:t>AI를 입문하거나 어렵게 느끼시는 분, 일상이나 업무에서 AI 비서를 효율적으로 다루고 싶으신 분</a:t>
+              <a:t>AI를 처음 접하거나 어려움을 겪는 분들</a:t>
             </a:r>
           </a:p>
         </p:txBody>
@@ -5367,7 +5568,7 @@
               </a:defRPr>
             </a:pPr>
             <a:r>
-              <a:t>🌎 1. AI 동향 및 인사이트</a:t>
+              <a:t>🌎 1. AI 동향 및 메인 인사이트</a:t>
             </a:r>
           </a:p>
         </p:txBody>
@@ -5380,8 +5581,8 @@
         </p:nvSpPr>
         <p:spPr>
           <a:xfrm>
-            <a:off x="914400" y="1828800"/>
-            <a:ext cx="10332720" cy="4114800"/>
+            <a:off x="914400" y="1645920"/>
+            <a:ext cx="10332720" cy="4572000"/>
           </a:xfrm>
           <a:prstGeom prst="rect">
             <a:avLst/>
@@ -5411,7 +5612,7 @@
                   <a:srgbClr val="93C5FD"/>
                 </a:solidFill>
               </a:rPr>
-              <a:t>🎬 AI 활용 동향 영상: </a:t>
+              <a:t>🎬 AI 활용 영상 링크: </a:t>
             </a:r>
             <a:r>
               <a:rPr sz="1800" u="sng">
@@ -5440,7 +5641,7 @@
                   <a:srgbClr val="93C5FD"/>
                 </a:solidFill>
               </a:rPr>
-              <a:t>💡 새로운 AI 트렌드: </a:t>
+              <a:t>💡 핵심 메시지 및 패러다임 변화: </a:t>
             </a:r>
             <a:r>
               <a:rPr sz="1800">
@@ -5477,7 +5678,7 @@
                   <a:srgbClr val="CBD5E1"/>
                 </a:solidFill>
               </a:rPr>
-              <a:t>대답하는 AI를 넘어, 주어진 목표를 주도적으로 완수하는 AI 시대 (직접 정보 구매 및 요약 등)</a:t>
+              <a:t>대답만 잘하는 AI가 아니라, 주어진 목표를 완수해주는 AI 시대 도입 (예: 책 추천을 넘어 직접 전자책을 구매해서 읽고 요약까지 수행)</a:t>
             </a:r>
           </a:p>
           <a:p>
@@ -5506,7 +5707,7 @@
                   <a:srgbClr val="CBD5E1"/>
                 </a:solidFill>
               </a:rPr>
-              <a:t>텍스트를 넘어 이미지, 음성, 영상까지 완벽하게 이해하고 창작하는 AI 기술</a:t>
+              <a:t>텍스트를 넘어 이미지, 음성, 영상을 완벽히 이해하고 창작하는 AI 시대 (예: 지브리 스타일 애니메이션 자가 구현)</a:t>
             </a:r>
           </a:p>
           <a:p>
@@ -5535,7 +5736,7 @@
                   <a:srgbClr val="CBD5E1"/>
                 </a:solidFill>
               </a:rPr>
-              <a:t>기기 탑재형 소형 AI로 데이터 유출 없는 보안성과 신속한 오프라인 작업 처리 지원</a:t>
+              <a:t>소형 탑재형 AI로 데이터가 외부로 나가지 않고 기기 내에서 처리 (보안에 강하며 특정 작업은 클라우드 기반 AI보다 고속 처리. 예: 로보락스 청소기)</a:t>
             </a:r>
           </a:p>
           <a:p>
@@ -5564,7 +5765,7 @@
                   <a:srgbClr val="CBD5E1"/>
                 </a:solidFill>
               </a:rPr>
-              <a:t>로보틱스와 AI의 결합으로 스스로 물리적 환경을 판단하고 동작 수행 (예: 완벽한 계란후라이 뒤집기)</a:t>
+              <a:t>로보틱스와 AI가 접목되어 로봇이 스스로 환경을 인식/판단하고 육체적인 작업 수행 (예: 계란후라이 노른자를 안 터트리고 뒤집기 성공)</a:t>
             </a:r>
           </a:p>
         </p:txBody>
@@ -5685,7 +5886,7 @@
               </a:defRPr>
             </a:pPr>
             <a:r>
-              <a:t>🌎 AI 활용 주요 사례 및 동향 영상</a:t>
+              <a:t>💡 2. AI 대화하기: 3가지 기법과 바이브 코딩</a:t>
             </a:r>
           </a:p>
         </p:txBody>
@@ -5729,7 +5930,7 @@
                   <a:srgbClr val="93C5FD"/>
                 </a:solidFill>
               </a:rPr>
-              <a:t>💬 1. AI 상담 (심리 및 고민 상담 - 3분) </a:t>
+              <a:t>1. R-C-T-F 공식 (기본 작성법) </a:t>
             </a:r>
             <a:r>
               <a:rPr sz="1800">
@@ -5737,36 +5938,7 @@
                   <a:srgbClr val="CBD5E1"/>
                 </a:solidFill>
               </a:rPr>
-              <a:t>사람에게 말하기 어려운 속마음을 24시간 들어주는 대화형 AI 사례</a:t>
-            </a:r>
-          </a:p>
-          <a:p>
-            <a:pPr lvl="1">
-              <a:lnSpc>
-                <a:spcPct val="120000"/>
-              </a:lnSpc>
-              <a:spcAft>
-                <a:spcPts val="800"/>
-              </a:spcAft>
-              <a:defRPr>
-                <a:latin typeface="Malgun Gothic"/>
-              </a:defRPr>
-            </a:pPr>
-            <a:r>
-              <a:rPr b="1" sz="1800">
-                <a:solidFill>
-                  <a:srgbClr val="2DD4BF"/>
-                </a:solidFill>
-              </a:rPr>
-              <a:t>🔗 유튜브 링크: </a:t>
-            </a:r>
-            <a:r>
-              <a:rPr sz="1600" u="sng">
-                <a:solidFill>
-                  <a:srgbClr val="2DD4BF"/>
-                </a:solidFill>
-              </a:rPr>
-              <a:t>https://youtube.com/shorts/1UNUNlzH3l8</a:t>
+              <a:t>역할(Role) + 배경(Context) + 작업(Task) + 형식(Format)을 결합하여 원하는 답변을 단번에 얻어냄</a:t>
             </a:r>
           </a:p>
           <a:p>
@@ -5787,7 +5959,7 @@
                   <a:srgbClr val="93C5FD"/>
                 </a:solidFill>
               </a:rPr>
-              <a:t>✈️ 2. AI 여행 계획 세우기 (3분) </a:t>
+              <a:t>2. 생각의 고리 (CoT 기법) </a:t>
             </a:r>
             <a:r>
               <a:rPr sz="1800">
@@ -5795,36 +5967,7 @@
                   <a:srgbClr val="CBD5E1"/>
                 </a:solidFill>
               </a:rPr>
-              <a:t>여행지 정보 입력으로 동선 설계, 구글지도 매핑, 맛집 산출하는 사례</a:t>
-            </a:r>
-          </a:p>
-          <a:p>
-            <a:pPr lvl="1">
-              <a:lnSpc>
-                <a:spcPct val="120000"/>
-              </a:lnSpc>
-              <a:spcAft>
-                <a:spcPts val="800"/>
-              </a:spcAft>
-              <a:defRPr>
-                <a:latin typeface="Malgun Gothic"/>
-              </a:defRPr>
-            </a:pPr>
-            <a:r>
-              <a:rPr b="1" sz="1800">
-                <a:solidFill>
-                  <a:srgbClr val="2DD4BF"/>
-                </a:solidFill>
-              </a:rPr>
-              <a:t>🔗 유튜브 링크: </a:t>
-            </a:r>
-            <a:r>
-              <a:rPr sz="1600" u="sng">
-                <a:solidFill>
-                  <a:srgbClr val="2DD4BF"/>
-                </a:solidFill>
-              </a:rPr>
-              <a:t>https://www.youtube.com/watch?v=kYJ-l27k8x8</a:t>
+              <a:t>"단계적으로 차근차근 생각해봐"를 유도해 풀이 과정을 스스로 적으며 추론 오답률을 획기적으로 축소</a:t>
             </a:r>
           </a:p>
           <a:p>
@@ -5845,7 +5988,7 @@
                   <a:srgbClr val="93C5FD"/>
                 </a:solidFill>
               </a:rPr>
-              <a:t>🎬 3. 비디오 생성 AI, Sora 소개 (2분 30초) </a:t>
+              <a:t>3. 예시 주입 (Shot 기반 프롬프팅) </a:t>
             </a:r>
             <a:r>
               <a:rPr sz="1800">
@@ -5853,11 +5996,11 @@
                   <a:srgbClr val="CBD5E1"/>
                 </a:solidFill>
               </a:rPr>
-              <a:t>텍스트 묘사만으로 고화질 3D 비디오를 창작하는 혁신적 영상 AI 기술</a:t>
-            </a:r>
-          </a:p>
-          <a:p>
-            <a:pPr lvl="1">
+              <a:t>대화 속에 예시(Shot)를 제공하여 특이한 서식이나 구체적인 말투를 완전히 모방하도록 학습</a:t>
+            </a:r>
+          </a:p>
+          <a:p>
+            <a:pPr>
               <a:lnSpc>
                 <a:spcPct val="120000"/>
               </a:lnSpc>
@@ -5869,20 +6012,20 @@
               </a:defRPr>
             </a:pPr>
             <a:r>
-              <a:rPr b="1" sz="1800">
-                <a:solidFill>
-                  <a:srgbClr val="2DD4BF"/>
-                </a:solidFill>
-              </a:rPr>
-              <a:t>🔗 유튜브 링크: </a:t>
-            </a:r>
-            <a:r>
-              <a:rPr sz="1600" u="sng">
-                <a:solidFill>
-                  <a:srgbClr val="2DD4BF"/>
-                </a:solidFill>
-              </a:rPr>
-              <a:t>https://www.youtube.com/watch?v=HK6y8DMNqQ0</a:t>
+              <a:rPr b="1" sz="2000">
+                <a:solidFill>
+                  <a:srgbClr val="93C5FD"/>
+                </a:solidFill>
+              </a:rPr>
+              <a:t>🏄‍♂️ 바이브 코딩 (Vibe Coding): </a:t>
+            </a:r>
+            <a:r>
+              <a:rPr sz="1800">
+                <a:solidFill>
+                  <a:srgbClr val="CBD5E1"/>
+                </a:solidFill>
+              </a:rPr>
+              <a:t>코딩 문법을 몰라도 자연어로 기획과 의도(Vibe)를 전달해 앱을 바로 빌드해 나가는 개발</a:t>
             </a:r>
           </a:p>
         </p:txBody>
@@ -6003,7 +6146,7 @@
               </a:defRPr>
             </a:pPr>
             <a:r>
-              <a:t>💡 2. AI 대화하기: 3가지 기법과 바이브 코딩</a:t>
+              <a:t>🛠️ 2-1. 프롬프트 작성의 기본: R-C-T-F 공식</a:t>
             </a:r>
           </a:p>
         </p:txBody>
@@ -6016,8 +6159,8 @@
         </p:nvSpPr>
         <p:spPr>
           <a:xfrm>
-            <a:off x="914400" y="1828800"/>
-            <a:ext cx="10332720" cy="4114800"/>
+            <a:off x="914400" y="1645920"/>
+            <a:ext cx="10332720" cy="4572000"/>
           </a:xfrm>
           <a:prstGeom prst="rect">
             <a:avLst/>
@@ -6047,7 +6190,7 @@
                   <a:srgbClr val="93C5FD"/>
                 </a:solidFill>
               </a:rPr>
-              <a:t>1. R-C-T-F 공식 (기본 작성법) </a:t>
+              <a:t>📌 R-C-T-F 공식: </a:t>
             </a:r>
             <a:r>
               <a:rPr sz="1800">
@@ -6055,11 +6198,11 @@
                   <a:srgbClr val="CBD5E1"/>
                 </a:solidFill>
               </a:rPr>
-              <a:t>역할(Role) + 배경(Context) + 작업(Task) + 형식(Format)을 결합하는 기본 기법</a:t>
-            </a:r>
-          </a:p>
-          <a:p>
-            <a:pPr>
+              <a:t>Role(역할) + Context(배경) + Task(작업) + Format(형식)</a:t>
+            </a:r>
+          </a:p>
+          <a:p>
+            <a:pPr lvl="1">
               <a:lnSpc>
                 <a:spcPct val="120000"/>
               </a:lnSpc>
@@ -6071,24 +6214,24 @@
               </a:defRPr>
             </a:pPr>
             <a:r>
-              <a:rPr b="1" sz="2000">
+              <a:rPr b="1" sz="1800">
                 <a:solidFill>
                   <a:srgbClr val="93C5FD"/>
                 </a:solidFill>
               </a:rPr>
-              <a:t>2. 생각의 고리 (CoT 기법) </a:t>
-            </a:r>
-            <a:r>
-              <a:rPr sz="1800">
+              <a:t>• Role (역할): </a:t>
+            </a:r>
+            <a:r>
+              <a:rPr sz="1600">
                 <a:solidFill>
                   <a:srgbClr val="CBD5E1"/>
                 </a:solidFill>
               </a:rPr>
-              <a:t>"단계별로 차근차근 생각해줘"를 통해 AI의 추론 논리력과 계산 정확도를 획기적으로 상승</a:t>
-            </a:r>
-          </a:p>
-          <a:p>
-            <a:pPr>
+              <a:t>AI에게 전문가 타이틀 부여 (예: "너는 15년 차 베테랑 일본 전문 여행 가이드야")</a:t>
+            </a:r>
+          </a:p>
+          <a:p>
+            <a:pPr lvl="1">
               <a:lnSpc>
                 <a:spcPct val="120000"/>
               </a:lnSpc>
@@ -6100,24 +6243,24 @@
               </a:defRPr>
             </a:pPr>
             <a:r>
-              <a:rPr b="1" sz="2000">
+              <a:rPr b="1" sz="1800">
                 <a:solidFill>
                   <a:srgbClr val="93C5FD"/>
                 </a:solidFill>
               </a:rPr>
-              <a:t>3. 예시 주입 (Shot 기반 프롬프팅) </a:t>
-            </a:r>
-            <a:r>
-              <a:rPr sz="1800">
+              <a:t>• Context (배경): </a:t>
+            </a:r>
+            <a:r>
+              <a:rPr sz="1600">
                 <a:solidFill>
                   <a:srgbClr val="CBD5E1"/>
                 </a:solidFill>
               </a:rPr>
-              <a:t>대화 속에 예시(Shot)를 직접 보여주어 일정한 서식과 말투를 완벽하게 학습</a:t>
-            </a:r>
-          </a:p>
-          <a:p>
-            <a:pPr>
+              <a:t>구체적인 본인의 상황과 제한 조건 (예: "무릎 약하신 60대 어머니와 초등학생 자녀 오사카 3박 4일 여행")</a:t>
+            </a:r>
+          </a:p>
+          <a:p>
+            <a:pPr lvl="1">
               <a:lnSpc>
                 <a:spcPct val="120000"/>
               </a:lnSpc>
@@ -6129,24 +6272,24 @@
               </a:defRPr>
             </a:pPr>
             <a:r>
-              <a:rPr b="1" sz="2000">
+              <a:rPr b="1" sz="1800">
                 <a:solidFill>
                   <a:srgbClr val="93C5FD"/>
                 </a:solidFill>
               </a:rPr>
-              <a:t>🏄‍♂️ 바이브 코딩 (Vibe Coding): </a:t>
-            </a:r>
-            <a:r>
-              <a:rPr sz="1800">
+              <a:t>• Task (작업): </a:t>
+            </a:r>
+            <a:r>
+              <a:rPr sz="1600">
                 <a:solidFill>
                   <a:srgbClr val="CBD5E1"/>
                 </a:solidFill>
               </a:rPr>
-              <a:t>코드 문법을 타이핑하지 않고 자연어로 원하는 앱의 기획과 의도(느낌)를 전달해 빌드</a:t>
-            </a:r>
-          </a:p>
-          <a:p>
-            <a:pPr>
+              <a:t>실행해야 할 구체적인 미션 (예: "어머니의 무릎 무리를 줄이기 위해 걸음을 최소화한 동선 제안")</a:t>
+            </a:r>
+          </a:p>
+          <a:p>
+            <a:pPr lvl="1">
               <a:lnSpc>
                 <a:spcPct val="120000"/>
               </a:lnSpc>
@@ -6158,20 +6301,20 @@
               </a:defRPr>
             </a:pPr>
             <a:r>
-              <a:rPr b="1" sz="2000">
-                <a:solidFill>
-                  <a:srgbClr val="2DD4BF"/>
-                </a:solidFill>
-              </a:rPr>
-              <a:t>🔗 참고 영상 [남들과 다르게 프롬프트 짜기]: </a:t>
-            </a:r>
-            <a:r>
-              <a:rPr sz="1800" u="sng">
-                <a:solidFill>
-                  <a:srgbClr val="2DD4BF"/>
-                </a:solidFill>
-              </a:rPr>
-              <a:t>https://youtube.com/shorts/TIr6_Bo8zfg</a:t>
+              <a:rPr b="1" sz="1800">
+                <a:solidFill>
+                  <a:srgbClr val="93C5FD"/>
+                </a:solidFill>
+              </a:rPr>
+              <a:t>• Format (형식): </a:t>
+            </a:r>
+            <a:r>
+              <a:rPr sz="1600">
+                <a:solidFill>
+                  <a:srgbClr val="CBD5E1"/>
+                </a:solidFill>
+              </a:rPr>
+              <a:t>출력 모양 정의 (예: "일정은 시간대 흐름을 볼 수 있게 깔끔한 표(Table)로 정리해줘")</a:t>
             </a:r>
           </a:p>
         </p:txBody>
@@ -6292,7 +6435,7 @@
               </a:defRPr>
             </a:pPr>
             <a:r>
-              <a:t>🛠️ 2-1. 프롬프트 작성의 기본: R-C-T-F 공식</a:t>
+              <a:t>🧠 2-2. 생각의 고리: Chain of Thought (CoT)</a:t>
             </a:r>
           </a:p>
         </p:txBody>
@@ -6336,7 +6479,7 @@
                   <a:srgbClr val="93C5FD"/>
                 </a:solidFill>
               </a:rPr>
-              <a:t>📌 R-C-T-F 공식: </a:t>
+              <a:t>■ 핵심 개념: </a:t>
             </a:r>
             <a:r>
               <a:rPr sz="1800">
@@ -6344,7 +6487,65 @@
                   <a:srgbClr val="CBD5E1"/>
                 </a:solidFill>
               </a:rPr>
-              <a:t>Role(역할) + Context(배경) + Task(작업) + Format(형식)</a:t>
+              <a:t>복잡한 문제 해결 시 바로 답을 요구하지 않고 풀이 과정을 유도하여 오답률을 최소화합니다.</a:t>
+            </a:r>
+          </a:p>
+          <a:p>
+            <a:pPr>
+              <a:lnSpc>
+                <a:spcPct val="120000"/>
+              </a:lnSpc>
+              <a:spcAft>
+                <a:spcPts val="800"/>
+              </a:spcAft>
+              <a:defRPr>
+                <a:latin typeface="Malgun Gothic"/>
+              </a:defRPr>
+            </a:pPr>
+            <a:r>
+              <a:rPr b="1" sz="2000">
+                <a:solidFill>
+                  <a:srgbClr val="93C5FD"/>
+                </a:solidFill>
+              </a:rPr>
+              <a:t>■ 핵심 키워드: </a:t>
+            </a:r>
+            <a:r>
+              <a:rPr sz="1800">
+                <a:solidFill>
+                  <a:srgbClr val="CBD5E1"/>
+                </a:solidFill>
+              </a:rPr>
+              <a:t>"단계별로 생각을 나누어 차근차근 풀이해줘" 문장 추가</a:t>
+            </a:r>
+          </a:p>
+          <a:p>
+            <a:pPr>
+              <a:lnSpc>
+                <a:spcPct val="120000"/>
+              </a:lnSpc>
+              <a:spcAft>
+                <a:spcPts val="800"/>
+              </a:spcAft>
+              <a:defRPr>
+                <a:latin typeface="Malgun Gothic"/>
+              </a:defRPr>
+            </a:pPr>
+            <a:r>
+              <a:rPr b="1" sz="2000">
+                <a:solidFill>
+                  <a:srgbClr val="93C5FD"/>
+                </a:solidFill>
+              </a:rPr>
+              <a:t>💡 CoT 적용 예시 (수학 문제): </a:t>
+            </a:r>
+            <a:r>
+              <a:rPr sz="1800">
+                <a:solidFill>
+                  <a:srgbClr val="CBD5E1"/>
+                </a:solidFill>
+              </a:rPr>
+              <a:t/>
             </a:r>
           </a:p>
           <a:p>
@@ -6365,7 +6566,7 @@
                   <a:srgbClr val="93C5FD"/>
                 </a:solidFill>
               </a:rPr>
-              <a:t>• Role (역할): </a:t>
+              <a:t>• 질문: </a:t>
             </a:r>
             <a:r>
               <a:rPr sz="1600">
@@ -6373,7 +6574,7 @@
                   <a:srgbClr val="CBD5E1"/>
                 </a:solidFill>
               </a:rPr>
-              <a:t>AI에게 전문가 직함/페르소나 부여 (예: "너는 10년 차 일본 가이드야")</a:t>
+              <a:t>"우리 반 학생 30명 중 축구를 좋아하는 애가 60%이고 그중 안경을 쓴 애가 1/3이야. 안경 쓴 애는 몇 명인지 단계별로 생각을 나누어 차근차근 풀이해줘."</a:t>
             </a:r>
           </a:p>
           <a:p>
@@ -6394,7 +6595,7 @@
                   <a:srgbClr val="93C5FD"/>
                 </a:solidFill>
               </a:rPr>
-              <a:t>• Context (배경): </a:t>
+              <a:t>• AI의 논리적 답변: </a:t>
             </a:r>
             <a:r>
               <a:rPr sz="1600">
@@ -6402,11 +6603,11 @@
                   <a:srgbClr val="CBD5E1"/>
                 </a:solidFill>
               </a:rPr>
-              <a:t>구체적인 본인의 상황 및 제한 요소 전달 (예: "무릎 아픈 부모님 동반")</a:t>
-            </a:r>
-          </a:p>
-          <a:p>
-            <a:pPr lvl="1">
+              <a:t/>
+            </a:r>
+          </a:p>
+          <a:p>
+            <a:pPr lvl="2">
               <a:lnSpc>
                 <a:spcPct val="120000"/>
               </a:lnSpc>
@@ -6418,24 +6619,24 @@
               </a:defRPr>
             </a:pPr>
             <a:r>
-              <a:rPr b="1" sz="1800">
+              <a:rPr b="1" sz="1600">
                 <a:solidFill>
                   <a:srgbClr val="93C5FD"/>
                 </a:solidFill>
               </a:rPr>
-              <a:t>• Task (작업): </a:t>
-            </a:r>
-            <a:r>
-              <a:rPr sz="1600">
+              <a:t>  - 1단계: </a:t>
+            </a:r>
+            <a:r>
+              <a:rPr sz="1400">
                 <a:solidFill>
                   <a:srgbClr val="CBD5E1"/>
                 </a:solidFill>
               </a:rPr>
-              <a:t>수행할 구체적인 미션/명령 (예: "동선을 최소화한 최적 코스 설계")</a:t>
-            </a:r>
-          </a:p>
-          <a:p>
-            <a:pPr lvl="1">
+              <a:t>축구 좋아하는 학생 수 계산 = 30명 * 0.6 = 18명.</a:t>
+            </a:r>
+          </a:p>
+          <a:p>
+            <a:pPr lvl="2">
               <a:lnSpc>
                 <a:spcPct val="120000"/>
               </a:lnSpc>
@@ -6447,20 +6648,49 @@
               </a:defRPr>
             </a:pPr>
             <a:r>
-              <a:rPr b="1" sz="1800">
+              <a:rPr b="1" sz="1600">
                 <a:solidFill>
                   <a:srgbClr val="93C5FD"/>
                 </a:solidFill>
               </a:rPr>
-              <a:t>• Format (형식): </a:t>
-            </a:r>
-            <a:r>
-              <a:rPr sz="1600">
+              <a:t>  - 2단계: </a:t>
+            </a:r>
+            <a:r>
+              <a:rPr sz="1400">
                 <a:solidFill>
                   <a:srgbClr val="CBD5E1"/>
                 </a:solidFill>
               </a:rPr>
-              <a:t>원하는 출력 양식 지정 (예: "시간대별 깔끔한 표로 정리해줘")</a:t>
+              <a:t>그중 안경 쓴 학생 수 계산 = 18명 * 1/3 = 6명.</a:t>
+            </a:r>
+          </a:p>
+          <a:p>
+            <a:pPr lvl="2">
+              <a:lnSpc>
+                <a:spcPct val="120000"/>
+              </a:lnSpc>
+              <a:spcAft>
+                <a:spcPts val="800"/>
+              </a:spcAft>
+              <a:defRPr>
+                <a:latin typeface="Malgun Gothic"/>
+              </a:defRPr>
+            </a:pPr>
+            <a:r>
+              <a:rPr b="1" sz="1600">
+                <a:solidFill>
+                  <a:srgbClr val="93C5FD"/>
+                </a:solidFill>
+              </a:rPr>
+              <a:t>  - 최종 답: </a:t>
+            </a:r>
+            <a:r>
+              <a:rPr sz="1400">
+                <a:solidFill>
+                  <a:srgbClr val="CBD5E1"/>
+                </a:solidFill>
+              </a:rPr>
+              <a:t>6명입니다.</a:t>
             </a:r>
           </a:p>
         </p:txBody>
@@ -6581,7 +6811,7 @@
               </a:defRPr>
             </a:pPr>
             <a:r>
-              <a:t>🧠 2-2. 생각의 고리: Chain of Thought (CoT)</a:t>
+              <a:t>🎯 2-3. 예시 주입: 샷(Shot) 기반 프롬프팅</a:t>
             </a:r>
           </a:p>
         </p:txBody>
@@ -6625,7 +6855,7 @@
                   <a:srgbClr val="93C5FD"/>
                 </a:solidFill>
               </a:rPr>
-              <a:t>■ 핵심 개념: </a:t>
+              <a:t>■ 샷(Shot) 종류와 Roblox 대화 번역 실습: </a:t>
             </a:r>
             <a:r>
               <a:rPr sz="1800">
@@ -6633,65 +6863,7 @@
                   <a:srgbClr val="CBD5E1"/>
                 </a:solidFill>
               </a:rPr>
-              <a:t>복잡한 문제 해결 시 바로 답을 구하기보다 논리적 절차를 순차적으로 생각하게 유도합니다.</a:t>
-            </a:r>
-          </a:p>
-          <a:p>
-            <a:pPr>
-              <a:lnSpc>
-                <a:spcPct val="120000"/>
-              </a:lnSpc>
-              <a:spcAft>
-                <a:spcPts val="800"/>
-              </a:spcAft>
-              <a:defRPr>
-                <a:latin typeface="Malgun Gothic"/>
-              </a:defRPr>
-            </a:pPr>
-            <a:r>
-              <a:rPr b="1" sz="2000">
-                <a:solidFill>
-                  <a:srgbClr val="93C5FD"/>
-                </a:solidFill>
-              </a:rPr>
-              <a:t>■ 핵심 키워드: </a:t>
-            </a:r>
-            <a:r>
-              <a:rPr sz="1800">
-                <a:solidFill>
-                  <a:srgbClr val="CBD5E1"/>
-                </a:solidFill>
-              </a:rPr>
-              <a:t>"단계별로 생각을 나누어 차근차근 풀이해줘" 문장 추가</a:t>
-            </a:r>
-          </a:p>
-          <a:p>
-            <a:pPr>
-              <a:lnSpc>
-                <a:spcPct val="120000"/>
-              </a:lnSpc>
-              <a:spcAft>
-                <a:spcPts val="800"/>
-              </a:spcAft>
-              <a:defRPr>
-                <a:latin typeface="Malgun Gothic"/>
-              </a:defRPr>
-            </a:pPr>
-            <a:r>
-              <a:rPr b="1" sz="2000">
-                <a:solidFill>
-                  <a:srgbClr val="93C5FD"/>
-                </a:solidFill>
-              </a:rPr>
-              <a:t>💡 CoT 적용 예시 (수학 문제): </a:t>
-            </a:r>
-            <a:r>
-              <a:rPr sz="1800">
-                <a:solidFill>
-                  <a:srgbClr val="CBD5E1"/>
-                </a:solidFill>
-              </a:rPr>
-              <a:t/>
+              <a:t>예시 주입을 통해 구체적인 서식과 대화 뉘앙스를 교육합니다.</a:t>
             </a:r>
           </a:p>
           <a:p>
@@ -6712,7 +6884,7 @@
                   <a:srgbClr val="93C5FD"/>
                 </a:solidFill>
               </a:rPr>
-              <a:t>• 질문: </a:t>
+              <a:t>• Zero-shot (제로샷): </a:t>
             </a:r>
             <a:r>
               <a:rPr sz="1600">
@@ -6720,7 +6892,7 @@
                   <a:srgbClr val="CBD5E1"/>
                 </a:solidFill>
               </a:rPr>
-              <a:t>"학생 30명 중 축구를 좋아하는 애가 60%이고 그중 안경 쓴 애가 1/3이야. 안경 쓴 애는 몇 명인지 단계별로 차근차근 풀이해줘."</a:t>
+              <a:t>예시 없이 즉시 질문 (예: "로블록스에서 외국인과 대화하고 싶어")</a:t>
             </a:r>
           </a:p>
           <a:p>
@@ -6741,7 +6913,7 @@
                   <a:srgbClr val="93C5FD"/>
                 </a:solidFill>
               </a:rPr>
-              <a:t>• AI 단계별 풀이 과정: </a:t>
+              <a:t>• One-shot (원샷): </a:t>
             </a:r>
             <a:r>
               <a:rPr sz="1600">
@@ -6749,7 +6921,7 @@
                   <a:srgbClr val="CBD5E1"/>
                 </a:solidFill>
               </a:rPr>
-              <a:t/>
+              <a:t>원하는 스타일의 대화 예시를 딱 1개 보여주고 지시</a:t>
             </a:r>
           </a:p>
           <a:p>
@@ -6770,7 +6942,7 @@
                   <a:srgbClr val="93C5FD"/>
                 </a:solidFill>
               </a:rPr>
-              <a:t>  - 1단계: </a:t>
+              <a:t>  - 주입 예시: </a:t>
             </a:r>
             <a:r>
               <a:rPr sz="1400">
@@ -6778,7 +6950,36 @@
                   <a:srgbClr val="CBD5E1"/>
                 </a:solidFill>
               </a:rPr>
-              <a:t>축구 좋아하는 학생 수 계산 = 30명 * 0.6 = 18명</a:t>
+              <a:t>"로블록스에서 외국인과 대화하고 싶어. 님! 제발 사냥터 A 같이 깨주시면 안될까요?" (1개 예시 제공)</a:t>
+            </a:r>
+          </a:p>
+          <a:p>
+            <a:pPr lvl="1">
+              <a:lnSpc>
+                <a:spcPct val="120000"/>
+              </a:lnSpc>
+              <a:spcAft>
+                <a:spcPts val="800"/>
+              </a:spcAft>
+              <a:defRPr>
+                <a:latin typeface="Malgun Gothic"/>
+              </a:defRPr>
+            </a:pPr>
+            <a:r>
+              <a:rPr b="1" sz="1800">
+                <a:solidFill>
+                  <a:srgbClr val="93C5FD"/>
+                </a:solidFill>
+              </a:rPr>
+              <a:t>• Few-shot (퓨샷): </a:t>
+            </a:r>
+            <a:r>
+              <a:rPr sz="1600">
+                <a:solidFill>
+                  <a:srgbClr val="CBD5E1"/>
+                </a:solidFill>
+              </a:rPr>
+              <a:t>자주 쓰이는 대화 예시를 3개 이상 입력하여 AI가 완벽하게 서식을 모방하도록 유도</a:t>
             </a:r>
           </a:p>
           <a:p>
@@ -6799,7 +7000,7 @@
                   <a:srgbClr val="93C5FD"/>
                 </a:solidFill>
               </a:rPr>
-              <a:t>  - 2단계: </a:t>
+              <a:t>  - 주입 예시: </a:t>
             </a:r>
             <a:r>
               <a:rPr sz="1400">
@@ -6807,7 +7008,7 @@
                   <a:srgbClr val="CBD5E1"/>
                 </a:solidFill>
               </a:rPr>
-              <a:t>그중 안경 쓴 학생 수 계산 = 18명 * 1/3 = 6명</a:t>
+              <a:t>"로블록스에서 외국인과 대화하고 싶어. 아래와 같은 게임에서 많이 쓰는 대화들 알려줘. 1) 님! 제발 사냥터 A 같이 깨주시면 안될까요? 2) 제 아이템과 그 검 교환해주실 수 있나요? 3) 내일 같은 시간에 또 게임 같이 하실래요?"</a:t>
             </a:r>
           </a:p>
           <a:p>
@@ -6828,7 +7029,7 @@
                   <a:srgbClr val="93C5FD"/>
                 </a:solidFill>
               </a:rPr>
-              <a:t>  - 최종 답: </a:t>
+              <a:t>  - Task 지정: </a:t>
             </a:r>
             <a:r>
               <a:rPr sz="1400">
@@ -6836,7 +7037,7 @@
                   <a:srgbClr val="CBD5E1"/>
                 </a:solidFill>
               </a:rPr>
-              <a:t>6명입니다.</a:t>
+              <a:t>"이런식의 대화들 질문과 답변 예시를 보여주고 영어로 대화해 보고 싶어."</a:t>
             </a:r>
           </a:p>
         </p:txBody>
@@ -6957,7 +7158,7 @@
               </a:defRPr>
             </a:pPr>
             <a:r>
-              <a:t>🎯 2-3. 예시 주입: 샷(Shot) 기반 프롬프팅</a:t>
+              <a:t>🏄‍♂️ 3. 바이브 코딩 (Vibe Coding)이란?</a:t>
             </a:r>
           </a:p>
         </p:txBody>
@@ -6970,8 +7171,8 @@
         </p:nvSpPr>
         <p:spPr>
           <a:xfrm>
-            <a:off x="914400" y="1645920"/>
-            <a:ext cx="10332720" cy="4572000"/>
+            <a:off x="914400" y="1828800"/>
+            <a:ext cx="10332720" cy="4114800"/>
           </a:xfrm>
           <a:prstGeom prst="rect">
             <a:avLst/>
@@ -7001,7 +7202,7 @@
                   <a:srgbClr val="93C5FD"/>
                 </a:solidFill>
               </a:rPr>
-              <a:t>■ 샷(Shot) 종류와 Roblox 대화 실습 예시: </a:t>
+              <a:t>■ 정의: </a:t>
             </a:r>
             <a:r>
               <a:rPr sz="1800">
@@ -7009,7 +7210,36 @@
                   <a:srgbClr val="CBD5E1"/>
                 </a:solidFill>
               </a:rPr>
-              <a:t>예시 주입을 통해 상황에 맞는 표현을 유도합니다.</a:t>
+              <a:t>개발자가 문법을 작성하는 대신 자연어로 의도와 '느낌(Vibe)'을 설명하고, 실제 개발은 AI 에이전트가 수행하는 패러다임</a:t>
+            </a:r>
+          </a:p>
+          <a:p>
+            <a:pPr>
+              <a:lnSpc>
+                <a:spcPct val="120000"/>
+              </a:lnSpc>
+              <a:spcAft>
+                <a:spcPts val="800"/>
+              </a:spcAft>
+              <a:defRPr>
+                <a:latin typeface="Malgun Gothic"/>
+              </a:defRPr>
+            </a:pPr>
+            <a:r>
+              <a:rPr b="1" sz="2000">
+                <a:solidFill>
+                  <a:srgbClr val="93C5FD"/>
+                </a:solidFill>
+              </a:rPr>
+              <a:t>■ 3단계 개발 프로세스 예시 (번역 앱 개발): </a:t>
+            </a:r>
+            <a:r>
+              <a:rPr sz="1800">
+                <a:solidFill>
+                  <a:srgbClr val="CBD5E1"/>
+                </a:solidFill>
+              </a:rPr>
+              <a:t/>
             </a:r>
           </a:p>
           <a:p>
@@ -7030,7 +7260,7 @@
                   <a:srgbClr val="93C5FD"/>
                 </a:solidFill>
               </a:rPr>
-              <a:t>• Zero-shot (제로샷): </a:t>
+              <a:t>1. 지시(Vibe)하기: </a:t>
             </a:r>
             <a:r>
               <a:rPr sz="1600">
@@ -7038,7 +7268,7 @@
                   <a:srgbClr val="CBD5E1"/>
                 </a:solidFill>
               </a:rPr>
-              <a:t>예시 없이 즉시 질문 (예: "로블록스에서 외국인과 대화하고 싶어")</a:t>
+              <a:t>"외국인과 게임을 같이 하기 위해 실시간 번역해주는 앱을 만들고 싶어"라고 자연어로 설명</a:t>
             </a:r>
           </a:p>
           <a:p>
@@ -7059,7 +7289,7 @@
                   <a:srgbClr val="93C5FD"/>
                 </a:solidFill>
               </a:rPr>
-              <a:t>• One-shot (원샷): </a:t>
+              <a:t>2. AI의 자동 빌드: </a:t>
             </a:r>
             <a:r>
               <a:rPr sz="1600">
@@ -7067,36 +7297,7 @@
                   <a:srgbClr val="CBD5E1"/>
                 </a:solidFill>
               </a:rPr>
-              <a:t>원하는 스타일의 대화 예시를 딱 1개 보여주고 지시</a:t>
-            </a:r>
-          </a:p>
-          <a:p>
-            <a:pPr lvl="2">
-              <a:lnSpc>
-                <a:spcPct val="120000"/>
-              </a:lnSpc>
-              <a:spcAft>
-                <a:spcPts val="800"/>
-              </a:spcAft>
-              <a:defRPr>
-                <a:latin typeface="Malgun Gothic"/>
-              </a:defRPr>
-            </a:pPr>
-            <a:r>
-              <a:rPr b="1" sz="1600">
-                <a:solidFill>
-                  <a:srgbClr val="93C5FD"/>
-                </a:solidFill>
-              </a:rPr>
-              <a:t>  - 주입 예시: </a:t>
-            </a:r>
-            <a:r>
-              <a:rPr sz="1400">
-                <a:solidFill>
-                  <a:srgbClr val="CBD5E1"/>
-                </a:solidFill>
-              </a:rPr>
-              <a:t>"님! 제발 사냥터 A 같이 깨주시면 안될까요?" (번역 뼈대 제공)</a:t>
+              <a:t>AI 에이전트가 코드를 스스로 짜고, 에러가 발생하면 알아서 디버깅을 진행해 완성본 생성</a:t>
             </a:r>
           </a:p>
           <a:p>
@@ -7117,7 +7318,7 @@
                   <a:srgbClr val="93C5FD"/>
                 </a:solidFill>
               </a:rPr>
-              <a:t>• Few-shot (퓨샷): </a:t>
+              <a:t>3. 검증 및 지휘: </a:t>
             </a:r>
             <a:r>
               <a:rPr sz="1600">
@@ -7125,36 +7326,7 @@
                   <a:srgbClr val="CBD5E1"/>
                 </a:solidFill>
               </a:rPr>
-              <a:t>구체적인 자주 쓰이는 게임 대화 예시를 3개 이상 입력하여 학습</a:t>
-            </a:r>
-          </a:p>
-          <a:p>
-            <a:pPr lvl="2">
-              <a:lnSpc>
-                <a:spcPct val="120000"/>
-              </a:lnSpc>
-              <a:spcAft>
-                <a:spcPts val="800"/>
-              </a:spcAft>
-              <a:defRPr>
-                <a:latin typeface="Malgun Gothic"/>
-              </a:defRPr>
-            </a:pPr>
-            <a:r>
-              <a:rPr b="1" sz="1600">
-                <a:solidFill>
-                  <a:srgbClr val="93C5FD"/>
-                </a:solidFill>
-              </a:rPr>
-              <a:t>  - 주입 예시: </a:t>
-            </a:r>
-            <a:r>
-              <a:rPr sz="1400">
-                <a:solidFill>
-                  <a:srgbClr val="CBD5E1"/>
-                </a:solidFill>
-              </a:rPr>
-              <a:t>"사냥터 같이 깨주실래요?", "아이템 교환 하실래요?", "내일 또 하실래요?" 등을 학습시켜 완벽한 번역기 톤 모방</a:t>
+              <a:t>사람은 코드를 일일이 뜯어보지 않고, 완성된 결과물을 보면서 더 멋지게 수정하도록 피드백(지휘)만 수행</a:t>
             </a:r>
           </a:p>
         </p:txBody>
@@ -7275,7 +7447,7 @@
               </a:defRPr>
             </a:pPr>
             <a:r>
-              <a:t>🏄‍♂️ 3. 바이브 코딩 (Vibe Coding)</a:t>
+              <a:t>🛠️ 4. AI 활용 실습 (생활밀착형)</a:t>
             </a:r>
           </a:p>
         </p:txBody>
@@ -7319,7 +7491,7 @@
                   <a:srgbClr val="93C5FD"/>
                 </a:solidFill>
               </a:rPr>
-              <a:t>■ 정의: </a:t>
+              <a:t>실습 1. Suno AI로 노래 만들기 </a:t>
             </a:r>
             <a:r>
               <a:rPr sz="1800">
@@ -7327,7 +7499,7 @@
                   <a:srgbClr val="CBD5E1"/>
                 </a:solidFill>
               </a:rPr>
-              <a:t>개발자가 문법을 작성하는 대신 자연어로 의도와 '느낌(Vibe)'을 설명하고, 실제 개발은 AI 에이전트가 수행하는 패러다임</a:t>
+              <a:t>음악 작사/작곡 메타 정보를 이용한 곡 창작 실습 (RCTF)</a:t>
             </a:r>
           </a:p>
           <a:p>
@@ -7348,7 +7520,7 @@
                   <a:srgbClr val="93C5FD"/>
                 </a:solidFill>
               </a:rPr>
-              <a:t>■ 3단계 개발 프로세스: </a:t>
+              <a:t>실습 2. 엄마 없는 날, 백종원 스타일 레시피 </a:t>
             </a:r>
             <a:r>
               <a:rPr sz="1800">
@@ -7356,11 +7528,11 @@
                   <a:srgbClr val="CBD5E1"/>
                 </a:solidFill>
               </a:rPr>
-              <a:t/>
-            </a:r>
-          </a:p>
-          <a:p>
-            <a:pPr lvl="1">
+              <a:t>냉장고 속 남은 재료 맞춤형 3단계 레시피 짜기 (R-C-T-F)</a:t>
+            </a:r>
+          </a:p>
+          <a:p>
+            <a:pPr>
               <a:lnSpc>
                 <a:spcPct val="120000"/>
               </a:lnSpc>
@@ -7372,24 +7544,24 @@
               </a:defRPr>
             </a:pPr>
             <a:r>
-              <a:rPr b="1" sz="1800">
+              <a:rPr b="1" sz="2000">
                 <a:solidFill>
                   <a:srgbClr val="93C5FD"/>
                 </a:solidFill>
               </a:rPr>
-              <a:t>1. 지시(Vibe)하기: </a:t>
-            </a:r>
-            <a:r>
-              <a:rPr sz="1600">
+              <a:t>실습 3. 자녀 수학 숙제 캐리하기 </a:t>
+            </a:r>
+            <a:r>
+              <a:rPr sz="1800">
                 <a:solidFill>
                   <a:srgbClr val="CBD5E1"/>
                 </a:solidFill>
               </a:rPr>
-              <a:t>"외국인과 게임을 같이 하기 위해 실시간 번역해주는 앱을 만들고 싶어" 처럼 자연어로 기획 설명</a:t>
-            </a:r>
-          </a:p>
-          <a:p>
-            <a:pPr lvl="1">
+              <a:t>분모 통분하는 법을 가르치는 친절한 설명 및 음성(TTS)용 멘트 작성 (COT)</a:t>
+            </a:r>
+          </a:p>
+          <a:p>
+            <a:pPr>
               <a:lnSpc>
                 <a:spcPct val="120000"/>
               </a:lnSpc>
@@ -7401,49 +7573,20 @@
               </a:defRPr>
             </a:pPr>
             <a:r>
-              <a:rPr b="1" sz="1800">
+              <a:rPr b="1" sz="2000">
                 <a:solidFill>
                   <a:srgbClr val="93C5FD"/>
                 </a:solidFill>
               </a:rPr>
-              <a:t>2. AI 자동 빌드: </a:t>
-            </a:r>
-            <a:r>
-              <a:rPr sz="1600">
+              <a:t>실습 5. 중고등학생 축제/동아리 기획서 짜기 </a:t>
+            </a:r>
+            <a:r>
+              <a:rPr sz="1800">
                 <a:solidFill>
                   <a:srgbClr val="CBD5E1"/>
                 </a:solidFill>
               </a:rPr>
-              <a:t>AI 에이전트가 코드를 스스로 설계/작성하고 에러도 스스로 디버깅 진행</a:t>
-            </a:r>
-          </a:p>
-          <a:p>
-            <a:pPr lvl="1">
-              <a:lnSpc>
-                <a:spcPct val="120000"/>
-              </a:lnSpc>
-              <a:spcAft>
-                <a:spcPts val="800"/>
-              </a:spcAft>
-              <a:defRPr>
-                <a:latin typeface="Malgun Gothic"/>
-              </a:defRPr>
-            </a:pPr>
-            <a:r>
-              <a:rPr b="1" sz="1800">
-                <a:solidFill>
-                  <a:srgbClr val="93C5FD"/>
-                </a:solidFill>
-              </a:rPr>
-              <a:t>3. 검증 및 지휘: </a:t>
-            </a:r>
-            <a:r>
-              <a:rPr sz="1600">
-                <a:solidFill>
-                  <a:srgbClr val="CBD5E1"/>
-                </a:solidFill>
-              </a:rPr>
-              <a:t>사람은 소스 코드를 일일이 뜯어보지 않고, 구현된 완성본을 보면서 추가 수정 피드백(지휘)만 수행</a:t>
+              <a:t>AI와 다단계 검증 및 질의응답 피드백을 통해 최종 기획서 PPTX 완성 (바이브 코딩)</a:t>
             </a:r>
           </a:p>
         </p:txBody>
@@ -7774,4 +7917,324 @@
   </a:objectDefaults>
   <a:extraClrSchemeLst/>
 </a:theme>
+</file>
+
+<file path=ppt/theme/theme2.xml><?xml version="1.0" encoding="utf-8"?>
+<a:theme xmlns:a="http://schemas.openxmlformats.org/drawingml/2006/main" name="Office Theme">
+  <a:themeElements>
+    <a:clrScheme name="Office">
+      <a:dk1>
+        <a:sysClr val="windowText" lastClr="000000"/>
+      </a:dk1>
+      <a:lt1>
+        <a:sysClr val="window" lastClr="FFFFFF"/>
+      </a:lt1>
+      <a:dk2>
+        <a:srgbClr val="1F497D"/>
+      </a:dk2>
+      <a:lt2>
+        <a:srgbClr val="EEECE1"/>
+      </a:lt2>
+      <a:accent1>
+        <a:srgbClr val="4F81BD"/>
+      </a:accent1>
+      <a:accent2>
+        <a:srgbClr val="C0504D"/>
+      </a:accent2>
+      <a:accent3>
+        <a:srgbClr val="9BBB59"/>
+      </a:accent3>
+      <a:accent4>
+        <a:srgbClr val="8064A2"/>
+      </a:accent4>
+      <a:accent5>
+        <a:srgbClr val="4BACC6"/>
+      </a:accent5>
+      <a:accent6>
+        <a:srgbClr val="F79646"/>
+      </a:accent6>
+      <a:hlink>
+        <a:srgbClr val="0000FF"/>
+      </a:hlink>
+      <a:folHlink>
+        <a:srgbClr val="800080"/>
+      </a:folHlink>
+    </a:clrScheme>
+    <a:fontScheme name="Office">
+      <a:majorFont>
+        <a:latin typeface="Calibri"/>
+        <a:ea typeface=""/>
+        <a:cs typeface=""/>
+        <a:font script="Jpan" typeface="ＭＳ Ｐゴシック"/>
+        <a:font script="Hang" typeface="맑은 고딕"/>
+        <a:font script="Hans" typeface="宋体"/>
+        <a:font script="Hant" typeface="新細明體"/>
+        <a:font script="Arab" typeface="Times New Roman"/>
+        <a:font script="Hebr" typeface="Times New Roman"/>
+        <a:font script="Thai" typeface="Angsana New"/>
+        <a:font script="Ethi" typeface="Nyala"/>
+        <a:font script="Beng" typeface="Vrinda"/>
+        <a:font script="Gujr" typeface="Shruti"/>
+        <a:font script="Khmr" typeface="MoolBoran"/>
+        <a:font script="Knda" typeface="Tunga"/>
+        <a:font script="Guru" typeface="Raavi"/>
+        <a:font script="Cans" typeface="Euphemia"/>
+        <a:font script="Cher" typeface="Plantagenet Cherokee"/>
+        <a:font script="Yiii" typeface="Microsoft Yi Baiti"/>
+        <a:font script="Tibt" typeface="Microsoft Himalaya"/>
+        <a:font script="Thaa" typeface="MV Boli"/>
+        <a:font script="Deva" typeface="Mangal"/>
+        <a:font script="Telu" typeface="Gautami"/>
+        <a:font script="Taml" typeface="Latha"/>
+        <a:font script="Syrc" typeface="Estrangelo Edessa"/>
+        <a:font script="Orya" typeface="Kalinga"/>
+        <a:font script="Mlym" typeface="Kartika"/>
+        <a:font script="Laoo" typeface="DokChampa"/>
+        <a:font script="Sinh" typeface="Iskoola Pota"/>
+        <a:font script="Mong" typeface="Mongolian Baiti"/>
+        <a:font script="Viet" typeface="Times New Roman"/>
+        <a:font script="Uigh" typeface="Microsoft Uighur"/>
+        <a:font script="Geor" typeface="Sylfaen"/>
+      </a:majorFont>
+      <a:minorFont>
+        <a:latin typeface="Calibri"/>
+        <a:ea typeface=""/>
+        <a:cs typeface=""/>
+        <a:font script="Jpan" typeface="ＭＳ Ｐゴシック"/>
+        <a:font script="Hang" typeface="맑은 고딕"/>
+        <a:font script="Hans" typeface="宋体"/>
+        <a:font script="Hant" typeface="新細明體"/>
+        <a:font script="Arab" typeface="Arial"/>
+        <a:font script="Hebr" typeface="Arial"/>
+        <a:font script="Thai" typeface="Cordia New"/>
+        <a:font script="Ethi" typeface="Nyala"/>
+        <a:font script="Beng" typeface="Vrinda"/>
+        <a:font script="Gujr" typeface="Shruti"/>
+        <a:font script="Khmr" typeface="DaunPenh"/>
+        <a:font script="Knda" typeface="Tunga"/>
+        <a:font script="Guru" typeface="Raavi"/>
+        <a:font script="Cans" typeface="Euphemia"/>
+        <a:font script="Cher" typeface="Plantagenet Cherokee"/>
+        <a:font script="Yiii" typeface="Microsoft Yi Baiti"/>
+        <a:font script="Tibt" typeface="Microsoft Himalaya"/>
+        <a:font script="Thaa" typeface="MV Boli"/>
+        <a:font script="Deva" typeface="Mangal"/>
+        <a:font script="Telu" typeface="Gautami"/>
+        <a:font script="Taml" typeface="Latha"/>
+        <a:font script="Syrc" typeface="Estrangelo Edessa"/>
+        <a:font script="Orya" typeface="Kalinga"/>
+        <a:font script="Mlym" typeface="Kartika"/>
+        <a:font script="Laoo" typeface="DokChampa"/>
+        <a:font script="Sinh" typeface="Iskoola Pota"/>
+        <a:font script="Mong" typeface="Mongolian Baiti"/>
+        <a:font script="Viet" typeface="Arial"/>
+        <a:font script="Uigh" typeface="Microsoft Uighur"/>
+        <a:font script="Geor" typeface="Sylfaen"/>
+      </a:minorFont>
+    </a:fontScheme>
+    <a:fmtScheme name="Office">
+      <a:fillStyleLst>
+        <a:solidFill>
+          <a:schemeClr val="phClr"/>
+        </a:solidFill>
+        <a:gradFill rotWithShape="1">
+          <a:gsLst>
+            <a:gs pos="0">
+              <a:schemeClr val="phClr">
+                <a:tint val="50000"/>
+                <a:satMod val="300000"/>
+              </a:schemeClr>
+            </a:gs>
+            <a:gs pos="35000">
+              <a:schemeClr val="phClr">
+                <a:tint val="37000"/>
+                <a:satMod val="300000"/>
+              </a:schemeClr>
+            </a:gs>
+            <a:gs pos="100000">
+              <a:schemeClr val="phClr">
+                <a:tint val="15000"/>
+                <a:satMod val="350000"/>
+              </a:schemeClr>
+            </a:gs>
+          </a:gsLst>
+          <a:lin ang="16200000" scaled="1"/>
+        </a:gradFill>
+        <a:gradFill rotWithShape="1">
+          <a:gsLst>
+            <a:gs pos="0">
+              <a:schemeClr val="phClr">
+                <a:tint val="100000"/>
+                <a:shade val="100000"/>
+                <a:satMod val="130000"/>
+              </a:schemeClr>
+            </a:gs>
+            <a:gs pos="100000">
+              <a:schemeClr val="phClr">
+                <a:tint val="50000"/>
+                <a:shade val="100000"/>
+                <a:satMod val="350000"/>
+              </a:schemeClr>
+            </a:gs>
+          </a:gsLst>
+          <a:lin ang="16200000" scaled="0"/>
+        </a:gradFill>
+      </a:fillStyleLst>
+      <a:lnStyleLst>
+        <a:ln w="9525" cap="flat" cmpd="sng" algn="ctr">
+          <a:solidFill>
+            <a:schemeClr val="phClr">
+              <a:shade val="95000"/>
+              <a:satMod val="105000"/>
+            </a:schemeClr>
+          </a:solidFill>
+          <a:prstDash val="solid"/>
+        </a:ln>
+        <a:ln w="25400" cap="flat" cmpd="sng" algn="ctr">
+          <a:solidFill>
+            <a:schemeClr val="phClr"/>
+          </a:solidFill>
+          <a:prstDash val="solid"/>
+        </a:ln>
+        <a:ln w="38100" cap="flat" cmpd="sng" algn="ctr">
+          <a:solidFill>
+            <a:schemeClr val="phClr"/>
+          </a:solidFill>
+          <a:prstDash val="solid"/>
+        </a:ln>
+      </a:lnStyleLst>
+      <a:effectStyleLst>
+        <a:effectStyle>
+          <a:effectLst>
+            <a:outerShdw blurRad="40000" dist="20000" dir="5400000" rotWithShape="0">
+              <a:srgbClr val="000000">
+                <a:alpha val="38000"/>
+              </a:srgbClr>
+            </a:outerShdw>
+          </a:effectLst>
+        </a:effectStyle>
+        <a:effectStyle>
+          <a:effectLst>
+            <a:outerShdw blurRad="40000" dist="23000" dir="5400000" rotWithShape="0">
+              <a:srgbClr val="000000">
+                <a:alpha val="35000"/>
+              </a:srgbClr>
+            </a:outerShdw>
+          </a:effectLst>
+        </a:effectStyle>
+        <a:effectStyle>
+          <a:effectLst>
+            <a:outerShdw blurRad="40000" dist="23000" dir="5400000" rotWithShape="0">
+              <a:srgbClr val="000000">
+                <a:alpha val="35000"/>
+              </a:srgbClr>
+            </a:outerShdw>
+          </a:effectLst>
+          <a:scene3d>
+            <a:camera prst="orthographicFront">
+              <a:rot lat="0" lon="0" rev="0"/>
+            </a:camera>
+            <a:lightRig rig="threePt" dir="t">
+              <a:rot lat="0" lon="0" rev="1200000"/>
+            </a:lightRig>
+          </a:scene3d>
+          <a:sp3d>
+            <a:bevelT w="63500" h="25400"/>
+          </a:sp3d>
+        </a:effectStyle>
+      </a:effectStyleLst>
+      <a:bgFillStyleLst>
+        <a:solidFill>
+          <a:schemeClr val="phClr"/>
+        </a:solidFill>
+        <a:gradFill rotWithShape="1">
+          <a:gsLst>
+            <a:gs pos="0">
+              <a:schemeClr val="phClr">
+                <a:tint val="40000"/>
+                <a:satMod val="350000"/>
+              </a:schemeClr>
+            </a:gs>
+            <a:gs pos="40000">
+              <a:schemeClr val="phClr">
+                <a:tint val="45000"/>
+                <a:shade val="99000"/>
+                <a:satMod val="350000"/>
+              </a:schemeClr>
+            </a:gs>
+            <a:gs pos="100000">
+              <a:schemeClr val="phClr">
+                <a:shade val="20000"/>
+                <a:satMod val="255000"/>
+              </a:schemeClr>
+            </a:gs>
+          </a:gsLst>
+          <a:path path="circle">
+            <a:fillToRect l="50000" t="-80000" r="50000" b="180000"/>
+          </a:path>
+        </a:gradFill>
+        <a:gradFill rotWithShape="1">
+          <a:gsLst>
+            <a:gs pos="0">
+              <a:schemeClr val="phClr">
+                <a:tint val="80000"/>
+                <a:satMod val="300000"/>
+              </a:schemeClr>
+            </a:gs>
+            <a:gs pos="100000">
+              <a:schemeClr val="phClr">
+                <a:shade val="30000"/>
+                <a:satMod val="200000"/>
+              </a:schemeClr>
+            </a:gs>
+          </a:gsLst>
+          <a:path path="circle">
+            <a:fillToRect l="50000" t="50000" r="50000" b="50000"/>
+          </a:path>
+        </a:gradFill>
+      </a:bgFillStyleLst>
+    </a:fmtScheme>
+  </a:themeElements>
+  <a:objectDefaults>
+    <a:spDef>
+      <a:spPr/>
+      <a:bodyPr/>
+      <a:lstStyle/>
+      <a:style>
+        <a:lnRef idx="1">
+          <a:schemeClr val="accent1"/>
+        </a:lnRef>
+        <a:fillRef idx="3">
+          <a:schemeClr val="accent1"/>
+        </a:fillRef>
+        <a:effectRef idx="2">
+          <a:schemeClr val="accent1"/>
+        </a:effectRef>
+        <a:fontRef idx="minor">
+          <a:schemeClr val="lt1"/>
+        </a:fontRef>
+      </a:style>
+    </a:spDef>
+    <a:lnDef>
+      <a:spPr/>
+      <a:bodyPr/>
+      <a:lstStyle/>
+      <a:style>
+        <a:lnRef idx="2">
+          <a:schemeClr val="accent1"/>
+        </a:lnRef>
+        <a:fillRef idx="0">
+          <a:schemeClr val="accent1"/>
+        </a:fillRef>
+        <a:effectRef idx="1">
+          <a:schemeClr val="accent1"/>
+        </a:effectRef>
+        <a:fontRef idx="minor">
+          <a:schemeClr val="tx1"/>
+        </a:fontRef>
+      </a:style>
+    </a:lnDef>
+  </a:objectDefaults>
+  <a:extraClrSchemeLst/>
+</a:theme>
 </file>
--- a/AI_companion_lecture.pptx
+++ b/AI_companion_lecture.pptx
@@ -560,6 +560,336 @@
 </p:notes>
 </file>
 
+<file path=ppt/notesSlides/notesSlide10.xml><?xml version="1.0" encoding="utf-8"?>
+<p:notes xmlns:a="http://schemas.openxmlformats.org/drawingml/2006/main" xmlns:p="http://schemas.openxmlformats.org/presentationml/2006/main" xmlns:r="http://schemas.openxmlformats.org/officeDocument/2006/relationships">
+  <p:cSld>
+    <p:spTree>
+      <p:nvGrpSpPr>
+        <p:cNvPr id="1" name=""/>
+        <p:cNvGrpSpPr/>
+        <p:nvPr/>
+      </p:nvGrpSpPr>
+      <p:grpSpPr>
+        <a:xfrm>
+          <a:off x="0" y="0"/>
+          <a:ext cx="0" cy="0"/>
+          <a:chOff x="0" y="0"/>
+          <a:chExt cx="0" cy="0"/>
+        </a:xfrm>
+      </p:grpSpPr>
+      <p:sp>
+        <p:nvSpPr>
+          <p:cNvPr id="2" name="Slide Image Placeholder 1"/>
+          <p:cNvSpPr>
+            <a:spLocks noGrp="1"/>
+          </p:cNvSpPr>
+          <p:nvPr>
+            <p:ph type="sldImg" idx="2"/>
+          </p:nvPr>
+        </p:nvSpPr>
+        <p:spPr/>
+      </p:sp>
+      <p:sp>
+        <p:nvSpPr>
+          <p:cNvPr id="3" name="Notes Placeholder 2"/>
+          <p:cNvSpPr>
+            <a:spLocks noGrp="1"/>
+          </p:cNvSpPr>
+          <p:nvPr>
+            <p:ph type="body" idx="3" sz="quarter"/>
+          </p:nvPr>
+        </p:nvSpPr>
+        <p:spPr/>
+        <p:txBody>
+          <a:bodyPr/>
+          <a:lstStyle/>
+          <a:p/>
+        </p:txBody>
+      </p:sp>
+      <p:sp>
+        <p:nvSpPr>
+          <p:cNvPr id="4" name="Slide Number Placeholder 3"/>
+          <p:cNvSpPr>
+            <a:spLocks noGrp="1"/>
+          </p:cNvSpPr>
+          <p:nvPr>
+            <p:ph type="sldNum" idx="5" sz="quarter"/>
+          </p:nvPr>
+        </p:nvSpPr>
+        <p:spPr/>
+      </p:sp>
+    </p:spTree>
+  </p:cSld>
+  <p:clrMapOvr>
+    <a:masterClrMapping/>
+  </p:clrMapOvr>
+</p:notes>
+</file>
+
+<file path=ppt/notesSlides/notesSlide11.xml><?xml version="1.0" encoding="utf-8"?>
+<p:notes xmlns:a="http://schemas.openxmlformats.org/drawingml/2006/main" xmlns:p="http://schemas.openxmlformats.org/presentationml/2006/main" xmlns:r="http://schemas.openxmlformats.org/officeDocument/2006/relationships">
+  <p:cSld>
+    <p:spTree>
+      <p:nvGrpSpPr>
+        <p:cNvPr id="1" name=""/>
+        <p:cNvGrpSpPr/>
+        <p:nvPr/>
+      </p:nvGrpSpPr>
+      <p:grpSpPr>
+        <a:xfrm>
+          <a:off x="0" y="0"/>
+          <a:ext cx="0" cy="0"/>
+          <a:chOff x="0" y="0"/>
+          <a:chExt cx="0" cy="0"/>
+        </a:xfrm>
+      </p:grpSpPr>
+      <p:sp>
+        <p:nvSpPr>
+          <p:cNvPr id="2" name="Slide Image Placeholder 1"/>
+          <p:cNvSpPr>
+            <a:spLocks noGrp="1"/>
+          </p:cNvSpPr>
+          <p:nvPr>
+            <p:ph type="sldImg" idx="2"/>
+          </p:nvPr>
+        </p:nvSpPr>
+        <p:spPr/>
+      </p:sp>
+      <p:sp>
+        <p:nvSpPr>
+          <p:cNvPr id="3" name="Notes Placeholder 2"/>
+          <p:cNvSpPr>
+            <a:spLocks noGrp="1"/>
+          </p:cNvSpPr>
+          <p:nvPr>
+            <p:ph type="body" idx="3" sz="quarter"/>
+          </p:nvPr>
+        </p:nvSpPr>
+        <p:spPr/>
+        <p:txBody>
+          <a:bodyPr/>
+          <a:lstStyle/>
+          <a:p/>
+        </p:txBody>
+      </p:sp>
+      <p:sp>
+        <p:nvSpPr>
+          <p:cNvPr id="4" name="Slide Number Placeholder 3"/>
+          <p:cNvSpPr>
+            <a:spLocks noGrp="1"/>
+          </p:cNvSpPr>
+          <p:nvPr>
+            <p:ph type="sldNum" idx="5" sz="quarter"/>
+          </p:nvPr>
+        </p:nvSpPr>
+        <p:spPr/>
+      </p:sp>
+    </p:spTree>
+  </p:cSld>
+  <p:clrMapOvr>
+    <a:masterClrMapping/>
+  </p:clrMapOvr>
+</p:notes>
+</file>
+
+<file path=ppt/notesSlides/notesSlide12.xml><?xml version="1.0" encoding="utf-8"?>
+<p:notes xmlns:a="http://schemas.openxmlformats.org/drawingml/2006/main" xmlns:p="http://schemas.openxmlformats.org/presentationml/2006/main" xmlns:r="http://schemas.openxmlformats.org/officeDocument/2006/relationships">
+  <p:cSld>
+    <p:spTree>
+      <p:nvGrpSpPr>
+        <p:cNvPr id="1" name=""/>
+        <p:cNvGrpSpPr/>
+        <p:nvPr/>
+      </p:nvGrpSpPr>
+      <p:grpSpPr>
+        <a:xfrm>
+          <a:off x="0" y="0"/>
+          <a:ext cx="0" cy="0"/>
+          <a:chOff x="0" y="0"/>
+          <a:chExt cx="0" cy="0"/>
+        </a:xfrm>
+      </p:grpSpPr>
+      <p:sp>
+        <p:nvSpPr>
+          <p:cNvPr id="2" name="Slide Image Placeholder 1"/>
+          <p:cNvSpPr>
+            <a:spLocks noGrp="1"/>
+          </p:cNvSpPr>
+          <p:nvPr>
+            <p:ph type="sldImg" idx="2"/>
+          </p:nvPr>
+        </p:nvSpPr>
+        <p:spPr/>
+      </p:sp>
+      <p:sp>
+        <p:nvSpPr>
+          <p:cNvPr id="3" name="Notes Placeholder 2"/>
+          <p:cNvSpPr>
+            <a:spLocks noGrp="1"/>
+          </p:cNvSpPr>
+          <p:nvPr>
+            <p:ph type="body" idx="3" sz="quarter"/>
+          </p:nvPr>
+        </p:nvSpPr>
+        <p:spPr/>
+        <p:txBody>
+          <a:bodyPr/>
+          <a:lstStyle/>
+          <a:p/>
+        </p:txBody>
+      </p:sp>
+      <p:sp>
+        <p:nvSpPr>
+          <p:cNvPr id="4" name="Slide Number Placeholder 3"/>
+          <p:cNvSpPr>
+            <a:spLocks noGrp="1"/>
+          </p:cNvSpPr>
+          <p:nvPr>
+            <p:ph type="sldNum" idx="5" sz="quarter"/>
+          </p:nvPr>
+        </p:nvSpPr>
+        <p:spPr/>
+      </p:sp>
+    </p:spTree>
+  </p:cSld>
+  <p:clrMapOvr>
+    <a:masterClrMapping/>
+  </p:clrMapOvr>
+</p:notes>
+</file>
+
+<file path=ppt/notesSlides/notesSlide13.xml><?xml version="1.0" encoding="utf-8"?>
+<p:notes xmlns:a="http://schemas.openxmlformats.org/drawingml/2006/main" xmlns:p="http://schemas.openxmlformats.org/presentationml/2006/main" xmlns:r="http://schemas.openxmlformats.org/officeDocument/2006/relationships">
+  <p:cSld>
+    <p:spTree>
+      <p:nvGrpSpPr>
+        <p:cNvPr id="1" name=""/>
+        <p:cNvGrpSpPr/>
+        <p:nvPr/>
+      </p:nvGrpSpPr>
+      <p:grpSpPr>
+        <a:xfrm>
+          <a:off x="0" y="0"/>
+          <a:ext cx="0" cy="0"/>
+          <a:chOff x="0" y="0"/>
+          <a:chExt cx="0" cy="0"/>
+        </a:xfrm>
+      </p:grpSpPr>
+      <p:sp>
+        <p:nvSpPr>
+          <p:cNvPr id="2" name="Slide Image Placeholder 1"/>
+          <p:cNvSpPr>
+            <a:spLocks noGrp="1"/>
+          </p:cNvSpPr>
+          <p:nvPr>
+            <p:ph type="sldImg" idx="2"/>
+          </p:nvPr>
+        </p:nvSpPr>
+        <p:spPr/>
+      </p:sp>
+      <p:sp>
+        <p:nvSpPr>
+          <p:cNvPr id="3" name="Notes Placeholder 2"/>
+          <p:cNvSpPr>
+            <a:spLocks noGrp="1"/>
+          </p:cNvSpPr>
+          <p:nvPr>
+            <p:ph type="body" idx="3" sz="quarter"/>
+          </p:nvPr>
+        </p:nvSpPr>
+        <p:spPr/>
+        <p:txBody>
+          <a:bodyPr/>
+          <a:lstStyle/>
+          <a:p/>
+        </p:txBody>
+      </p:sp>
+      <p:sp>
+        <p:nvSpPr>
+          <p:cNvPr id="4" name="Slide Number Placeholder 3"/>
+          <p:cNvSpPr>
+            <a:spLocks noGrp="1"/>
+          </p:cNvSpPr>
+          <p:nvPr>
+            <p:ph type="sldNum" idx="5" sz="quarter"/>
+          </p:nvPr>
+        </p:nvSpPr>
+        <p:spPr/>
+      </p:sp>
+    </p:spTree>
+  </p:cSld>
+  <p:clrMapOvr>
+    <a:masterClrMapping/>
+  </p:clrMapOvr>
+</p:notes>
+</file>
+
+<file path=ppt/notesSlides/notesSlide14.xml><?xml version="1.0" encoding="utf-8"?>
+<p:notes xmlns:a="http://schemas.openxmlformats.org/drawingml/2006/main" xmlns:p="http://schemas.openxmlformats.org/presentationml/2006/main" xmlns:r="http://schemas.openxmlformats.org/officeDocument/2006/relationships">
+  <p:cSld>
+    <p:spTree>
+      <p:nvGrpSpPr>
+        <p:cNvPr id="1" name=""/>
+        <p:cNvGrpSpPr/>
+        <p:nvPr/>
+      </p:nvGrpSpPr>
+      <p:grpSpPr>
+        <a:xfrm>
+          <a:off x="0" y="0"/>
+          <a:ext cx="0" cy="0"/>
+          <a:chOff x="0" y="0"/>
+          <a:chExt cx="0" cy="0"/>
+        </a:xfrm>
+      </p:grpSpPr>
+      <p:sp>
+        <p:nvSpPr>
+          <p:cNvPr id="2" name="Slide Image Placeholder 1"/>
+          <p:cNvSpPr>
+            <a:spLocks noGrp="1"/>
+          </p:cNvSpPr>
+          <p:nvPr>
+            <p:ph type="sldImg" idx="2"/>
+          </p:nvPr>
+        </p:nvSpPr>
+        <p:spPr/>
+      </p:sp>
+      <p:sp>
+        <p:nvSpPr>
+          <p:cNvPr id="3" name="Notes Placeholder 2"/>
+          <p:cNvSpPr>
+            <a:spLocks noGrp="1"/>
+          </p:cNvSpPr>
+          <p:nvPr>
+            <p:ph type="body" idx="3" sz="quarter"/>
+          </p:nvPr>
+        </p:nvSpPr>
+        <p:spPr/>
+        <p:txBody>
+          <a:bodyPr/>
+          <a:lstStyle/>
+          <a:p/>
+        </p:txBody>
+      </p:sp>
+      <p:sp>
+        <p:nvSpPr>
+          <p:cNvPr id="4" name="Slide Number Placeholder 3"/>
+          <p:cNvSpPr>
+            <a:spLocks noGrp="1"/>
+          </p:cNvSpPr>
+          <p:nvPr>
+            <p:ph type="sldNum" idx="5" sz="quarter"/>
+          </p:nvPr>
+        </p:nvSpPr>
+        <p:spPr/>
+      </p:sp>
+    </p:spTree>
+  </p:cSld>
+  <p:clrMapOvr>
+    <a:masterClrMapping/>
+  </p:clrMapOvr>
+</p:notes>
+</file>
+
 <file path=ppt/notesSlides/notesSlide2.xml><?xml version="1.0" encoding="utf-8"?>
 <p:notes xmlns:a="http://schemas.openxmlformats.org/drawingml/2006/main" xmlns:p="http://schemas.openxmlformats.org/presentationml/2006/main" xmlns:r="http://schemas.openxmlformats.org/officeDocument/2006/relationships">
   <p:cSld>
@@ -618,6 +948,468 @@
               <a:t>"우리가 원하는 답변을 단번에 정확하게 얻어내기 위해 R-C-T-F 네 가지 요소를 꼭 기억하세요."</a:t>
             </a:r>
           </a:p>
+        </p:txBody>
+      </p:sp>
+      <p:sp>
+        <p:nvSpPr>
+          <p:cNvPr id="4" name="Slide Number Placeholder 3"/>
+          <p:cNvSpPr>
+            <a:spLocks noGrp="1"/>
+          </p:cNvSpPr>
+          <p:nvPr>
+            <p:ph type="sldNum" idx="5" sz="quarter"/>
+          </p:nvPr>
+        </p:nvSpPr>
+        <p:spPr/>
+      </p:sp>
+    </p:spTree>
+  </p:cSld>
+  <p:clrMapOvr>
+    <a:masterClrMapping/>
+  </p:clrMapOvr>
+</p:notes>
+</file>
+
+<file path=ppt/notesSlides/notesSlide3.xml><?xml version="1.0" encoding="utf-8"?>
+<p:notes xmlns:a="http://schemas.openxmlformats.org/drawingml/2006/main" xmlns:p="http://schemas.openxmlformats.org/presentationml/2006/main" xmlns:r="http://schemas.openxmlformats.org/officeDocument/2006/relationships">
+  <p:cSld>
+    <p:spTree>
+      <p:nvGrpSpPr>
+        <p:cNvPr id="1" name=""/>
+        <p:cNvGrpSpPr/>
+        <p:nvPr/>
+      </p:nvGrpSpPr>
+      <p:grpSpPr>
+        <a:xfrm>
+          <a:off x="0" y="0"/>
+          <a:ext cx="0" cy="0"/>
+          <a:chOff x="0" y="0"/>
+          <a:chExt cx="0" cy="0"/>
+        </a:xfrm>
+      </p:grpSpPr>
+      <p:sp>
+        <p:nvSpPr>
+          <p:cNvPr id="2" name="Slide Image Placeholder 1"/>
+          <p:cNvSpPr>
+            <a:spLocks noGrp="1"/>
+          </p:cNvSpPr>
+          <p:nvPr>
+            <p:ph type="sldImg" idx="2"/>
+          </p:nvPr>
+        </p:nvSpPr>
+        <p:spPr/>
+      </p:sp>
+      <p:sp>
+        <p:nvSpPr>
+          <p:cNvPr id="3" name="Notes Placeholder 2"/>
+          <p:cNvSpPr>
+            <a:spLocks noGrp="1"/>
+          </p:cNvSpPr>
+          <p:nvPr>
+            <p:ph type="body" idx="3" sz="quarter"/>
+          </p:nvPr>
+        </p:nvSpPr>
+        <p:spPr/>
+        <p:txBody>
+          <a:bodyPr/>
+          <a:lstStyle/>
+          <a:p/>
+        </p:txBody>
+      </p:sp>
+      <p:sp>
+        <p:nvSpPr>
+          <p:cNvPr id="4" name="Slide Number Placeholder 3"/>
+          <p:cNvSpPr>
+            <a:spLocks noGrp="1"/>
+          </p:cNvSpPr>
+          <p:nvPr>
+            <p:ph type="sldNum" idx="5" sz="quarter"/>
+          </p:nvPr>
+        </p:nvSpPr>
+        <p:spPr/>
+      </p:sp>
+    </p:spTree>
+  </p:cSld>
+  <p:clrMapOvr>
+    <a:masterClrMapping/>
+  </p:clrMapOvr>
+</p:notes>
+</file>
+
+<file path=ppt/notesSlides/notesSlide4.xml><?xml version="1.0" encoding="utf-8"?>
+<p:notes xmlns:a="http://schemas.openxmlformats.org/drawingml/2006/main" xmlns:p="http://schemas.openxmlformats.org/presentationml/2006/main" xmlns:r="http://schemas.openxmlformats.org/officeDocument/2006/relationships">
+  <p:cSld>
+    <p:spTree>
+      <p:nvGrpSpPr>
+        <p:cNvPr id="1" name=""/>
+        <p:cNvGrpSpPr/>
+        <p:nvPr/>
+      </p:nvGrpSpPr>
+      <p:grpSpPr>
+        <a:xfrm>
+          <a:off x="0" y="0"/>
+          <a:ext cx="0" cy="0"/>
+          <a:chOff x="0" y="0"/>
+          <a:chExt cx="0" cy="0"/>
+        </a:xfrm>
+      </p:grpSpPr>
+      <p:sp>
+        <p:nvSpPr>
+          <p:cNvPr id="2" name="Slide Image Placeholder 1"/>
+          <p:cNvSpPr>
+            <a:spLocks noGrp="1"/>
+          </p:cNvSpPr>
+          <p:nvPr>
+            <p:ph type="sldImg" idx="2"/>
+          </p:nvPr>
+        </p:nvSpPr>
+        <p:spPr/>
+      </p:sp>
+      <p:sp>
+        <p:nvSpPr>
+          <p:cNvPr id="3" name="Notes Placeholder 2"/>
+          <p:cNvSpPr>
+            <a:spLocks noGrp="1"/>
+          </p:cNvSpPr>
+          <p:nvPr>
+            <p:ph type="body" idx="3" sz="quarter"/>
+          </p:nvPr>
+        </p:nvSpPr>
+        <p:spPr/>
+        <p:txBody>
+          <a:bodyPr/>
+          <a:lstStyle/>
+          <a:p/>
+        </p:txBody>
+      </p:sp>
+      <p:sp>
+        <p:nvSpPr>
+          <p:cNvPr id="4" name="Slide Number Placeholder 3"/>
+          <p:cNvSpPr>
+            <a:spLocks noGrp="1"/>
+          </p:cNvSpPr>
+          <p:nvPr>
+            <p:ph type="sldNum" idx="5" sz="quarter"/>
+          </p:nvPr>
+        </p:nvSpPr>
+        <p:spPr/>
+      </p:sp>
+    </p:spTree>
+  </p:cSld>
+  <p:clrMapOvr>
+    <a:masterClrMapping/>
+  </p:clrMapOvr>
+</p:notes>
+</file>
+
+<file path=ppt/notesSlides/notesSlide5.xml><?xml version="1.0" encoding="utf-8"?>
+<p:notes xmlns:a="http://schemas.openxmlformats.org/drawingml/2006/main" xmlns:p="http://schemas.openxmlformats.org/presentationml/2006/main" xmlns:r="http://schemas.openxmlformats.org/officeDocument/2006/relationships">
+  <p:cSld>
+    <p:spTree>
+      <p:nvGrpSpPr>
+        <p:cNvPr id="1" name=""/>
+        <p:cNvGrpSpPr/>
+        <p:nvPr/>
+      </p:nvGrpSpPr>
+      <p:grpSpPr>
+        <a:xfrm>
+          <a:off x="0" y="0"/>
+          <a:ext cx="0" cy="0"/>
+          <a:chOff x="0" y="0"/>
+          <a:chExt cx="0" cy="0"/>
+        </a:xfrm>
+      </p:grpSpPr>
+      <p:sp>
+        <p:nvSpPr>
+          <p:cNvPr id="2" name="Slide Image Placeholder 1"/>
+          <p:cNvSpPr>
+            <a:spLocks noGrp="1"/>
+          </p:cNvSpPr>
+          <p:nvPr>
+            <p:ph type="sldImg" idx="2"/>
+          </p:nvPr>
+        </p:nvSpPr>
+        <p:spPr/>
+      </p:sp>
+      <p:sp>
+        <p:nvSpPr>
+          <p:cNvPr id="3" name="Notes Placeholder 2"/>
+          <p:cNvSpPr>
+            <a:spLocks noGrp="1"/>
+          </p:cNvSpPr>
+          <p:nvPr>
+            <p:ph type="body" idx="3" sz="quarter"/>
+          </p:nvPr>
+        </p:nvSpPr>
+        <p:spPr/>
+        <p:txBody>
+          <a:bodyPr/>
+          <a:lstStyle/>
+          <a:p/>
+        </p:txBody>
+      </p:sp>
+      <p:sp>
+        <p:nvSpPr>
+          <p:cNvPr id="4" name="Slide Number Placeholder 3"/>
+          <p:cNvSpPr>
+            <a:spLocks noGrp="1"/>
+          </p:cNvSpPr>
+          <p:nvPr>
+            <p:ph type="sldNum" idx="5" sz="quarter"/>
+          </p:nvPr>
+        </p:nvSpPr>
+        <p:spPr/>
+      </p:sp>
+    </p:spTree>
+  </p:cSld>
+  <p:clrMapOvr>
+    <a:masterClrMapping/>
+  </p:clrMapOvr>
+</p:notes>
+</file>
+
+<file path=ppt/notesSlides/notesSlide6.xml><?xml version="1.0" encoding="utf-8"?>
+<p:notes xmlns:a="http://schemas.openxmlformats.org/drawingml/2006/main" xmlns:p="http://schemas.openxmlformats.org/presentationml/2006/main" xmlns:r="http://schemas.openxmlformats.org/officeDocument/2006/relationships">
+  <p:cSld>
+    <p:spTree>
+      <p:nvGrpSpPr>
+        <p:cNvPr id="1" name=""/>
+        <p:cNvGrpSpPr/>
+        <p:nvPr/>
+      </p:nvGrpSpPr>
+      <p:grpSpPr>
+        <a:xfrm>
+          <a:off x="0" y="0"/>
+          <a:ext cx="0" cy="0"/>
+          <a:chOff x="0" y="0"/>
+          <a:chExt cx="0" cy="0"/>
+        </a:xfrm>
+      </p:grpSpPr>
+      <p:sp>
+        <p:nvSpPr>
+          <p:cNvPr id="2" name="Slide Image Placeholder 1"/>
+          <p:cNvSpPr>
+            <a:spLocks noGrp="1"/>
+          </p:cNvSpPr>
+          <p:nvPr>
+            <p:ph type="sldImg" idx="2"/>
+          </p:nvPr>
+        </p:nvSpPr>
+        <p:spPr/>
+      </p:sp>
+      <p:sp>
+        <p:nvSpPr>
+          <p:cNvPr id="3" name="Notes Placeholder 2"/>
+          <p:cNvSpPr>
+            <a:spLocks noGrp="1"/>
+          </p:cNvSpPr>
+          <p:nvPr>
+            <p:ph type="body" idx="3" sz="quarter"/>
+          </p:nvPr>
+        </p:nvSpPr>
+        <p:spPr/>
+        <p:txBody>
+          <a:bodyPr/>
+          <a:lstStyle/>
+          <a:p/>
+        </p:txBody>
+      </p:sp>
+      <p:sp>
+        <p:nvSpPr>
+          <p:cNvPr id="4" name="Slide Number Placeholder 3"/>
+          <p:cNvSpPr>
+            <a:spLocks noGrp="1"/>
+          </p:cNvSpPr>
+          <p:nvPr>
+            <p:ph type="sldNum" idx="5" sz="quarter"/>
+          </p:nvPr>
+        </p:nvSpPr>
+        <p:spPr/>
+      </p:sp>
+    </p:spTree>
+  </p:cSld>
+  <p:clrMapOvr>
+    <a:masterClrMapping/>
+  </p:clrMapOvr>
+</p:notes>
+</file>
+
+<file path=ppt/notesSlides/notesSlide7.xml><?xml version="1.0" encoding="utf-8"?>
+<p:notes xmlns:a="http://schemas.openxmlformats.org/drawingml/2006/main" xmlns:p="http://schemas.openxmlformats.org/presentationml/2006/main" xmlns:r="http://schemas.openxmlformats.org/officeDocument/2006/relationships">
+  <p:cSld>
+    <p:spTree>
+      <p:nvGrpSpPr>
+        <p:cNvPr id="1" name=""/>
+        <p:cNvGrpSpPr/>
+        <p:nvPr/>
+      </p:nvGrpSpPr>
+      <p:grpSpPr>
+        <a:xfrm>
+          <a:off x="0" y="0"/>
+          <a:ext cx="0" cy="0"/>
+          <a:chOff x="0" y="0"/>
+          <a:chExt cx="0" cy="0"/>
+        </a:xfrm>
+      </p:grpSpPr>
+      <p:sp>
+        <p:nvSpPr>
+          <p:cNvPr id="2" name="Slide Image Placeholder 1"/>
+          <p:cNvSpPr>
+            <a:spLocks noGrp="1"/>
+          </p:cNvSpPr>
+          <p:nvPr>
+            <p:ph type="sldImg" idx="2"/>
+          </p:nvPr>
+        </p:nvSpPr>
+        <p:spPr/>
+      </p:sp>
+      <p:sp>
+        <p:nvSpPr>
+          <p:cNvPr id="3" name="Notes Placeholder 2"/>
+          <p:cNvSpPr>
+            <a:spLocks noGrp="1"/>
+          </p:cNvSpPr>
+          <p:nvPr>
+            <p:ph type="body" idx="3" sz="quarter"/>
+          </p:nvPr>
+        </p:nvSpPr>
+        <p:spPr/>
+        <p:txBody>
+          <a:bodyPr/>
+          <a:lstStyle/>
+          <a:p/>
+        </p:txBody>
+      </p:sp>
+      <p:sp>
+        <p:nvSpPr>
+          <p:cNvPr id="4" name="Slide Number Placeholder 3"/>
+          <p:cNvSpPr>
+            <a:spLocks noGrp="1"/>
+          </p:cNvSpPr>
+          <p:nvPr>
+            <p:ph type="sldNum" idx="5" sz="quarter"/>
+          </p:nvPr>
+        </p:nvSpPr>
+        <p:spPr/>
+      </p:sp>
+    </p:spTree>
+  </p:cSld>
+  <p:clrMapOvr>
+    <a:masterClrMapping/>
+  </p:clrMapOvr>
+</p:notes>
+</file>
+
+<file path=ppt/notesSlides/notesSlide8.xml><?xml version="1.0" encoding="utf-8"?>
+<p:notes xmlns:a="http://schemas.openxmlformats.org/drawingml/2006/main" xmlns:p="http://schemas.openxmlformats.org/presentationml/2006/main" xmlns:r="http://schemas.openxmlformats.org/officeDocument/2006/relationships">
+  <p:cSld>
+    <p:spTree>
+      <p:nvGrpSpPr>
+        <p:cNvPr id="1" name=""/>
+        <p:cNvGrpSpPr/>
+        <p:nvPr/>
+      </p:nvGrpSpPr>
+      <p:grpSpPr>
+        <a:xfrm>
+          <a:off x="0" y="0"/>
+          <a:ext cx="0" cy="0"/>
+          <a:chOff x="0" y="0"/>
+          <a:chExt cx="0" cy="0"/>
+        </a:xfrm>
+      </p:grpSpPr>
+      <p:sp>
+        <p:nvSpPr>
+          <p:cNvPr id="2" name="Slide Image Placeholder 1"/>
+          <p:cNvSpPr>
+            <a:spLocks noGrp="1"/>
+          </p:cNvSpPr>
+          <p:nvPr>
+            <p:ph type="sldImg" idx="2"/>
+          </p:nvPr>
+        </p:nvSpPr>
+        <p:spPr/>
+      </p:sp>
+      <p:sp>
+        <p:nvSpPr>
+          <p:cNvPr id="3" name="Notes Placeholder 2"/>
+          <p:cNvSpPr>
+            <a:spLocks noGrp="1"/>
+          </p:cNvSpPr>
+          <p:nvPr>
+            <p:ph type="body" idx="3" sz="quarter"/>
+          </p:nvPr>
+        </p:nvSpPr>
+        <p:spPr/>
+        <p:txBody>
+          <a:bodyPr/>
+          <a:lstStyle/>
+          <a:p/>
+        </p:txBody>
+      </p:sp>
+      <p:sp>
+        <p:nvSpPr>
+          <p:cNvPr id="4" name="Slide Number Placeholder 3"/>
+          <p:cNvSpPr>
+            <a:spLocks noGrp="1"/>
+          </p:cNvSpPr>
+          <p:nvPr>
+            <p:ph type="sldNum" idx="5" sz="quarter"/>
+          </p:nvPr>
+        </p:nvSpPr>
+        <p:spPr/>
+      </p:sp>
+    </p:spTree>
+  </p:cSld>
+  <p:clrMapOvr>
+    <a:masterClrMapping/>
+  </p:clrMapOvr>
+</p:notes>
+</file>
+
+<file path=ppt/notesSlides/notesSlide9.xml><?xml version="1.0" encoding="utf-8"?>
+<p:notes xmlns:a="http://schemas.openxmlformats.org/drawingml/2006/main" xmlns:p="http://schemas.openxmlformats.org/presentationml/2006/main" xmlns:r="http://schemas.openxmlformats.org/officeDocument/2006/relationships">
+  <p:cSld>
+    <p:spTree>
+      <p:nvGrpSpPr>
+        <p:cNvPr id="1" name=""/>
+        <p:cNvGrpSpPr/>
+        <p:nvPr/>
+      </p:nvGrpSpPr>
+      <p:grpSpPr>
+        <a:xfrm>
+          <a:off x="0" y="0"/>
+          <a:ext cx="0" cy="0"/>
+          <a:chOff x="0" y="0"/>
+          <a:chExt cx="0" cy="0"/>
+        </a:xfrm>
+      </p:grpSpPr>
+      <p:sp>
+        <p:nvSpPr>
+          <p:cNvPr id="2" name="Slide Image Placeholder 1"/>
+          <p:cNvSpPr>
+            <a:spLocks noGrp="1"/>
+          </p:cNvSpPr>
+          <p:nvPr>
+            <p:ph type="sldImg" idx="2"/>
+          </p:nvPr>
+        </p:nvSpPr>
+        <p:spPr/>
+      </p:sp>
+      <p:sp>
+        <p:nvSpPr>
+          <p:cNvPr id="3" name="Notes Placeholder 2"/>
+          <p:cNvSpPr>
+            <a:spLocks noGrp="1"/>
+          </p:cNvSpPr>
+          <p:nvPr>
+            <p:ph type="body" idx="3" sz="quarter"/>
+          </p:nvPr>
+        </p:nvSpPr>
+        <p:spPr/>
+        <p:txBody>
+          <a:bodyPr/>
+          <a:lstStyle/>
+          <a:p/>
         </p:txBody>
       </p:sp>
       <p:sp>
@@ -4753,7 +5545,7 @@
                   <a:srgbClr val="93C5FD"/>
                 </a:solidFill>
               </a:rPr>
-              <a:t>• 1차 결과 검증 (Request): </a:t>
+              <a:t>• 1차 결과 검증 (피드백): </a:t>
             </a:r>
             <a:r>
               <a:rPr sz="1600">
@@ -4761,7 +5553,7 @@
                   <a:srgbClr val="CBD5E1"/>
                 </a:solidFill>
               </a:rPr>
-              <a:t>"비가 올 경우, 햇볕이 너무 강할 경우에 대한 야외 대비책이 안 되어 있어."</a:t>
+              <a:t>"배가올경우(비가 올 경우) 햇볓이 너무 강할 경우에 대한 대비가 안되어 있어."</a:t>
             </a:r>
           </a:p>
           <a:p>
@@ -4782,7 +5574,7 @@
                   <a:srgbClr val="93C5FD"/>
                 </a:solidFill>
               </a:rPr>
-              <a:t>• 2차 결과 검증 (Question): </a:t>
+              <a:t>• 2차 결과 검증 (디테일 조율): </a:t>
             </a:r>
             <a:r>
               <a:rPr sz="1600">
@@ -4790,7 +5582,7 @@
                   <a:srgbClr val="CBD5E1"/>
                 </a:solidFill>
               </a:rPr>
-              <a:t>"기본적인 음악을 깔아두는 게 좋을까? 그럼 어떤 음악들이 좋을까?"</a:t>
+              <a:t>"기본적인 음악을 깔아두는게 좋을까? 그럼 어떤 음악들이 좋을까?"</a:t>
             </a:r>
           </a:p>
           <a:p>
@@ -5678,7 +6470,7 @@
                   <a:srgbClr val="CBD5E1"/>
                 </a:solidFill>
               </a:rPr>
-              <a:t>대답만 잘하는 AI가 아니라, 주어진 목표를 완수해주는 AI 시대 도입 (예: 책 추천을 넘어 직접 전자책을 구매해서 읽고 요약까지 수행)</a:t>
+              <a:t>대답 잘하는 AI가 아니라, 주어진 목표를 완수해주는 AI 시대가 왔습니다. (예: 책 추천을 넘어 직접 전자책을 구매해서 읽고 요약까지 수행)</a:t>
             </a:r>
           </a:p>
           <a:p>
@@ -5707,7 +6499,7 @@
                   <a:srgbClr val="CBD5E1"/>
                 </a:solidFill>
               </a:rPr>
-              <a:t>텍스트를 넘어 이미지, 음성, 영상을 완벽히 이해하고 창작하는 AI 시대 (예: 지브리 스타일 애니메이션 자가 구현)</a:t>
+              <a:t>텍스트뿐만 아니라 이미지, 음성, 영상을 이해하고 생성하는 AI 시대가 왔습니다. (예: 지브리 애니메이션 자가 구현)</a:t>
             </a:r>
           </a:p>
           <a:p>
@@ -5765,7 +6557,7 @@
                   <a:srgbClr val="CBD5E1"/>
                 </a:solidFill>
               </a:rPr>
-              <a:t>로보틱스와 AI가 접목되어 로봇이 스스로 환경을 인식/판단하고 육체적인 작업 수행 (예: 계란후라이 노른자를 안 터트리고 뒤집기 성공)</a:t>
+              <a:t>로보틱스와 AI가 접목되어 로봇이 스스로 환경을 인식/판단하고 육체적인 작업 수행 (예: 계란후라이 뒤집기 성공)</a:t>
             </a:r>
           </a:p>
         </p:txBody>
@@ -5967,7 +6759,7 @@
                   <a:srgbClr val="CBD5E1"/>
                 </a:solidFill>
               </a:rPr>
-              <a:t>"단계적으로 차근차근 생각해봐"를 유도해 풀이 과정을 스스로 적으며 추론 오답률을 획기적으로 축소</a:t>
+              <a:t>"단계별로 차근차근 생각해줘"를 통해 AI의 추론 논리력과 계산 정확도를 획기적으로 상승</a:t>
             </a:r>
           </a:p>
           <a:p>
@@ -6256,7 +7048,7 @@
                   <a:srgbClr val="CBD5E1"/>
                 </a:solidFill>
               </a:rPr>
-              <a:t>구체적인 본인의 상황과 제한 조건 (예: "무릎 약하신 60대 어머니와 초등학생 자녀 오사카 3박 4일 여행")</a:t>
+              <a:t>구체적인 본인의 상황과 제한 조건 (예: "무릎 약하신 60대 어머니와 초등학생 자녀의 3박 4일 여행")</a:t>
             </a:r>
           </a:p>
           <a:p>
@@ -6285,7 +7077,7 @@
                   <a:srgbClr val="CBD5E1"/>
                 </a:solidFill>
               </a:rPr>
-              <a:t>실행해야 할 구체적인 미션 (예: "어머니의 무릎 무리를 줄이기 위해 걸음을 최소화한 동선 제안")</a:t>
+              <a:t>수행할 구체적인 미션 (예: "이동 걸음 수를 최소화하는 유니버셜 스튜디오 코스 설계")</a:t>
             </a:r>
           </a:p>
           <a:p>
@@ -6487,7 +7279,7 @@
                   <a:srgbClr val="CBD5E1"/>
                 </a:solidFill>
               </a:rPr>
-              <a:t>복잡한 문제 해결 시 바로 답을 요구하지 않고 풀이 과정을 유도하여 오답률을 최소화합니다.</a:t>
+              <a:t>복잡한 문제 해결 시 바로 답을 구하기보다 논리적 절차를 순차적으로 생각하게 유도합니다.</a:t>
             </a:r>
           </a:p>
           <a:p>
@@ -6950,7 +7742,7 @@
                   <a:srgbClr val="CBD5E1"/>
                 </a:solidFill>
               </a:rPr>
-              <a:t>"로블록스에서 외국인과 대화하고 싶어. 님! 제발 사냥터 A 같이 깨주시면 안될까요?" (1개 예시 제공)</a:t>
+              <a:t>"로블록스에서 외국인과 대화하고 싶어. 님! 제발 사냥터 A 같이 깨주시면 안될까요?"</a:t>
             </a:r>
           </a:p>
           <a:p>
@@ -7268,7 +8060,7 @@
                   <a:srgbClr val="CBD5E1"/>
                 </a:solidFill>
               </a:rPr>
-              <a:t>"외국인과 게임을 같이 하기 위해 실시간 번역해주는 앱을 만들고 싶어"라고 자연어로 설명</a:t>
+              <a:t>"외국인과 게임을 같이 하기 위해 실시간 번역해주는 앱을 만들고 싶어"라고 설명</a:t>
             </a:r>
           </a:p>
           <a:p>
@@ -7557,7 +8349,7 @@
                   <a:srgbClr val="CBD5E1"/>
                 </a:solidFill>
               </a:rPr>
-              <a:t>분모 통분하는 법을 가르치는 친절한 설명 및 음성(TTS)용 멘트 작성 (COT)</a:t>
+              <a:t>통분하는 법을 가르치는 친절한 설명 및 음성(TTS)용 멘트 작성 (COT)</a:t>
             </a:r>
           </a:p>
           <a:p>
